--- a/Task4_Supply Chain Issue Compliance Report.pptx
+++ b/Task4_Supply Chain Issue Compliance Report.pptx
@@ -1,8 +1,8 @@
 
 <file path=ppt/presentation.xml><?xml version="1.0" encoding="utf-8"?>
-<p:presentation xmlns:a="http://schemas.openxmlformats.org/drawingml/2006/main" xmlns:r="http://schemas.openxmlformats.org/officeDocument/2006/relationships" xmlns:p="http://schemas.openxmlformats.org/presentationml/2006/main" saveSubsetFonts="1" autoCompressPictures="0">
+<p:presentation xmlns:a="http://schemas.openxmlformats.org/drawingml/2006/main" xmlns:r="http://schemas.openxmlformats.org/officeDocument/2006/relationships" xmlns:p="http://schemas.openxmlformats.org/presentationml/2006/main" embedTrueTypeFonts="1" autoCompressPictures="0">
   <p:sldMasterIdLst>
-    <p:sldMasterId id="2147483648" r:id="rId1"/>
+    <p:sldMasterId id="2147483679" r:id="rId1"/>
   </p:sldMasterIdLst>
   <p:notesMasterIdLst>
     <p:notesMasterId r:id="rId7"/>
@@ -14,9 +14,28 @@
     <p:sldId id="259" r:id="rId5"/>
     <p:sldId id="260" r:id="rId6"/>
   </p:sldIdLst>
-  <p:sldSz cx="9144000" cy="5143500" type="screen16x9"/>
-  <p:notesSz cx="5143500" cy="9144000"/>
+  <p:sldSz cx="12192000" cy="6858000"/>
+  <p:notesSz cx="6858000" cy="9144000"/>
+  <p:embeddedFontLst>
+    <p:embeddedFont>
+      <p:font typeface="Johnson Display" panose="020B0604020202020204" charset="0"/>
+      <p:regular r:id="rId8"/>
+      <p:bold r:id="rId9"/>
+      <p:italic r:id="rId10"/>
+      <p:boldItalic r:id="rId11"/>
+    </p:embeddedFont>
+    <p:embeddedFont>
+      <p:font typeface="Johnson Text" panose="020B0604020202020204" charset="0"/>
+      <p:regular r:id="rId12"/>
+      <p:bold r:id="rId13"/>
+      <p:italic r:id="rId14"/>
+      <p:boldItalic r:id="rId15"/>
+    </p:embeddedFont>
+  </p:embeddedFontLst>
   <p:defaultTextStyle>
+    <a:defPPr>
+      <a:defRPr lang="en-US"/>
+    </a:defPPr>
     <a:lvl1pPr marL="0" algn="l" defTabSz="914400" rtl="0" eaLnBrk="1" latinLnBrk="0" hangingPunct="1">
       <a:defRPr sz="1800" kern="1200">
         <a:solidFill>
@@ -108,7 +127,443 @@
       </a:defRPr>
     </a:lvl9pPr>
   </p:defaultTextStyle>
+  <p:extLst>
+    <p:ext uri="{EFAFB233-063F-42B5-8137-9DF3F51BA10A}">
+      <p15:sldGuideLst xmlns:p15="http://schemas.microsoft.com/office/powerpoint/2012/main"/>
+    </p:ext>
+  </p:extLst>
 </p:presentation>
+</file>
+
+<file path=ppt/changesInfos/changesInfo1.xml><?xml version="1.0" encoding="utf-8"?>
+<pc:chgInfo xmlns:a="http://schemas.openxmlformats.org/drawingml/2006/main" xmlns:r="http://schemas.openxmlformats.org/officeDocument/2006/relationships" xmlns:ac="http://schemas.microsoft.com/office/drawing/2013/main/command" xmlns:pc="http://schemas.microsoft.com/office/powerpoint/2013/main/command">
+  <pc:docChgLst>
+    <pc:chgData name="Rudnikova, Maria [JANRU]" userId="e474e582-7f21-4f06-b7c5-fa1b94107321" providerId="ADAL" clId="{8CC3AA0E-8E52-4B1E-9432-1FBA4BCCB42B}"/>
+    <pc:docChg chg="custSel mod modSld addMainMaster delMainMaster modNotesMaster setSldSz">
+      <pc:chgData name="Rudnikova, Maria [JANRU]" userId="e474e582-7f21-4f06-b7c5-fa1b94107321" providerId="ADAL" clId="{8CC3AA0E-8E52-4B1E-9432-1FBA4BCCB42B}" dt="2026-05-27T08:06:57.425" v="0" actId="26606"/>
+      <pc:docMkLst>
+        <pc:docMk/>
+      </pc:docMkLst>
+      <pc:sldChg chg="modSp mod setBg modClrScheme chgLayout modNotes">
+        <pc:chgData name="Rudnikova, Maria [JANRU]" userId="e474e582-7f21-4f06-b7c5-fa1b94107321" providerId="ADAL" clId="{8CC3AA0E-8E52-4B1E-9432-1FBA4BCCB42B}" dt="2026-05-27T08:06:57.425" v="0" actId="26606"/>
+        <pc:sldMkLst>
+          <pc:docMk/>
+          <pc:sldMk cId="0" sldId="256"/>
+        </pc:sldMkLst>
+        <pc:spChg chg="mod">
+          <ac:chgData name="Rudnikova, Maria [JANRU]" userId="e474e582-7f21-4f06-b7c5-fa1b94107321" providerId="ADAL" clId="{8CC3AA0E-8E52-4B1E-9432-1FBA4BCCB42B}" dt="2026-05-27T08:06:57.425" v="0" actId="26606"/>
+          <ac:spMkLst>
+            <pc:docMk/>
+            <pc:sldMk cId="0" sldId="256"/>
+            <ac:spMk id="2" creationId="{00000000-0000-0000-0000-000000000000}"/>
+          </ac:spMkLst>
+        </pc:spChg>
+        <pc:spChg chg="mod">
+          <ac:chgData name="Rudnikova, Maria [JANRU]" userId="e474e582-7f21-4f06-b7c5-fa1b94107321" providerId="ADAL" clId="{8CC3AA0E-8E52-4B1E-9432-1FBA4BCCB42B}" dt="2026-05-27T08:06:57.425" v="0" actId="26606"/>
+          <ac:spMkLst>
+            <pc:docMk/>
+            <pc:sldMk cId="0" sldId="256"/>
+            <ac:spMk id="3" creationId="{00000000-0000-0000-0000-000000000000}"/>
+          </ac:spMkLst>
+        </pc:spChg>
+        <pc:spChg chg="mod">
+          <ac:chgData name="Rudnikova, Maria [JANRU]" userId="e474e582-7f21-4f06-b7c5-fa1b94107321" providerId="ADAL" clId="{8CC3AA0E-8E52-4B1E-9432-1FBA4BCCB42B}" dt="2026-05-27T08:06:57.425" v="0" actId="26606"/>
+          <ac:spMkLst>
+            <pc:docMk/>
+            <pc:sldMk cId="0" sldId="256"/>
+            <ac:spMk id="4" creationId="{00000000-0000-0000-0000-000000000000}"/>
+          </ac:spMkLst>
+        </pc:spChg>
+        <pc:spChg chg="mod">
+          <ac:chgData name="Rudnikova, Maria [JANRU]" userId="e474e582-7f21-4f06-b7c5-fa1b94107321" providerId="ADAL" clId="{8CC3AA0E-8E52-4B1E-9432-1FBA4BCCB42B}" dt="2026-05-27T08:06:57.425" v="0" actId="26606"/>
+          <ac:spMkLst>
+            <pc:docMk/>
+            <pc:sldMk cId="0" sldId="256"/>
+            <ac:spMk id="5" creationId="{00000000-0000-0000-0000-000000000000}"/>
+          </ac:spMkLst>
+        </pc:spChg>
+        <pc:spChg chg="mod">
+          <ac:chgData name="Rudnikova, Maria [JANRU]" userId="e474e582-7f21-4f06-b7c5-fa1b94107321" providerId="ADAL" clId="{8CC3AA0E-8E52-4B1E-9432-1FBA4BCCB42B}" dt="2026-05-27T08:06:57.425" v="0" actId="26606"/>
+          <ac:spMkLst>
+            <pc:docMk/>
+            <pc:sldMk cId="0" sldId="256"/>
+            <ac:spMk id="6" creationId="{00000000-0000-0000-0000-000000000000}"/>
+          </ac:spMkLst>
+        </pc:spChg>
+        <pc:spChg chg="mod">
+          <ac:chgData name="Rudnikova, Maria [JANRU]" userId="e474e582-7f21-4f06-b7c5-fa1b94107321" providerId="ADAL" clId="{8CC3AA0E-8E52-4B1E-9432-1FBA4BCCB42B}" dt="2026-05-27T08:06:57.425" v="0" actId="26606"/>
+          <ac:spMkLst>
+            <pc:docMk/>
+            <pc:sldMk cId="0" sldId="256"/>
+            <ac:spMk id="7" creationId="{00000000-0000-0000-0000-000000000000}"/>
+          </ac:spMkLst>
+        </pc:spChg>
+        <pc:spChg chg="mod">
+          <ac:chgData name="Rudnikova, Maria [JANRU]" userId="e474e582-7f21-4f06-b7c5-fa1b94107321" providerId="ADAL" clId="{8CC3AA0E-8E52-4B1E-9432-1FBA4BCCB42B}" dt="2026-05-27T08:06:57.425" v="0" actId="26606"/>
+          <ac:spMkLst>
+            <pc:docMk/>
+            <pc:sldMk cId="0" sldId="256"/>
+            <ac:spMk id="8" creationId="{00000000-0000-0000-0000-000000000000}"/>
+          </ac:spMkLst>
+        </pc:spChg>
+      </pc:sldChg>
+      <pc:sldChg chg="modSp mod setBg modClrScheme chgLayout modNotes">
+        <pc:chgData name="Rudnikova, Maria [JANRU]" userId="e474e582-7f21-4f06-b7c5-fa1b94107321" providerId="ADAL" clId="{8CC3AA0E-8E52-4B1E-9432-1FBA4BCCB42B}" dt="2026-05-27T08:06:57.425" v="0" actId="26606"/>
+        <pc:sldMkLst>
+          <pc:docMk/>
+          <pc:sldMk cId="0" sldId="257"/>
+        </pc:sldMkLst>
+        <pc:spChg chg="mod">
+          <ac:chgData name="Rudnikova, Maria [JANRU]" userId="e474e582-7f21-4f06-b7c5-fa1b94107321" providerId="ADAL" clId="{8CC3AA0E-8E52-4B1E-9432-1FBA4BCCB42B}" dt="2026-05-27T08:06:57.425" v="0" actId="26606"/>
+          <ac:spMkLst>
+            <pc:docMk/>
+            <pc:sldMk cId="0" sldId="257"/>
+            <ac:spMk id="4" creationId="{00000000-0000-0000-0000-000000000000}"/>
+          </ac:spMkLst>
+        </pc:spChg>
+        <pc:spChg chg="mod">
+          <ac:chgData name="Rudnikova, Maria [JANRU]" userId="e474e582-7f21-4f06-b7c5-fa1b94107321" providerId="ADAL" clId="{8CC3AA0E-8E52-4B1E-9432-1FBA4BCCB42B}" dt="2026-05-27T08:06:57.425" v="0" actId="26606"/>
+          <ac:spMkLst>
+            <pc:docMk/>
+            <pc:sldMk cId="0" sldId="257"/>
+            <ac:spMk id="6" creationId="{00000000-0000-0000-0000-000000000000}"/>
+          </ac:spMkLst>
+        </pc:spChg>
+        <pc:spChg chg="mod">
+          <ac:chgData name="Rudnikova, Maria [JANRU]" userId="e474e582-7f21-4f06-b7c5-fa1b94107321" providerId="ADAL" clId="{8CC3AA0E-8E52-4B1E-9432-1FBA4BCCB42B}" dt="2026-05-27T08:06:57.425" v="0" actId="26606"/>
+          <ac:spMkLst>
+            <pc:docMk/>
+            <pc:sldMk cId="0" sldId="257"/>
+            <ac:spMk id="10" creationId="{00000000-0000-0000-0000-000000000000}"/>
+          </ac:spMkLst>
+        </pc:spChg>
+        <pc:spChg chg="mod">
+          <ac:chgData name="Rudnikova, Maria [JANRU]" userId="e474e582-7f21-4f06-b7c5-fa1b94107321" providerId="ADAL" clId="{8CC3AA0E-8E52-4B1E-9432-1FBA4BCCB42B}" dt="2026-05-27T08:06:57.425" v="0" actId="26606"/>
+          <ac:spMkLst>
+            <pc:docMk/>
+            <pc:sldMk cId="0" sldId="257"/>
+            <ac:spMk id="12" creationId="{00000000-0000-0000-0000-000000000000}"/>
+          </ac:spMkLst>
+        </pc:spChg>
+        <pc:spChg chg="mod">
+          <ac:chgData name="Rudnikova, Maria [JANRU]" userId="e474e582-7f21-4f06-b7c5-fa1b94107321" providerId="ADAL" clId="{8CC3AA0E-8E52-4B1E-9432-1FBA4BCCB42B}" dt="2026-05-27T08:06:57.425" v="0" actId="26606"/>
+          <ac:spMkLst>
+            <pc:docMk/>
+            <pc:sldMk cId="0" sldId="257"/>
+            <ac:spMk id="13" creationId="{00000000-0000-0000-0000-000000000000}"/>
+          </ac:spMkLst>
+        </pc:spChg>
+        <pc:spChg chg="mod">
+          <ac:chgData name="Rudnikova, Maria [JANRU]" userId="e474e582-7f21-4f06-b7c5-fa1b94107321" providerId="ADAL" clId="{8CC3AA0E-8E52-4B1E-9432-1FBA4BCCB42B}" dt="2026-05-27T08:06:57.425" v="0" actId="26606"/>
+          <ac:spMkLst>
+            <pc:docMk/>
+            <pc:sldMk cId="0" sldId="257"/>
+            <ac:spMk id="14" creationId="{00000000-0000-0000-0000-000000000000}"/>
+          </ac:spMkLst>
+        </pc:spChg>
+        <pc:spChg chg="mod">
+          <ac:chgData name="Rudnikova, Maria [JANRU]" userId="e474e582-7f21-4f06-b7c5-fa1b94107321" providerId="ADAL" clId="{8CC3AA0E-8E52-4B1E-9432-1FBA4BCCB42B}" dt="2026-05-27T08:06:57.425" v="0" actId="26606"/>
+          <ac:spMkLst>
+            <pc:docMk/>
+            <pc:sldMk cId="0" sldId="257"/>
+            <ac:spMk id="15" creationId="{00000000-0000-0000-0000-000000000000}"/>
+          </ac:spMkLst>
+        </pc:spChg>
+        <pc:spChg chg="mod">
+          <ac:chgData name="Rudnikova, Maria [JANRU]" userId="e474e582-7f21-4f06-b7c5-fa1b94107321" providerId="ADAL" clId="{8CC3AA0E-8E52-4B1E-9432-1FBA4BCCB42B}" dt="2026-05-27T08:06:57.425" v="0" actId="26606"/>
+          <ac:spMkLst>
+            <pc:docMk/>
+            <pc:sldMk cId="0" sldId="257"/>
+            <ac:spMk id="16" creationId="{00000000-0000-0000-0000-000000000000}"/>
+          </ac:spMkLst>
+        </pc:spChg>
+        <pc:spChg chg="mod">
+          <ac:chgData name="Rudnikova, Maria [JANRU]" userId="e474e582-7f21-4f06-b7c5-fa1b94107321" providerId="ADAL" clId="{8CC3AA0E-8E52-4B1E-9432-1FBA4BCCB42B}" dt="2026-05-27T08:06:57.425" v="0" actId="26606"/>
+          <ac:spMkLst>
+            <pc:docMk/>
+            <pc:sldMk cId="0" sldId="257"/>
+            <ac:spMk id="20" creationId="{00000000-0000-0000-0000-000000000000}"/>
+          </ac:spMkLst>
+        </pc:spChg>
+        <pc:spChg chg="mod">
+          <ac:chgData name="Rudnikova, Maria [JANRU]" userId="e474e582-7f21-4f06-b7c5-fa1b94107321" providerId="ADAL" clId="{8CC3AA0E-8E52-4B1E-9432-1FBA4BCCB42B}" dt="2026-05-27T08:06:57.425" v="0" actId="26606"/>
+          <ac:spMkLst>
+            <pc:docMk/>
+            <pc:sldMk cId="0" sldId="257"/>
+            <ac:spMk id="21" creationId="{00000000-0000-0000-0000-000000000000}"/>
+          </ac:spMkLst>
+        </pc:spChg>
+      </pc:sldChg>
+      <pc:sldChg chg="modSp mod setBg modClrScheme chgLayout modNotes">
+        <pc:chgData name="Rudnikova, Maria [JANRU]" userId="e474e582-7f21-4f06-b7c5-fa1b94107321" providerId="ADAL" clId="{8CC3AA0E-8E52-4B1E-9432-1FBA4BCCB42B}" dt="2026-05-27T08:06:57.425" v="0" actId="26606"/>
+        <pc:sldMkLst>
+          <pc:docMk/>
+          <pc:sldMk cId="0" sldId="258"/>
+        </pc:sldMkLst>
+        <pc:spChg chg="mod">
+          <ac:chgData name="Rudnikova, Maria [JANRU]" userId="e474e582-7f21-4f06-b7c5-fa1b94107321" providerId="ADAL" clId="{8CC3AA0E-8E52-4B1E-9432-1FBA4BCCB42B}" dt="2026-05-27T08:06:57.425" v="0" actId="26606"/>
+          <ac:spMkLst>
+            <pc:docMk/>
+            <pc:sldMk cId="0" sldId="258"/>
+            <ac:spMk id="4" creationId="{00000000-0000-0000-0000-000000000000}"/>
+          </ac:spMkLst>
+        </pc:spChg>
+        <pc:spChg chg="mod">
+          <ac:chgData name="Rudnikova, Maria [JANRU]" userId="e474e582-7f21-4f06-b7c5-fa1b94107321" providerId="ADAL" clId="{8CC3AA0E-8E52-4B1E-9432-1FBA4BCCB42B}" dt="2026-05-27T08:06:57.425" v="0" actId="26606"/>
+          <ac:spMkLst>
+            <pc:docMk/>
+            <pc:sldMk cId="0" sldId="258"/>
+            <ac:spMk id="5" creationId="{00000000-0000-0000-0000-000000000000}"/>
+          </ac:spMkLst>
+        </pc:spChg>
+        <pc:spChg chg="mod">
+          <ac:chgData name="Rudnikova, Maria [JANRU]" userId="e474e582-7f21-4f06-b7c5-fa1b94107321" providerId="ADAL" clId="{8CC3AA0E-8E52-4B1E-9432-1FBA4BCCB42B}" dt="2026-05-27T08:06:57.425" v="0" actId="26606"/>
+          <ac:spMkLst>
+            <pc:docMk/>
+            <pc:sldMk cId="0" sldId="258"/>
+            <ac:spMk id="6" creationId="{00000000-0000-0000-0000-000000000000}"/>
+          </ac:spMkLst>
+        </pc:spChg>
+        <pc:spChg chg="mod">
+          <ac:chgData name="Rudnikova, Maria [JANRU]" userId="e474e582-7f21-4f06-b7c5-fa1b94107321" providerId="ADAL" clId="{8CC3AA0E-8E52-4B1E-9432-1FBA4BCCB42B}" dt="2026-05-27T08:06:57.425" v="0" actId="26606"/>
+          <ac:spMkLst>
+            <pc:docMk/>
+            <pc:sldMk cId="0" sldId="258"/>
+            <ac:spMk id="7" creationId="{00000000-0000-0000-0000-000000000000}"/>
+          </ac:spMkLst>
+        </pc:spChg>
+        <pc:spChg chg="mod">
+          <ac:chgData name="Rudnikova, Maria [JANRU]" userId="e474e582-7f21-4f06-b7c5-fa1b94107321" providerId="ADAL" clId="{8CC3AA0E-8E52-4B1E-9432-1FBA4BCCB42B}" dt="2026-05-27T08:06:57.425" v="0" actId="26606"/>
+          <ac:spMkLst>
+            <pc:docMk/>
+            <pc:sldMk cId="0" sldId="258"/>
+            <ac:spMk id="10" creationId="{00000000-0000-0000-0000-000000000000}"/>
+          </ac:spMkLst>
+        </pc:spChg>
+        <pc:spChg chg="mod">
+          <ac:chgData name="Rudnikova, Maria [JANRU]" userId="e474e582-7f21-4f06-b7c5-fa1b94107321" providerId="ADAL" clId="{8CC3AA0E-8E52-4B1E-9432-1FBA4BCCB42B}" dt="2026-05-27T08:06:57.425" v="0" actId="26606"/>
+          <ac:spMkLst>
+            <pc:docMk/>
+            <pc:sldMk cId="0" sldId="258"/>
+            <ac:spMk id="12" creationId="{00000000-0000-0000-0000-000000000000}"/>
+          </ac:spMkLst>
+        </pc:spChg>
+        <pc:spChg chg="mod">
+          <ac:chgData name="Rudnikova, Maria [JANRU]" userId="e474e582-7f21-4f06-b7c5-fa1b94107321" providerId="ADAL" clId="{8CC3AA0E-8E52-4B1E-9432-1FBA4BCCB42B}" dt="2026-05-27T08:06:57.425" v="0" actId="26606"/>
+          <ac:spMkLst>
+            <pc:docMk/>
+            <pc:sldMk cId="0" sldId="258"/>
+            <ac:spMk id="13" creationId="{00000000-0000-0000-0000-000000000000}"/>
+          </ac:spMkLst>
+        </pc:spChg>
+        <pc:spChg chg="mod">
+          <ac:chgData name="Rudnikova, Maria [JANRU]" userId="e474e582-7f21-4f06-b7c5-fa1b94107321" providerId="ADAL" clId="{8CC3AA0E-8E52-4B1E-9432-1FBA4BCCB42B}" dt="2026-05-27T08:06:57.425" v="0" actId="26606"/>
+          <ac:spMkLst>
+            <pc:docMk/>
+            <pc:sldMk cId="0" sldId="258"/>
+            <ac:spMk id="14" creationId="{00000000-0000-0000-0000-000000000000}"/>
+          </ac:spMkLst>
+        </pc:spChg>
+        <pc:spChg chg="mod">
+          <ac:chgData name="Rudnikova, Maria [JANRU]" userId="e474e582-7f21-4f06-b7c5-fa1b94107321" providerId="ADAL" clId="{8CC3AA0E-8E52-4B1E-9432-1FBA4BCCB42B}" dt="2026-05-27T08:06:57.425" v="0" actId="26606"/>
+          <ac:spMkLst>
+            <pc:docMk/>
+            <pc:sldMk cId="0" sldId="258"/>
+            <ac:spMk id="15" creationId="{00000000-0000-0000-0000-000000000000}"/>
+          </ac:spMkLst>
+        </pc:spChg>
+        <pc:spChg chg="mod">
+          <ac:chgData name="Rudnikova, Maria [JANRU]" userId="e474e582-7f21-4f06-b7c5-fa1b94107321" providerId="ADAL" clId="{8CC3AA0E-8E52-4B1E-9432-1FBA4BCCB42B}" dt="2026-05-27T08:06:57.425" v="0" actId="26606"/>
+          <ac:spMkLst>
+            <pc:docMk/>
+            <pc:sldMk cId="0" sldId="258"/>
+            <ac:spMk id="17" creationId="{00000000-0000-0000-0000-000000000000}"/>
+          </ac:spMkLst>
+        </pc:spChg>
+      </pc:sldChg>
+      <pc:sldChg chg="modSp mod setBg modClrScheme chgLayout modNotes">
+        <pc:chgData name="Rudnikova, Maria [JANRU]" userId="e474e582-7f21-4f06-b7c5-fa1b94107321" providerId="ADAL" clId="{8CC3AA0E-8E52-4B1E-9432-1FBA4BCCB42B}" dt="2026-05-27T08:06:57.425" v="0" actId="26606"/>
+        <pc:sldMkLst>
+          <pc:docMk/>
+          <pc:sldMk cId="0" sldId="259"/>
+        </pc:sldMkLst>
+        <pc:spChg chg="mod">
+          <ac:chgData name="Rudnikova, Maria [JANRU]" userId="e474e582-7f21-4f06-b7c5-fa1b94107321" providerId="ADAL" clId="{8CC3AA0E-8E52-4B1E-9432-1FBA4BCCB42B}" dt="2026-05-27T08:06:57.425" v="0" actId="26606"/>
+          <ac:spMkLst>
+            <pc:docMk/>
+            <pc:sldMk cId="0" sldId="259"/>
+            <ac:spMk id="2" creationId="{00000000-0000-0000-0000-000000000000}"/>
+          </ac:spMkLst>
+        </pc:spChg>
+        <pc:spChg chg="mod">
+          <ac:chgData name="Rudnikova, Maria [JANRU]" userId="e474e582-7f21-4f06-b7c5-fa1b94107321" providerId="ADAL" clId="{8CC3AA0E-8E52-4B1E-9432-1FBA4BCCB42B}" dt="2026-05-27T08:06:57.425" v="0" actId="26606"/>
+          <ac:spMkLst>
+            <pc:docMk/>
+            <pc:sldMk cId="0" sldId="259"/>
+            <ac:spMk id="3" creationId="{00000000-0000-0000-0000-000000000000}"/>
+          </ac:spMkLst>
+        </pc:spChg>
+        <pc:spChg chg="mod">
+          <ac:chgData name="Rudnikova, Maria [JANRU]" userId="e474e582-7f21-4f06-b7c5-fa1b94107321" providerId="ADAL" clId="{8CC3AA0E-8E52-4B1E-9432-1FBA4BCCB42B}" dt="2026-05-27T08:06:57.425" v="0" actId="26606"/>
+          <ac:spMkLst>
+            <pc:docMk/>
+            <pc:sldMk cId="0" sldId="259"/>
+            <ac:spMk id="4" creationId="{00000000-0000-0000-0000-000000000000}"/>
+          </ac:spMkLst>
+        </pc:spChg>
+        <pc:spChg chg="mod">
+          <ac:chgData name="Rudnikova, Maria [JANRU]" userId="e474e582-7f21-4f06-b7c5-fa1b94107321" providerId="ADAL" clId="{8CC3AA0E-8E52-4B1E-9432-1FBA4BCCB42B}" dt="2026-05-27T08:06:57.425" v="0" actId="26606"/>
+          <ac:spMkLst>
+            <pc:docMk/>
+            <pc:sldMk cId="0" sldId="259"/>
+            <ac:spMk id="6" creationId="{00000000-0000-0000-0000-000000000000}"/>
+          </ac:spMkLst>
+        </pc:spChg>
+        <pc:spChg chg="mod">
+          <ac:chgData name="Rudnikova, Maria [JANRU]" userId="e474e582-7f21-4f06-b7c5-fa1b94107321" providerId="ADAL" clId="{8CC3AA0E-8E52-4B1E-9432-1FBA4BCCB42B}" dt="2026-05-27T08:06:57.425" v="0" actId="26606"/>
+          <ac:spMkLst>
+            <pc:docMk/>
+            <pc:sldMk cId="0" sldId="259"/>
+            <ac:spMk id="7" creationId="{00000000-0000-0000-0000-000000000000}"/>
+          </ac:spMkLst>
+        </pc:spChg>
+        <pc:graphicFrameChg chg="mod">
+          <ac:chgData name="Rudnikova, Maria [JANRU]" userId="e474e582-7f21-4f06-b7c5-fa1b94107321" providerId="ADAL" clId="{8CC3AA0E-8E52-4B1E-9432-1FBA4BCCB42B}" dt="2026-05-27T08:06:57.425" v="0" actId="26606"/>
+          <ac:graphicFrameMkLst>
+            <pc:docMk/>
+            <pc:sldMk cId="0" sldId="259"/>
+            <ac:graphicFrameMk id="5" creationId="{00000000-0000-0000-0000-000000000000}"/>
+          </ac:graphicFrameMkLst>
+        </pc:graphicFrameChg>
+      </pc:sldChg>
+      <pc:sldChg chg="modSp mod setBg modClrScheme chgLayout modNotes">
+        <pc:chgData name="Rudnikova, Maria [JANRU]" userId="e474e582-7f21-4f06-b7c5-fa1b94107321" providerId="ADAL" clId="{8CC3AA0E-8E52-4B1E-9432-1FBA4BCCB42B}" dt="2026-05-27T08:06:57.425" v="0" actId="26606"/>
+        <pc:sldMkLst>
+          <pc:docMk/>
+          <pc:sldMk cId="0" sldId="260"/>
+        </pc:sldMkLst>
+        <pc:spChg chg="mod">
+          <ac:chgData name="Rudnikova, Maria [JANRU]" userId="e474e582-7f21-4f06-b7c5-fa1b94107321" providerId="ADAL" clId="{8CC3AA0E-8E52-4B1E-9432-1FBA4BCCB42B}" dt="2026-05-27T08:06:57.425" v="0" actId="26606"/>
+          <ac:spMkLst>
+            <pc:docMk/>
+            <pc:sldMk cId="0" sldId="260"/>
+            <ac:spMk id="3" creationId="{00000000-0000-0000-0000-000000000000}"/>
+          </ac:spMkLst>
+        </pc:spChg>
+        <pc:spChg chg="mod">
+          <ac:chgData name="Rudnikova, Maria [JANRU]" userId="e474e582-7f21-4f06-b7c5-fa1b94107321" providerId="ADAL" clId="{8CC3AA0E-8E52-4B1E-9432-1FBA4BCCB42B}" dt="2026-05-27T08:06:57.425" v="0" actId="26606"/>
+          <ac:spMkLst>
+            <pc:docMk/>
+            <pc:sldMk cId="0" sldId="260"/>
+            <ac:spMk id="4" creationId="{00000000-0000-0000-0000-000000000000}"/>
+          </ac:spMkLst>
+        </pc:spChg>
+        <pc:spChg chg="mod">
+          <ac:chgData name="Rudnikova, Maria [JANRU]" userId="e474e582-7f21-4f06-b7c5-fa1b94107321" providerId="ADAL" clId="{8CC3AA0E-8E52-4B1E-9432-1FBA4BCCB42B}" dt="2026-05-27T08:06:57.425" v="0" actId="26606"/>
+          <ac:spMkLst>
+            <pc:docMk/>
+            <pc:sldMk cId="0" sldId="260"/>
+            <ac:spMk id="7" creationId="{00000000-0000-0000-0000-000000000000}"/>
+          </ac:spMkLst>
+        </pc:spChg>
+        <pc:spChg chg="mod">
+          <ac:chgData name="Rudnikova, Maria [JANRU]" userId="e474e582-7f21-4f06-b7c5-fa1b94107321" providerId="ADAL" clId="{8CC3AA0E-8E52-4B1E-9432-1FBA4BCCB42B}" dt="2026-05-27T08:06:57.425" v="0" actId="26606"/>
+          <ac:spMkLst>
+            <pc:docMk/>
+            <pc:sldMk cId="0" sldId="260"/>
+            <ac:spMk id="8" creationId="{00000000-0000-0000-0000-000000000000}"/>
+          </ac:spMkLst>
+        </pc:spChg>
+        <pc:spChg chg="mod">
+          <ac:chgData name="Rudnikova, Maria [JANRU]" userId="e474e582-7f21-4f06-b7c5-fa1b94107321" providerId="ADAL" clId="{8CC3AA0E-8E52-4B1E-9432-1FBA4BCCB42B}" dt="2026-05-27T08:06:57.425" v="0" actId="26606"/>
+          <ac:spMkLst>
+            <pc:docMk/>
+            <pc:sldMk cId="0" sldId="260"/>
+            <ac:spMk id="9" creationId="{00000000-0000-0000-0000-000000000000}"/>
+          </ac:spMkLst>
+        </pc:spChg>
+        <pc:spChg chg="mod">
+          <ac:chgData name="Rudnikova, Maria [JANRU]" userId="e474e582-7f21-4f06-b7c5-fa1b94107321" providerId="ADAL" clId="{8CC3AA0E-8E52-4B1E-9432-1FBA4BCCB42B}" dt="2026-05-27T08:06:57.425" v="0" actId="26606"/>
+          <ac:spMkLst>
+            <pc:docMk/>
+            <pc:sldMk cId="0" sldId="260"/>
+            <ac:spMk id="11" creationId="{00000000-0000-0000-0000-000000000000}"/>
+          </ac:spMkLst>
+        </pc:spChg>
+        <pc:spChg chg="mod">
+          <ac:chgData name="Rudnikova, Maria [JANRU]" userId="e474e582-7f21-4f06-b7c5-fa1b94107321" providerId="ADAL" clId="{8CC3AA0E-8E52-4B1E-9432-1FBA4BCCB42B}" dt="2026-05-27T08:06:57.425" v="0" actId="26606"/>
+          <ac:spMkLst>
+            <pc:docMk/>
+            <pc:sldMk cId="0" sldId="260"/>
+            <ac:spMk id="12" creationId="{00000000-0000-0000-0000-000000000000}"/>
+          </ac:spMkLst>
+        </pc:spChg>
+        <pc:spChg chg="mod">
+          <ac:chgData name="Rudnikova, Maria [JANRU]" userId="e474e582-7f21-4f06-b7c5-fa1b94107321" providerId="ADAL" clId="{8CC3AA0E-8E52-4B1E-9432-1FBA4BCCB42B}" dt="2026-05-27T08:06:57.425" v="0" actId="26606"/>
+          <ac:spMkLst>
+            <pc:docMk/>
+            <pc:sldMk cId="0" sldId="260"/>
+            <ac:spMk id="14" creationId="{00000000-0000-0000-0000-000000000000}"/>
+          </ac:spMkLst>
+        </pc:spChg>
+        <pc:spChg chg="mod">
+          <ac:chgData name="Rudnikova, Maria [JANRU]" userId="e474e582-7f21-4f06-b7c5-fa1b94107321" providerId="ADAL" clId="{8CC3AA0E-8E52-4B1E-9432-1FBA4BCCB42B}" dt="2026-05-27T08:06:57.425" v="0" actId="26606"/>
+          <ac:spMkLst>
+            <pc:docMk/>
+            <pc:sldMk cId="0" sldId="260"/>
+            <ac:spMk id="15" creationId="{00000000-0000-0000-0000-000000000000}"/>
+          </ac:spMkLst>
+        </pc:spChg>
+        <pc:spChg chg="mod">
+          <ac:chgData name="Rudnikova, Maria [JANRU]" userId="e474e582-7f21-4f06-b7c5-fa1b94107321" providerId="ADAL" clId="{8CC3AA0E-8E52-4B1E-9432-1FBA4BCCB42B}" dt="2026-05-27T08:06:57.425" v="0" actId="26606"/>
+          <ac:spMkLst>
+            <pc:docMk/>
+            <pc:sldMk cId="0" sldId="260"/>
+            <ac:spMk id="18" creationId="{00000000-0000-0000-0000-000000000000}"/>
+          </ac:spMkLst>
+        </pc:spChg>
+      </pc:sldChg>
+      <pc:sldMasterChg chg="del delSldLayout">
+        <pc:chgData name="Rudnikova, Maria [JANRU]" userId="e474e582-7f21-4f06-b7c5-fa1b94107321" providerId="ADAL" clId="{8CC3AA0E-8E52-4B1E-9432-1FBA4BCCB42B}" dt="2026-05-27T08:06:57.425" v="0" actId="26606"/>
+        <pc:sldMasterMkLst>
+          <pc:docMk/>
+          <pc:sldMasterMk cId="0" sldId="2147483648"/>
+        </pc:sldMasterMkLst>
+        <pc:sldLayoutChg chg="del">
+          <pc:chgData name="Rudnikova, Maria [JANRU]" userId="e474e582-7f21-4f06-b7c5-fa1b94107321" providerId="ADAL" clId="{8CC3AA0E-8E52-4B1E-9432-1FBA4BCCB42B}" dt="2026-05-27T08:06:57.425" v="0" actId="26606"/>
+          <pc:sldLayoutMkLst>
+            <pc:docMk/>
+            <pc:sldMasterMk cId="0" sldId="2147483648"/>
+            <pc:sldLayoutMk cId="0" sldId="2147483649"/>
+          </pc:sldLayoutMkLst>
+        </pc:sldLayoutChg>
+      </pc:sldMasterChg>
+      <pc:sldMasterChg chg="add addSldLayout">
+        <pc:chgData name="Rudnikova, Maria [JANRU]" userId="e474e582-7f21-4f06-b7c5-fa1b94107321" providerId="ADAL" clId="{8CC3AA0E-8E52-4B1E-9432-1FBA4BCCB42B}" dt="2026-05-27T08:06:57.425" v="0" actId="26606"/>
+        <pc:sldMasterMkLst>
+          <pc:docMk/>
+          <pc:sldMasterMk cId="3543768889" sldId="2147483679"/>
+        </pc:sldMasterMkLst>
+        <pc:sldLayoutChg chg="add">
+          <pc:chgData name="Rudnikova, Maria [JANRU]" userId="e474e582-7f21-4f06-b7c5-fa1b94107321" providerId="ADAL" clId="{8CC3AA0E-8E52-4B1E-9432-1FBA4BCCB42B}" dt="2026-05-27T08:06:57.425" v="0" actId="26606"/>
+          <pc:sldLayoutMkLst>
+            <pc:docMk/>
+            <pc:sldMasterMk cId="3543768889" sldId="2147483679"/>
+            <pc:sldLayoutMk cId="2655019450" sldId="2147483680"/>
+          </pc:sldLayoutMkLst>
+        </pc:sldLayoutChg>
+        <pc:sldLayoutChg chg="add">
+          <pc:chgData name="Rudnikova, Maria [JANRU]" userId="e474e582-7f21-4f06-b7c5-fa1b94107321" providerId="ADAL" clId="{8CC3AA0E-8E52-4B1E-9432-1FBA4BCCB42B}" dt="2026-05-27T08:06:57.425" v="0" actId="26606"/>
+          <pc:sldLayoutMkLst>
+            <pc:docMk/>
+            <pc:sldMasterMk cId="3543768889" sldId="2147483679"/>
+            <pc:sldLayoutMk cId="1841252541" sldId="2147483685"/>
+          </pc:sldLayoutMkLst>
+        </pc:sldLayoutChg>
+      </pc:sldMasterChg>
+    </pc:docChg>
+  </pc:docChgLst>
+</pc:chgInfo>
 </file>
 
 <file path=ppt/charts/chart1.xml><?xml version="1.0" encoding="utf-8"?>
@@ -621,61 +1076,296 @@
           <a:chExt cx="0" cy="0"/>
         </a:xfrm>
       </p:grpSpPr>
+      <p:sp>
+        <p:nvSpPr>
+          <p:cNvPr id="2" name="Header Placeholder 1"/>
+          <p:cNvSpPr>
+            <a:spLocks noGrp="1"/>
+          </p:cNvSpPr>
+          <p:nvPr>
+            <p:ph type="hdr" sz="quarter"/>
+          </p:nvPr>
+        </p:nvSpPr>
+        <p:spPr>
+          <a:xfrm>
+            <a:off x="0" y="0"/>
+            <a:ext cx="2971800" cy="458788"/>
+          </a:xfrm>
+          <a:prstGeom prst="rect">
+            <a:avLst/>
+          </a:prstGeom>
+        </p:spPr>
+        <p:txBody>
+          <a:bodyPr vert="horz" lIns="91440" tIns="45720" rIns="91440" bIns="45720" rtlCol="0"/>
+          <a:lstStyle>
+            <a:lvl1pPr algn="l">
+              <a:defRPr sz="1200" b="0" i="0">
+                <a:latin typeface="Johnson Display" pitchFamily="2" charset="77"/>
+              </a:defRPr>
+            </a:lvl1pPr>
+          </a:lstStyle>
+          <a:p>
+            <a:endParaRPr lang="en-US" dirty="0"/>
+          </a:p>
+        </p:txBody>
+      </p:sp>
+      <p:sp>
+        <p:nvSpPr>
+          <p:cNvPr id="3" name="Date Placeholder 2"/>
+          <p:cNvSpPr>
+            <a:spLocks noGrp="1"/>
+          </p:cNvSpPr>
+          <p:nvPr>
+            <p:ph type="dt" idx="1"/>
+          </p:nvPr>
+        </p:nvSpPr>
+        <p:spPr>
+          <a:xfrm>
+            <a:off x="3884613" y="0"/>
+            <a:ext cx="2971800" cy="458788"/>
+          </a:xfrm>
+          <a:prstGeom prst="rect">
+            <a:avLst/>
+          </a:prstGeom>
+        </p:spPr>
+        <p:txBody>
+          <a:bodyPr vert="horz" lIns="91440" tIns="45720" rIns="91440" bIns="45720" rtlCol="0"/>
+          <a:lstStyle>
+            <a:lvl1pPr algn="r">
+              <a:defRPr sz="1200" b="0" i="0">
+                <a:latin typeface="Johnson Display" pitchFamily="2" charset="77"/>
+              </a:defRPr>
+            </a:lvl1pPr>
+          </a:lstStyle>
+          <a:p>
+            <a:fld id="{BA4529F8-1B9C-C04B-A698-DC6C48C547B6}" type="datetimeFigureOut">
+              <a:rPr lang="en-US" smtClean="0"/>
+              <a:pPr/>
+              <a:t>5/27/2026</a:t>
+            </a:fld>
+            <a:endParaRPr lang="en-US" dirty="0"/>
+          </a:p>
+        </p:txBody>
+      </p:sp>
+      <p:sp>
+        <p:nvSpPr>
+          <p:cNvPr id="4" name="Slide Image Placeholder 3"/>
+          <p:cNvSpPr>
+            <a:spLocks noGrp="1" noRot="1" noChangeAspect="1"/>
+          </p:cNvSpPr>
+          <p:nvPr>
+            <p:ph type="sldImg" idx="2"/>
+          </p:nvPr>
+        </p:nvSpPr>
+        <p:spPr>
+          <a:xfrm>
+            <a:off x="685800" y="1143000"/>
+            <a:ext cx="5486400" cy="3086100"/>
+          </a:xfrm>
+          <a:prstGeom prst="rect">
+            <a:avLst/>
+          </a:prstGeom>
+          <a:noFill/>
+          <a:ln w="12700">
+            <a:solidFill>
+              <a:prstClr val="black"/>
+            </a:solidFill>
+          </a:ln>
+        </p:spPr>
+        <p:txBody>
+          <a:bodyPr vert="horz" lIns="91440" tIns="45720" rIns="91440" bIns="45720" rtlCol="0" anchor="ctr"/>
+          <a:lstStyle/>
+          <a:p>
+            <a:endParaRPr lang="en-US" dirty="0"/>
+          </a:p>
+        </p:txBody>
+      </p:sp>
+      <p:sp>
+        <p:nvSpPr>
+          <p:cNvPr id="5" name="Notes Placeholder 4"/>
+          <p:cNvSpPr>
+            <a:spLocks noGrp="1"/>
+          </p:cNvSpPr>
+          <p:nvPr>
+            <p:ph type="body" sz="quarter" idx="3"/>
+          </p:nvPr>
+        </p:nvSpPr>
+        <p:spPr>
+          <a:xfrm>
+            <a:off x="685800" y="4400550"/>
+            <a:ext cx="5486400" cy="3600450"/>
+          </a:xfrm>
+          <a:prstGeom prst="rect">
+            <a:avLst/>
+          </a:prstGeom>
+        </p:spPr>
+        <p:txBody>
+          <a:bodyPr vert="horz" lIns="91440" tIns="45720" rIns="91440" bIns="45720" rtlCol="0"/>
+          <a:lstStyle/>
+          <a:p>
+            <a:pPr lvl="0"/>
+            <a:r>
+              <a:rPr lang="en-GB" dirty="0"/>
+              <a:t>Click to edit Master text styles</a:t>
+            </a:r>
+          </a:p>
+          <a:p>
+            <a:pPr lvl="1"/>
+            <a:r>
+              <a:rPr lang="en-GB" dirty="0"/>
+              <a:t>Second level</a:t>
+            </a:r>
+          </a:p>
+          <a:p>
+            <a:pPr lvl="2"/>
+            <a:r>
+              <a:rPr lang="en-GB" dirty="0"/>
+              <a:t>Third level</a:t>
+            </a:r>
+          </a:p>
+          <a:p>
+            <a:pPr lvl="3"/>
+            <a:r>
+              <a:rPr lang="en-GB" dirty="0"/>
+              <a:t>Fourth level</a:t>
+            </a:r>
+          </a:p>
+          <a:p>
+            <a:pPr lvl="4"/>
+            <a:r>
+              <a:rPr lang="en-GB" dirty="0"/>
+              <a:t>Fifth level</a:t>
+            </a:r>
+            <a:endParaRPr lang="en-US" dirty="0"/>
+          </a:p>
+        </p:txBody>
+      </p:sp>
+      <p:sp>
+        <p:nvSpPr>
+          <p:cNvPr id="6" name="Footer Placeholder 5"/>
+          <p:cNvSpPr>
+            <a:spLocks noGrp="1"/>
+          </p:cNvSpPr>
+          <p:nvPr>
+            <p:ph type="ftr" sz="quarter" idx="4"/>
+          </p:nvPr>
+        </p:nvSpPr>
+        <p:spPr>
+          <a:xfrm>
+            <a:off x="0" y="8685213"/>
+            <a:ext cx="2971800" cy="458787"/>
+          </a:xfrm>
+          <a:prstGeom prst="rect">
+            <a:avLst/>
+          </a:prstGeom>
+        </p:spPr>
+        <p:txBody>
+          <a:bodyPr vert="horz" lIns="91440" tIns="45720" rIns="91440" bIns="45720" rtlCol="0" anchor="b"/>
+          <a:lstStyle>
+            <a:lvl1pPr algn="l">
+              <a:defRPr sz="1200" b="0" i="0">
+                <a:latin typeface="Johnson Display" pitchFamily="2" charset="77"/>
+              </a:defRPr>
+            </a:lvl1pPr>
+          </a:lstStyle>
+          <a:p>
+            <a:endParaRPr lang="en-US" dirty="0"/>
+          </a:p>
+        </p:txBody>
+      </p:sp>
+      <p:sp>
+        <p:nvSpPr>
+          <p:cNvPr id="7" name="Slide Number Placeholder 6"/>
+          <p:cNvSpPr>
+            <a:spLocks noGrp="1"/>
+          </p:cNvSpPr>
+          <p:nvPr>
+            <p:ph type="sldNum" sz="quarter" idx="5"/>
+          </p:nvPr>
+        </p:nvSpPr>
+        <p:spPr>
+          <a:xfrm>
+            <a:off x="3884613" y="8685213"/>
+            <a:ext cx="2971800" cy="458787"/>
+          </a:xfrm>
+          <a:prstGeom prst="rect">
+            <a:avLst/>
+          </a:prstGeom>
+        </p:spPr>
+        <p:txBody>
+          <a:bodyPr vert="horz" lIns="91440" tIns="45720" rIns="91440" bIns="45720" rtlCol="0" anchor="b"/>
+          <a:lstStyle>
+            <a:lvl1pPr algn="r">
+              <a:defRPr sz="1200" b="0" i="0">
+                <a:latin typeface="Johnson Display" pitchFamily="2" charset="77"/>
+              </a:defRPr>
+            </a:lvl1pPr>
+          </a:lstStyle>
+          <a:p>
+            <a:fld id="{08B18E93-EE38-CB4F-AFC1-65CB91DBAD44}" type="slidenum">
+              <a:rPr lang="en-US" smtClean="0"/>
+              <a:pPr/>
+              <a:t>‹#›</a:t>
+            </a:fld>
+            <a:endParaRPr lang="en-US" dirty="0"/>
+          </a:p>
+        </p:txBody>
+      </p:sp>
     </p:spTree>
     <p:extLst>
       <p:ext uri="{BB962C8B-B14F-4D97-AF65-F5344CB8AC3E}">
-        <p14:creationId xmlns:p14="http://schemas.microsoft.com/office/powerpoint/2010/main" val="1112128463"/>
+        <p14:creationId xmlns:p14="http://schemas.microsoft.com/office/powerpoint/2010/main" val="1041574117"/>
       </p:ext>
     </p:extLst>
   </p:cSld>
   <p:clrMap bg1="lt1" tx1="dk1" bg2="lt2" tx2="dk2" accent1="accent1" accent2="accent2" accent3="accent3" accent4="accent4" accent5="accent5" accent6="accent6" hlink="hlink" folHlink="folHlink"/>
   <p:notesStyle>
     <a:lvl1pPr marL="0" algn="l" defTabSz="914400" rtl="0" eaLnBrk="1" latinLnBrk="0" hangingPunct="1">
-      <a:defRPr sz="1200" kern="1200">
+      <a:defRPr sz="1200" b="0" i="0" kern="1200">
         <a:solidFill>
           <a:schemeClr val="tx1"/>
         </a:solidFill>
-        <a:latin typeface="+mn-lt"/>
+        <a:latin typeface="Johnson Display" pitchFamily="2" charset="77"/>
         <a:ea typeface="+mn-ea"/>
         <a:cs typeface="+mn-cs"/>
       </a:defRPr>
     </a:lvl1pPr>
     <a:lvl2pPr marL="457200" algn="l" defTabSz="914400" rtl="0" eaLnBrk="1" latinLnBrk="0" hangingPunct="1">
-      <a:defRPr sz="1200" kern="1200">
+      <a:defRPr sz="1200" b="0" i="0" kern="1200">
         <a:solidFill>
           <a:schemeClr val="tx1"/>
         </a:solidFill>
-        <a:latin typeface="+mn-lt"/>
+        <a:latin typeface="Johnson Display" pitchFamily="2" charset="77"/>
         <a:ea typeface="+mn-ea"/>
         <a:cs typeface="+mn-cs"/>
       </a:defRPr>
     </a:lvl2pPr>
     <a:lvl3pPr marL="914400" algn="l" defTabSz="914400" rtl="0" eaLnBrk="1" latinLnBrk="0" hangingPunct="1">
-      <a:defRPr sz="1200" kern="1200">
+      <a:defRPr sz="1200" b="0" i="0" kern="1200">
         <a:solidFill>
           <a:schemeClr val="tx1"/>
         </a:solidFill>
-        <a:latin typeface="+mn-lt"/>
+        <a:latin typeface="Johnson Display" pitchFamily="2" charset="77"/>
         <a:ea typeface="+mn-ea"/>
         <a:cs typeface="+mn-cs"/>
       </a:defRPr>
     </a:lvl3pPr>
     <a:lvl4pPr marL="1371600" algn="l" defTabSz="914400" rtl="0" eaLnBrk="1" latinLnBrk="0" hangingPunct="1">
-      <a:defRPr sz="1200" kern="1200">
+      <a:defRPr sz="1200" b="0" i="0" kern="1200">
         <a:solidFill>
           <a:schemeClr val="tx1"/>
         </a:solidFill>
-        <a:latin typeface="+mn-lt"/>
+        <a:latin typeface="Johnson Display" pitchFamily="2" charset="77"/>
         <a:ea typeface="+mn-ea"/>
         <a:cs typeface="+mn-cs"/>
       </a:defRPr>
     </a:lvl4pPr>
     <a:lvl5pPr marL="1828800" algn="l" defTabSz="914400" rtl="0" eaLnBrk="1" latinLnBrk="0" hangingPunct="1">
-      <a:defRPr sz="1200" kern="1200">
+      <a:defRPr sz="1200" b="0" i="0" kern="1200">
         <a:solidFill>
           <a:schemeClr val="tx1"/>
         </a:solidFill>
-        <a:latin typeface="+mn-lt"/>
+        <a:latin typeface="Johnson Display" pitchFamily="2" charset="77"/>
         <a:ea typeface="+mn-ea"/>
         <a:cs typeface="+mn-cs"/>
       </a:defRPr>
@@ -1532,12 +2222,15 @@
 </file>
 
 <file path=ppt/slideLayouts/slideLayout1.xml><?xml version="1.0" encoding="utf-8"?>
-<p:sldLayout xmlns:a="http://schemas.openxmlformats.org/drawingml/2006/main" xmlns:r="http://schemas.openxmlformats.org/officeDocument/2006/relationships" xmlns:p="http://schemas.openxmlformats.org/presentationml/2006/main" preserve="1">
-  <p:cSld name="DEFAULT">
+<p:sldLayout xmlns:a="http://schemas.openxmlformats.org/drawingml/2006/main" xmlns:r="http://schemas.openxmlformats.org/officeDocument/2006/relationships" xmlns:p="http://schemas.openxmlformats.org/presentationml/2006/main" showMasterSp="0" preserve="1" userDrawn="1">
+  <p:cSld name="Title Slide">
     <p:bg>
-      <p:bgRef idx="1001">
-        <a:schemeClr val="bg1"/>
-      </p:bgRef>
+      <p:bgPr>
+        <a:solidFill>
+          <a:schemeClr val="accent1"/>
+        </a:solidFill>
+        <a:effectLst/>
+      </p:bgPr>
     </p:bg>
     <p:spTree>
       <p:nvGrpSpPr>
@@ -1553,7 +2246,2478 @@
           <a:chExt cx="0" cy="0"/>
         </a:xfrm>
       </p:grpSpPr>
+      <p:sp>
+        <p:nvSpPr>
+          <p:cNvPr id="8" name="Title 1">
+            <a:extLst>
+              <a:ext uri="{FF2B5EF4-FFF2-40B4-BE49-F238E27FC236}">
+                <a16:creationId xmlns:a16="http://schemas.microsoft.com/office/drawing/2014/main" id="{A97A17AB-0114-CDE0-D80E-3AAA53BE4837}"/>
+              </a:ext>
+            </a:extLst>
+          </p:cNvPr>
+          <p:cNvSpPr>
+            <a:spLocks noGrp="1"/>
+          </p:cNvSpPr>
+          <p:nvPr>
+            <p:ph type="ctrTitle" hasCustomPrompt="1"/>
+          </p:nvPr>
+        </p:nvSpPr>
+        <p:spPr>
+          <a:xfrm>
+            <a:off x="284806" y="262670"/>
+            <a:ext cx="8676632" cy="3930563"/>
+          </a:xfrm>
+        </p:spPr>
+        <p:txBody>
+          <a:bodyPr anchor="t">
+            <a:normAutofit/>
+          </a:bodyPr>
+          <a:lstStyle>
+            <a:lvl1pPr algn="l">
+              <a:lnSpc>
+                <a:spcPct val="80000"/>
+              </a:lnSpc>
+              <a:defRPr sz="8000" b="0" i="0" spc="0" baseline="0">
+                <a:solidFill>
+                  <a:schemeClr val="bg1"/>
+                </a:solidFill>
+                <a:latin typeface="+mj-lt"/>
+              </a:defRPr>
+            </a:lvl1pPr>
+          </a:lstStyle>
+          <a:p>
+            <a:r>
+              <a:rPr lang="en-GB" dirty="0"/>
+              <a:t>Longer titles will shrink automatically</a:t>
+            </a:r>
+          </a:p>
+        </p:txBody>
+      </p:sp>
+      <p:sp>
+        <p:nvSpPr>
+          <p:cNvPr id="6" name="Subtitle 2">
+            <a:extLst>
+              <a:ext uri="{FF2B5EF4-FFF2-40B4-BE49-F238E27FC236}">
+                <a16:creationId xmlns:a16="http://schemas.microsoft.com/office/drawing/2014/main" id="{342D80B8-9D94-A4FE-A104-C937BDCF8941}"/>
+              </a:ext>
+            </a:extLst>
+          </p:cNvPr>
+          <p:cNvSpPr>
+            <a:spLocks noGrp="1"/>
+          </p:cNvSpPr>
+          <p:nvPr>
+            <p:ph type="subTitle" idx="1" hasCustomPrompt="1"/>
+          </p:nvPr>
+        </p:nvSpPr>
+        <p:spPr>
+          <a:xfrm>
+            <a:off x="284805" y="4889500"/>
+            <a:ext cx="5760000" cy="865834"/>
+          </a:xfrm>
+        </p:spPr>
+        <p:txBody>
+          <a:bodyPr anchor="b"/>
+          <a:lstStyle>
+            <a:lvl1pPr marL="0" indent="0" algn="l">
+              <a:lnSpc>
+                <a:spcPct val="100000"/>
+              </a:lnSpc>
+              <a:spcBef>
+                <a:spcPts val="0"/>
+              </a:spcBef>
+              <a:spcAft>
+                <a:spcPts val="0"/>
+              </a:spcAft>
+              <a:buNone/>
+              <a:defRPr sz="1400">
+                <a:solidFill>
+                  <a:schemeClr val="bg1"/>
+                </a:solidFill>
+              </a:defRPr>
+            </a:lvl1pPr>
+            <a:lvl2pPr marL="457200" indent="0" algn="ctr">
+              <a:buNone/>
+              <a:defRPr sz="2000"/>
+            </a:lvl2pPr>
+            <a:lvl3pPr marL="914400" indent="0" algn="ctr">
+              <a:buNone/>
+              <a:defRPr sz="1800"/>
+            </a:lvl3pPr>
+            <a:lvl4pPr marL="1371600" indent="0" algn="ctr">
+              <a:buNone/>
+              <a:defRPr sz="1600"/>
+            </a:lvl4pPr>
+            <a:lvl5pPr marL="1828800" indent="0" algn="ctr">
+              <a:buNone/>
+              <a:defRPr sz="1600"/>
+            </a:lvl5pPr>
+            <a:lvl6pPr marL="2286000" indent="0" algn="ctr">
+              <a:buNone/>
+              <a:defRPr sz="1600"/>
+            </a:lvl6pPr>
+            <a:lvl7pPr marL="2743200" indent="0" algn="ctr">
+              <a:buNone/>
+              <a:defRPr sz="1600"/>
+            </a:lvl7pPr>
+            <a:lvl8pPr marL="3200400" indent="0" algn="ctr">
+              <a:buNone/>
+              <a:defRPr sz="1600"/>
+            </a:lvl8pPr>
+            <a:lvl9pPr marL="3657600" indent="0" algn="ctr">
+              <a:buNone/>
+              <a:defRPr sz="1600"/>
+            </a:lvl9pPr>
+          </a:lstStyle>
+          <a:p>
+            <a:r>
+              <a:rPr lang="en-GB" dirty="0"/>
+              <a:t>Supporting details. Delete if not required.</a:t>
+            </a:r>
+          </a:p>
+        </p:txBody>
+      </p:sp>
+      <p:sp>
+        <p:nvSpPr>
+          <p:cNvPr id="2" name="Graphic 2">
+            <a:extLst>
+              <a:ext uri="{FF2B5EF4-FFF2-40B4-BE49-F238E27FC236}">
+                <a16:creationId xmlns:a16="http://schemas.microsoft.com/office/drawing/2014/main" id="{FC18C372-E3E1-FE2B-B432-BD1E63E9A760}"/>
+              </a:ext>
+            </a:extLst>
+          </p:cNvPr>
+          <p:cNvSpPr>
+            <a:spLocks noChangeAspect="1"/>
+          </p:cNvSpPr>
+          <p:nvPr userDrawn="1"/>
+        </p:nvSpPr>
+        <p:spPr>
+          <a:xfrm>
+            <a:off x="290513" y="6377853"/>
+            <a:ext cx="2034000" cy="187309"/>
+          </a:xfrm>
+          <a:custGeom>
+            <a:avLst/>
+            <a:gdLst>
+              <a:gd name="connsiteX0" fmla="*/ 542692 w 5487431"/>
+              <a:gd name="connsiteY0" fmla="*/ 463149 h 505330"/>
+              <a:gd name="connsiteX1" fmla="*/ 458967 w 5487431"/>
+              <a:gd name="connsiteY1" fmla="*/ 321634 h 505330"/>
+              <a:gd name="connsiteX2" fmla="*/ 542692 w 5487431"/>
+              <a:gd name="connsiteY2" fmla="*/ 180119 h 505330"/>
+              <a:gd name="connsiteX3" fmla="*/ 626417 w 5487431"/>
+              <a:gd name="connsiteY3" fmla="*/ 321634 h 505330"/>
+              <a:gd name="connsiteX4" fmla="*/ 542692 w 5487431"/>
+              <a:gd name="connsiteY4" fmla="*/ 463149 h 505330"/>
+              <a:gd name="connsiteX5" fmla="*/ 542692 w 5487431"/>
+              <a:gd name="connsiteY5" fmla="*/ 142174 h 505330"/>
+              <a:gd name="connsiteX6" fmla="*/ 372482 w 5487431"/>
+              <a:gd name="connsiteY6" fmla="*/ 321634 h 505330"/>
+              <a:gd name="connsiteX7" fmla="*/ 542692 w 5487431"/>
+              <a:gd name="connsiteY7" fmla="*/ 501094 h 505330"/>
+              <a:gd name="connsiteX8" fmla="*/ 712902 w 5487431"/>
+              <a:gd name="connsiteY8" fmla="*/ 321634 h 505330"/>
+              <a:gd name="connsiteX9" fmla="*/ 542692 w 5487431"/>
+              <a:gd name="connsiteY9" fmla="*/ 142174 h 505330"/>
+              <a:gd name="connsiteX10" fmla="*/ 1303641 w 5487431"/>
+              <a:gd name="connsiteY10" fmla="*/ 142174 h 505330"/>
+              <a:gd name="connsiteX11" fmla="*/ 1207357 w 5487431"/>
+              <a:gd name="connsiteY11" fmla="*/ 192547 h 505330"/>
+              <a:gd name="connsiteX12" fmla="*/ 1203170 w 5487431"/>
+              <a:gd name="connsiteY12" fmla="*/ 192547 h 505330"/>
+              <a:gd name="connsiteX13" fmla="*/ 1203170 w 5487431"/>
+              <a:gd name="connsiteY13" fmla="*/ 149048 h 505330"/>
+              <a:gd name="connsiteX14" fmla="*/ 1120872 w 5487431"/>
+              <a:gd name="connsiteY14" fmla="*/ 149048 h 505330"/>
+              <a:gd name="connsiteX15" fmla="*/ 1120872 w 5487431"/>
+              <a:gd name="connsiteY15" fmla="*/ 494221 h 505330"/>
+              <a:gd name="connsiteX16" fmla="*/ 1203170 w 5487431"/>
+              <a:gd name="connsiteY16" fmla="*/ 494221 h 505330"/>
+              <a:gd name="connsiteX17" fmla="*/ 1203170 w 5487431"/>
+              <a:gd name="connsiteY17" fmla="*/ 271261 h 505330"/>
+              <a:gd name="connsiteX18" fmla="*/ 1272244 w 5487431"/>
+              <a:gd name="connsiteY18" fmla="*/ 190476 h 505330"/>
+              <a:gd name="connsiteX19" fmla="*/ 1331518 w 5487431"/>
+              <a:gd name="connsiteY19" fmla="*/ 258173 h 505330"/>
+              <a:gd name="connsiteX20" fmla="*/ 1331518 w 5487431"/>
+              <a:gd name="connsiteY20" fmla="*/ 494221 h 505330"/>
+              <a:gd name="connsiteX21" fmla="*/ 1413816 w 5487431"/>
+              <a:gd name="connsiteY21" fmla="*/ 494221 h 505330"/>
+              <a:gd name="connsiteX22" fmla="*/ 1413816 w 5487431"/>
+              <a:gd name="connsiteY22" fmla="*/ 257420 h 505330"/>
+              <a:gd name="connsiteX23" fmla="*/ 1303641 w 5487431"/>
+              <a:gd name="connsiteY23" fmla="*/ 142174 h 505330"/>
+              <a:gd name="connsiteX24" fmla="*/ 1600771 w 5487431"/>
+              <a:gd name="connsiteY24" fmla="*/ 142174 h 505330"/>
+              <a:gd name="connsiteX25" fmla="*/ 1467571 w 5487431"/>
+              <a:gd name="connsiteY25" fmla="*/ 241602 h 505330"/>
+              <a:gd name="connsiteX26" fmla="*/ 1551962 w 5487431"/>
+              <a:gd name="connsiteY26" fmla="*/ 341030 h 505330"/>
+              <a:gd name="connsiteX27" fmla="*/ 1621702 w 5487431"/>
+              <a:gd name="connsiteY27" fmla="*/ 358260 h 505330"/>
+              <a:gd name="connsiteX28" fmla="*/ 1675457 w 5487431"/>
+              <a:gd name="connsiteY28" fmla="*/ 409387 h 505330"/>
+              <a:gd name="connsiteX29" fmla="*/ 1606384 w 5487431"/>
+              <a:gd name="connsiteY29" fmla="*/ 464656 h 505330"/>
+              <a:gd name="connsiteX30" fmla="*/ 1526845 w 5487431"/>
+              <a:gd name="connsiteY30" fmla="*/ 384624 h 505330"/>
+              <a:gd name="connsiteX31" fmla="*/ 1452919 w 5487431"/>
+              <a:gd name="connsiteY31" fmla="*/ 405338 h 505330"/>
+              <a:gd name="connsiteX32" fmla="*/ 1597345 w 5487431"/>
+              <a:gd name="connsiteY32" fmla="*/ 501282 h 505330"/>
+              <a:gd name="connsiteX33" fmla="*/ 1742438 w 5487431"/>
+              <a:gd name="connsiteY33" fmla="*/ 388767 h 505330"/>
+              <a:gd name="connsiteX34" fmla="*/ 1649674 w 5487431"/>
+              <a:gd name="connsiteY34" fmla="*/ 285196 h 505330"/>
+              <a:gd name="connsiteX35" fmla="*/ 1582693 w 5487431"/>
+              <a:gd name="connsiteY35" fmla="*/ 268625 h 505330"/>
+              <a:gd name="connsiteX36" fmla="*/ 1534551 w 5487431"/>
+              <a:gd name="connsiteY36" fmla="*/ 223054 h 505330"/>
+              <a:gd name="connsiteX37" fmla="*/ 1593825 w 5487431"/>
+              <a:gd name="connsiteY37" fmla="*/ 178895 h 505330"/>
+              <a:gd name="connsiteX38" fmla="*/ 1664992 w 5487431"/>
+              <a:gd name="connsiteY38" fmla="*/ 245180 h 505330"/>
+              <a:gd name="connsiteX39" fmla="*/ 1734731 w 5487431"/>
+              <a:gd name="connsiteY39" fmla="*/ 224466 h 505330"/>
+              <a:gd name="connsiteX40" fmla="*/ 1600771 w 5487431"/>
+              <a:gd name="connsiteY40" fmla="*/ 142174 h 505330"/>
+              <a:gd name="connsiteX41" fmla="*/ 1946803 w 5487431"/>
+              <a:gd name="connsiteY41" fmla="*/ 463149 h 505330"/>
+              <a:gd name="connsiteX42" fmla="*/ 1863078 w 5487431"/>
+              <a:gd name="connsiteY42" fmla="*/ 321634 h 505330"/>
+              <a:gd name="connsiteX43" fmla="*/ 1946803 w 5487431"/>
+              <a:gd name="connsiteY43" fmla="*/ 180119 h 505330"/>
+              <a:gd name="connsiteX44" fmla="*/ 2030529 w 5487431"/>
+              <a:gd name="connsiteY44" fmla="*/ 321634 h 505330"/>
+              <a:gd name="connsiteX45" fmla="*/ 1946803 w 5487431"/>
+              <a:gd name="connsiteY45" fmla="*/ 463149 h 505330"/>
+              <a:gd name="connsiteX46" fmla="*/ 1946803 w 5487431"/>
+              <a:gd name="connsiteY46" fmla="*/ 142174 h 505330"/>
+              <a:gd name="connsiteX47" fmla="*/ 1776594 w 5487431"/>
+              <a:gd name="connsiteY47" fmla="*/ 321634 h 505330"/>
+              <a:gd name="connsiteX48" fmla="*/ 1946803 w 5487431"/>
+              <a:gd name="connsiteY48" fmla="*/ 501094 h 505330"/>
+              <a:gd name="connsiteX49" fmla="*/ 2117013 w 5487431"/>
+              <a:gd name="connsiteY49" fmla="*/ 321634 h 505330"/>
+              <a:gd name="connsiteX50" fmla="*/ 1946803 w 5487431"/>
+              <a:gd name="connsiteY50" fmla="*/ 142174 h 505330"/>
+              <a:gd name="connsiteX51" fmla="*/ 2348590 w 5487431"/>
+              <a:gd name="connsiteY51" fmla="*/ 142174 h 505330"/>
+              <a:gd name="connsiteX52" fmla="*/ 2252306 w 5487431"/>
+              <a:gd name="connsiteY52" fmla="*/ 192547 h 505330"/>
+              <a:gd name="connsiteX53" fmla="*/ 2248119 w 5487431"/>
+              <a:gd name="connsiteY53" fmla="*/ 192547 h 505330"/>
+              <a:gd name="connsiteX54" fmla="*/ 2248119 w 5487431"/>
+              <a:gd name="connsiteY54" fmla="*/ 149048 h 505330"/>
+              <a:gd name="connsiteX55" fmla="*/ 2165821 w 5487431"/>
+              <a:gd name="connsiteY55" fmla="*/ 149048 h 505330"/>
+              <a:gd name="connsiteX56" fmla="*/ 2165821 w 5487431"/>
+              <a:gd name="connsiteY56" fmla="*/ 494221 h 505330"/>
+              <a:gd name="connsiteX57" fmla="*/ 2248119 w 5487431"/>
+              <a:gd name="connsiteY57" fmla="*/ 494221 h 505330"/>
+              <a:gd name="connsiteX58" fmla="*/ 2248119 w 5487431"/>
+              <a:gd name="connsiteY58" fmla="*/ 271261 h 505330"/>
+              <a:gd name="connsiteX59" fmla="*/ 2317193 w 5487431"/>
+              <a:gd name="connsiteY59" fmla="*/ 190476 h 505330"/>
+              <a:gd name="connsiteX60" fmla="*/ 2376466 w 5487431"/>
+              <a:gd name="connsiteY60" fmla="*/ 258173 h 505330"/>
+              <a:gd name="connsiteX61" fmla="*/ 2376466 w 5487431"/>
+              <a:gd name="connsiteY61" fmla="*/ 494221 h 505330"/>
+              <a:gd name="connsiteX62" fmla="*/ 2458764 w 5487431"/>
+              <a:gd name="connsiteY62" fmla="*/ 494221 h 505330"/>
+              <a:gd name="connsiteX63" fmla="*/ 2458764 w 5487431"/>
+              <a:gd name="connsiteY63" fmla="*/ 257420 h 505330"/>
+              <a:gd name="connsiteX64" fmla="*/ 2348590 w 5487431"/>
+              <a:gd name="connsiteY64" fmla="*/ 142174 h 505330"/>
+              <a:gd name="connsiteX65" fmla="*/ 3571359 w 5487431"/>
+              <a:gd name="connsiteY65" fmla="*/ 463149 h 505330"/>
+              <a:gd name="connsiteX66" fmla="*/ 3487634 w 5487431"/>
+              <a:gd name="connsiteY66" fmla="*/ 321634 h 505330"/>
+              <a:gd name="connsiteX67" fmla="*/ 3571359 w 5487431"/>
+              <a:gd name="connsiteY67" fmla="*/ 180119 h 505330"/>
+              <a:gd name="connsiteX68" fmla="*/ 3655085 w 5487431"/>
+              <a:gd name="connsiteY68" fmla="*/ 321634 h 505330"/>
+              <a:gd name="connsiteX69" fmla="*/ 3571359 w 5487431"/>
+              <a:gd name="connsiteY69" fmla="*/ 463149 h 505330"/>
+              <a:gd name="connsiteX70" fmla="*/ 3571359 w 5487431"/>
+              <a:gd name="connsiteY70" fmla="*/ 142174 h 505330"/>
+              <a:gd name="connsiteX71" fmla="*/ 3401150 w 5487431"/>
+              <a:gd name="connsiteY71" fmla="*/ 321634 h 505330"/>
+              <a:gd name="connsiteX72" fmla="*/ 3571359 w 5487431"/>
+              <a:gd name="connsiteY72" fmla="*/ 501094 h 505330"/>
+              <a:gd name="connsiteX73" fmla="*/ 3741569 w 5487431"/>
+              <a:gd name="connsiteY73" fmla="*/ 321634 h 505330"/>
+              <a:gd name="connsiteX74" fmla="*/ 3571359 w 5487431"/>
+              <a:gd name="connsiteY74" fmla="*/ 142174 h 505330"/>
+              <a:gd name="connsiteX75" fmla="*/ 4332308 w 5487431"/>
+              <a:gd name="connsiteY75" fmla="*/ 142174 h 505330"/>
+              <a:gd name="connsiteX76" fmla="*/ 4236024 w 5487431"/>
+              <a:gd name="connsiteY76" fmla="*/ 192547 h 505330"/>
+              <a:gd name="connsiteX77" fmla="*/ 4231838 w 5487431"/>
+              <a:gd name="connsiteY77" fmla="*/ 192547 h 505330"/>
+              <a:gd name="connsiteX78" fmla="*/ 4231838 w 5487431"/>
+              <a:gd name="connsiteY78" fmla="*/ 149048 h 505330"/>
+              <a:gd name="connsiteX79" fmla="*/ 4149539 w 5487431"/>
+              <a:gd name="connsiteY79" fmla="*/ 149048 h 505330"/>
+              <a:gd name="connsiteX80" fmla="*/ 4149539 w 5487431"/>
+              <a:gd name="connsiteY80" fmla="*/ 494221 h 505330"/>
+              <a:gd name="connsiteX81" fmla="*/ 4231838 w 5487431"/>
+              <a:gd name="connsiteY81" fmla="*/ 494221 h 505330"/>
+              <a:gd name="connsiteX82" fmla="*/ 4231838 w 5487431"/>
+              <a:gd name="connsiteY82" fmla="*/ 271261 h 505330"/>
+              <a:gd name="connsiteX83" fmla="*/ 4300911 w 5487431"/>
+              <a:gd name="connsiteY83" fmla="*/ 190476 h 505330"/>
+              <a:gd name="connsiteX84" fmla="*/ 4360185 w 5487431"/>
+              <a:gd name="connsiteY84" fmla="*/ 258173 h 505330"/>
+              <a:gd name="connsiteX85" fmla="*/ 4360185 w 5487431"/>
+              <a:gd name="connsiteY85" fmla="*/ 494221 h 505330"/>
+              <a:gd name="connsiteX86" fmla="*/ 4442483 w 5487431"/>
+              <a:gd name="connsiteY86" fmla="*/ 494221 h 505330"/>
+              <a:gd name="connsiteX87" fmla="*/ 4442483 w 5487431"/>
+              <a:gd name="connsiteY87" fmla="*/ 257420 h 505330"/>
+              <a:gd name="connsiteX88" fmla="*/ 4332308 w 5487431"/>
+              <a:gd name="connsiteY88" fmla="*/ 142174 h 505330"/>
+              <a:gd name="connsiteX89" fmla="*/ 4629533 w 5487431"/>
+              <a:gd name="connsiteY89" fmla="*/ 142174 h 505330"/>
+              <a:gd name="connsiteX90" fmla="*/ 4496334 w 5487431"/>
+              <a:gd name="connsiteY90" fmla="*/ 241602 h 505330"/>
+              <a:gd name="connsiteX91" fmla="*/ 4580725 w 5487431"/>
+              <a:gd name="connsiteY91" fmla="*/ 341030 h 505330"/>
+              <a:gd name="connsiteX92" fmla="*/ 4650464 w 5487431"/>
+              <a:gd name="connsiteY92" fmla="*/ 358260 h 505330"/>
+              <a:gd name="connsiteX93" fmla="*/ 4704220 w 5487431"/>
+              <a:gd name="connsiteY93" fmla="*/ 409387 h 505330"/>
+              <a:gd name="connsiteX94" fmla="*/ 4635146 w 5487431"/>
+              <a:gd name="connsiteY94" fmla="*/ 464656 h 505330"/>
+              <a:gd name="connsiteX95" fmla="*/ 4555607 w 5487431"/>
+              <a:gd name="connsiteY95" fmla="*/ 384624 h 505330"/>
+              <a:gd name="connsiteX96" fmla="*/ 4481682 w 5487431"/>
+              <a:gd name="connsiteY96" fmla="*/ 405338 h 505330"/>
+              <a:gd name="connsiteX97" fmla="*/ 4626108 w 5487431"/>
+              <a:gd name="connsiteY97" fmla="*/ 501282 h 505330"/>
+              <a:gd name="connsiteX98" fmla="*/ 4771200 w 5487431"/>
+              <a:gd name="connsiteY98" fmla="*/ 388767 h 505330"/>
+              <a:gd name="connsiteX99" fmla="*/ 4678436 w 5487431"/>
+              <a:gd name="connsiteY99" fmla="*/ 285196 h 505330"/>
+              <a:gd name="connsiteX100" fmla="*/ 4611456 w 5487431"/>
+              <a:gd name="connsiteY100" fmla="*/ 268625 h 505330"/>
+              <a:gd name="connsiteX101" fmla="*/ 4563314 w 5487431"/>
+              <a:gd name="connsiteY101" fmla="*/ 223054 h 505330"/>
+              <a:gd name="connsiteX102" fmla="*/ 4622588 w 5487431"/>
+              <a:gd name="connsiteY102" fmla="*/ 178895 h 505330"/>
+              <a:gd name="connsiteX103" fmla="*/ 4693754 w 5487431"/>
+              <a:gd name="connsiteY103" fmla="*/ 245180 h 505330"/>
+              <a:gd name="connsiteX104" fmla="*/ 4763493 w 5487431"/>
+              <a:gd name="connsiteY104" fmla="*/ 224466 h 505330"/>
+              <a:gd name="connsiteX105" fmla="*/ 4629533 w 5487431"/>
+              <a:gd name="connsiteY105" fmla="*/ 142174 h 505330"/>
+              <a:gd name="connsiteX106" fmla="*/ 4975471 w 5487431"/>
+              <a:gd name="connsiteY106" fmla="*/ 463149 h 505330"/>
+              <a:gd name="connsiteX107" fmla="*/ 4891745 w 5487431"/>
+              <a:gd name="connsiteY107" fmla="*/ 321634 h 505330"/>
+              <a:gd name="connsiteX108" fmla="*/ 4975471 w 5487431"/>
+              <a:gd name="connsiteY108" fmla="*/ 180119 h 505330"/>
+              <a:gd name="connsiteX109" fmla="*/ 5059196 w 5487431"/>
+              <a:gd name="connsiteY109" fmla="*/ 321634 h 505330"/>
+              <a:gd name="connsiteX110" fmla="*/ 4975471 w 5487431"/>
+              <a:gd name="connsiteY110" fmla="*/ 463149 h 505330"/>
+              <a:gd name="connsiteX111" fmla="*/ 4975471 w 5487431"/>
+              <a:gd name="connsiteY111" fmla="*/ 142174 h 505330"/>
+              <a:gd name="connsiteX112" fmla="*/ 4805261 w 5487431"/>
+              <a:gd name="connsiteY112" fmla="*/ 321634 h 505330"/>
+              <a:gd name="connsiteX113" fmla="*/ 4975471 w 5487431"/>
+              <a:gd name="connsiteY113" fmla="*/ 501094 h 505330"/>
+              <a:gd name="connsiteX114" fmla="*/ 5145680 w 5487431"/>
+              <a:gd name="connsiteY114" fmla="*/ 321634 h 505330"/>
+              <a:gd name="connsiteX115" fmla="*/ 4975471 w 5487431"/>
+              <a:gd name="connsiteY115" fmla="*/ 142174 h 505330"/>
+              <a:gd name="connsiteX116" fmla="*/ 5377257 w 5487431"/>
+              <a:gd name="connsiteY116" fmla="*/ 142174 h 505330"/>
+              <a:gd name="connsiteX117" fmla="*/ 5280973 w 5487431"/>
+              <a:gd name="connsiteY117" fmla="*/ 192547 h 505330"/>
+              <a:gd name="connsiteX118" fmla="*/ 5276787 w 5487431"/>
+              <a:gd name="connsiteY118" fmla="*/ 192547 h 505330"/>
+              <a:gd name="connsiteX119" fmla="*/ 5276787 w 5487431"/>
+              <a:gd name="connsiteY119" fmla="*/ 149048 h 505330"/>
+              <a:gd name="connsiteX120" fmla="*/ 5194488 w 5487431"/>
+              <a:gd name="connsiteY120" fmla="*/ 149048 h 505330"/>
+              <a:gd name="connsiteX121" fmla="*/ 5194488 w 5487431"/>
+              <a:gd name="connsiteY121" fmla="*/ 494221 h 505330"/>
+              <a:gd name="connsiteX122" fmla="*/ 5276787 w 5487431"/>
+              <a:gd name="connsiteY122" fmla="*/ 494221 h 505330"/>
+              <a:gd name="connsiteX123" fmla="*/ 5276787 w 5487431"/>
+              <a:gd name="connsiteY123" fmla="*/ 271261 h 505330"/>
+              <a:gd name="connsiteX124" fmla="*/ 5345860 w 5487431"/>
+              <a:gd name="connsiteY124" fmla="*/ 190476 h 505330"/>
+              <a:gd name="connsiteX125" fmla="*/ 5405134 w 5487431"/>
+              <a:gd name="connsiteY125" fmla="*/ 258173 h 505330"/>
+              <a:gd name="connsiteX126" fmla="*/ 5405134 w 5487431"/>
+              <a:gd name="connsiteY126" fmla="*/ 494221 h 505330"/>
+              <a:gd name="connsiteX127" fmla="*/ 5487432 w 5487431"/>
+              <a:gd name="connsiteY127" fmla="*/ 494221 h 505330"/>
+              <a:gd name="connsiteX128" fmla="*/ 5487432 w 5487431"/>
+              <a:gd name="connsiteY128" fmla="*/ 257420 h 505330"/>
+              <a:gd name="connsiteX129" fmla="*/ 5377257 w 5487431"/>
+              <a:gd name="connsiteY129" fmla="*/ 142174 h 505330"/>
+              <a:gd name="connsiteX130" fmla="*/ 323674 w 5487431"/>
+              <a:gd name="connsiteY130" fmla="*/ 11016 h 505330"/>
+              <a:gd name="connsiteX131" fmla="*/ 237190 w 5487431"/>
+              <a:gd name="connsiteY131" fmla="*/ 11016 h 505330"/>
+              <a:gd name="connsiteX132" fmla="*/ 237190 w 5487431"/>
+              <a:gd name="connsiteY132" fmla="*/ 367864 h 505330"/>
+              <a:gd name="connsiteX133" fmla="*/ 161837 w 5487431"/>
+              <a:gd name="connsiteY133" fmla="*/ 460325 h 505330"/>
+              <a:gd name="connsiteX134" fmla="*/ 86484 w 5487431"/>
+              <a:gd name="connsiteY134" fmla="*/ 360897 h 505330"/>
+              <a:gd name="connsiteX135" fmla="*/ 86484 w 5487431"/>
+              <a:gd name="connsiteY135" fmla="*/ 294612 h 505330"/>
+              <a:gd name="connsiteX136" fmla="*/ 0 w 5487431"/>
+              <a:gd name="connsiteY136" fmla="*/ 315985 h 505330"/>
+              <a:gd name="connsiteX137" fmla="*/ 0 w 5487431"/>
+              <a:gd name="connsiteY137" fmla="*/ 345644 h 505330"/>
+              <a:gd name="connsiteX138" fmla="*/ 161837 w 5487431"/>
+              <a:gd name="connsiteY138" fmla="*/ 505143 h 505330"/>
+              <a:gd name="connsiteX139" fmla="*/ 323674 w 5487431"/>
+              <a:gd name="connsiteY139" fmla="*/ 345644 h 505330"/>
+              <a:gd name="connsiteX140" fmla="*/ 323674 w 5487431"/>
+              <a:gd name="connsiteY140" fmla="*/ 11016 h 505330"/>
+              <a:gd name="connsiteX141" fmla="*/ 844008 w 5487431"/>
+              <a:gd name="connsiteY141" fmla="*/ 11016 h 505330"/>
+              <a:gd name="connsiteX142" fmla="*/ 761710 w 5487431"/>
+              <a:gd name="connsiteY142" fmla="*/ 11016 h 505330"/>
+              <a:gd name="connsiteX143" fmla="*/ 761710 w 5487431"/>
+              <a:gd name="connsiteY143" fmla="*/ 494221 h 505330"/>
+              <a:gd name="connsiteX144" fmla="*/ 844008 w 5487431"/>
+              <a:gd name="connsiteY144" fmla="*/ 494221 h 505330"/>
+              <a:gd name="connsiteX145" fmla="*/ 844008 w 5487431"/>
+              <a:gd name="connsiteY145" fmla="*/ 271261 h 505330"/>
+              <a:gd name="connsiteX146" fmla="*/ 913081 w 5487431"/>
+              <a:gd name="connsiteY146" fmla="*/ 190476 h 505330"/>
+              <a:gd name="connsiteX147" fmla="*/ 972355 w 5487431"/>
+              <a:gd name="connsiteY147" fmla="*/ 258173 h 505330"/>
+              <a:gd name="connsiteX148" fmla="*/ 972355 w 5487431"/>
+              <a:gd name="connsiteY148" fmla="*/ 494221 h 505330"/>
+              <a:gd name="connsiteX149" fmla="*/ 1054653 w 5487431"/>
+              <a:gd name="connsiteY149" fmla="*/ 494221 h 505330"/>
+              <a:gd name="connsiteX150" fmla="*/ 1054653 w 5487431"/>
+              <a:gd name="connsiteY150" fmla="*/ 257420 h 505330"/>
+              <a:gd name="connsiteX151" fmla="*/ 944478 w 5487431"/>
+              <a:gd name="connsiteY151" fmla="*/ 142174 h 505330"/>
+              <a:gd name="connsiteX152" fmla="*/ 848194 w 5487431"/>
+              <a:gd name="connsiteY152" fmla="*/ 192547 h 505330"/>
+              <a:gd name="connsiteX153" fmla="*/ 844008 w 5487431"/>
+              <a:gd name="connsiteY153" fmla="*/ 192547 h 505330"/>
+              <a:gd name="connsiteX154" fmla="*/ 844008 w 5487431"/>
+              <a:gd name="connsiteY154" fmla="*/ 11016 h 505330"/>
+              <a:gd name="connsiteX155" fmla="*/ 3352342 w 5487431"/>
+              <a:gd name="connsiteY155" fmla="*/ 11016 h 505330"/>
+              <a:gd name="connsiteX156" fmla="*/ 3265857 w 5487431"/>
+              <a:gd name="connsiteY156" fmla="*/ 11016 h 505330"/>
+              <a:gd name="connsiteX157" fmla="*/ 3265857 w 5487431"/>
+              <a:gd name="connsiteY157" fmla="*/ 367864 h 505330"/>
+              <a:gd name="connsiteX158" fmla="*/ 3190504 w 5487431"/>
+              <a:gd name="connsiteY158" fmla="*/ 460325 h 505330"/>
+              <a:gd name="connsiteX159" fmla="*/ 3115152 w 5487431"/>
+              <a:gd name="connsiteY159" fmla="*/ 360897 h 505330"/>
+              <a:gd name="connsiteX160" fmla="*/ 3115152 w 5487431"/>
+              <a:gd name="connsiteY160" fmla="*/ 294612 h 505330"/>
+              <a:gd name="connsiteX161" fmla="*/ 3028667 w 5487431"/>
+              <a:gd name="connsiteY161" fmla="*/ 315985 h 505330"/>
+              <a:gd name="connsiteX162" fmla="*/ 3028667 w 5487431"/>
+              <a:gd name="connsiteY162" fmla="*/ 345644 h 505330"/>
+              <a:gd name="connsiteX163" fmla="*/ 3190504 w 5487431"/>
+              <a:gd name="connsiteY163" fmla="*/ 505143 h 505330"/>
+              <a:gd name="connsiteX164" fmla="*/ 3352342 w 5487431"/>
+              <a:gd name="connsiteY164" fmla="*/ 345644 h 505330"/>
+              <a:gd name="connsiteX165" fmla="*/ 3352342 w 5487431"/>
+              <a:gd name="connsiteY165" fmla="*/ 11016 h 505330"/>
+              <a:gd name="connsiteX166" fmla="*/ 3872675 w 5487431"/>
+              <a:gd name="connsiteY166" fmla="*/ 11016 h 505330"/>
+              <a:gd name="connsiteX167" fmla="*/ 3790377 w 5487431"/>
+              <a:gd name="connsiteY167" fmla="*/ 11016 h 505330"/>
+              <a:gd name="connsiteX168" fmla="*/ 3790377 w 5487431"/>
+              <a:gd name="connsiteY168" fmla="*/ 494221 h 505330"/>
+              <a:gd name="connsiteX169" fmla="*/ 3872675 w 5487431"/>
+              <a:gd name="connsiteY169" fmla="*/ 494221 h 505330"/>
+              <a:gd name="connsiteX170" fmla="*/ 3872675 w 5487431"/>
+              <a:gd name="connsiteY170" fmla="*/ 271261 h 505330"/>
+              <a:gd name="connsiteX171" fmla="*/ 3941749 w 5487431"/>
+              <a:gd name="connsiteY171" fmla="*/ 190476 h 505330"/>
+              <a:gd name="connsiteX172" fmla="*/ 4001022 w 5487431"/>
+              <a:gd name="connsiteY172" fmla="*/ 258173 h 505330"/>
+              <a:gd name="connsiteX173" fmla="*/ 4001022 w 5487431"/>
+              <a:gd name="connsiteY173" fmla="*/ 494221 h 505330"/>
+              <a:gd name="connsiteX174" fmla="*/ 4083320 w 5487431"/>
+              <a:gd name="connsiteY174" fmla="*/ 494221 h 505330"/>
+              <a:gd name="connsiteX175" fmla="*/ 4083320 w 5487431"/>
+              <a:gd name="connsiteY175" fmla="*/ 257420 h 505330"/>
+              <a:gd name="connsiteX176" fmla="*/ 3973146 w 5487431"/>
+              <a:gd name="connsiteY176" fmla="*/ 142174 h 505330"/>
+              <a:gd name="connsiteX177" fmla="*/ 3876861 w 5487431"/>
+              <a:gd name="connsiteY177" fmla="*/ 192547 h 505330"/>
+              <a:gd name="connsiteX178" fmla="*/ 3872675 w 5487431"/>
+              <a:gd name="connsiteY178" fmla="*/ 192547 h 505330"/>
+              <a:gd name="connsiteX179" fmla="*/ 3872675 w 5487431"/>
+              <a:gd name="connsiteY179" fmla="*/ 11016 h 505330"/>
+              <a:gd name="connsiteX180" fmla="*/ 2730110 w 5487431"/>
+              <a:gd name="connsiteY180" fmla="*/ 454864 h 505330"/>
+              <a:gd name="connsiteX181" fmla="*/ 2622029 w 5487431"/>
+              <a:gd name="connsiteY181" fmla="*/ 343761 h 505330"/>
+              <a:gd name="connsiteX182" fmla="*/ 2664557 w 5487431"/>
+              <a:gd name="connsiteY182" fmla="*/ 256102 h 505330"/>
+              <a:gd name="connsiteX183" fmla="*/ 2822208 w 5487431"/>
+              <a:gd name="connsiteY183" fmla="*/ 426617 h 505330"/>
+              <a:gd name="connsiteX184" fmla="*/ 2730110 w 5487431"/>
+              <a:gd name="connsiteY184" fmla="*/ 454864 h 505330"/>
+              <a:gd name="connsiteX185" fmla="*/ 2883575 w 5487431"/>
+              <a:gd name="connsiteY185" fmla="*/ 369936 h 505330"/>
+              <a:gd name="connsiteX186" fmla="*/ 2746856 w 5487431"/>
+              <a:gd name="connsiteY186" fmla="*/ 220794 h 505330"/>
+              <a:gd name="connsiteX187" fmla="*/ 2814502 w 5487431"/>
+              <a:gd name="connsiteY187" fmla="*/ 207706 h 505330"/>
+              <a:gd name="connsiteX188" fmla="*/ 2905838 w 5487431"/>
+              <a:gd name="connsiteY188" fmla="*/ 296118 h 505330"/>
+              <a:gd name="connsiteX189" fmla="*/ 2883575 w 5487431"/>
+              <a:gd name="connsiteY189" fmla="*/ 369936 h 505330"/>
+              <a:gd name="connsiteX190" fmla="*/ 2728017 w 5487431"/>
+              <a:gd name="connsiteY190" fmla="*/ 200833 h 505330"/>
+              <a:gd name="connsiteX191" fmla="*/ 2698047 w 5487431"/>
+              <a:gd name="connsiteY191" fmla="*/ 167690 h 505330"/>
+              <a:gd name="connsiteX192" fmla="*/ 2663891 w 5487431"/>
+              <a:gd name="connsiteY192" fmla="*/ 99334 h 505330"/>
+              <a:gd name="connsiteX193" fmla="*/ 2730110 w 5487431"/>
+              <a:gd name="connsiteY193" fmla="*/ 36532 h 505330"/>
+              <a:gd name="connsiteX194" fmla="*/ 2795664 w 5487431"/>
+              <a:gd name="connsiteY194" fmla="*/ 102817 h 505330"/>
+              <a:gd name="connsiteX195" fmla="*/ 2728017 w 5487431"/>
+              <a:gd name="connsiteY195" fmla="*/ 200833 h 505330"/>
+              <a:gd name="connsiteX196" fmla="*/ 2732204 w 5487431"/>
+              <a:gd name="connsiteY196" fmla="*/ 0 h 505330"/>
+              <a:gd name="connsiteX197" fmla="*/ 2588539 w 5487431"/>
+              <a:gd name="connsiteY197" fmla="*/ 119389 h 505330"/>
+              <a:gd name="connsiteX198" fmla="*/ 2644387 w 5487431"/>
+              <a:gd name="connsiteY198" fmla="*/ 234635 h 505330"/>
+              <a:gd name="connsiteX199" fmla="*/ 2645053 w 5487431"/>
+              <a:gd name="connsiteY199" fmla="*/ 236047 h 505330"/>
+              <a:gd name="connsiteX200" fmla="*/ 2545344 w 5487431"/>
+              <a:gd name="connsiteY200" fmla="*/ 374832 h 505330"/>
+              <a:gd name="connsiteX201" fmla="*/ 2685584 w 5487431"/>
+              <a:gd name="connsiteY201" fmla="*/ 505331 h 505330"/>
+              <a:gd name="connsiteX202" fmla="*/ 2843235 w 5487431"/>
+              <a:gd name="connsiteY202" fmla="*/ 449403 h 505330"/>
+              <a:gd name="connsiteX203" fmla="*/ 2885097 w 5487431"/>
+              <a:gd name="connsiteY203" fmla="*/ 494315 h 505330"/>
+              <a:gd name="connsiteX204" fmla="*/ 2994606 w 5487431"/>
+              <a:gd name="connsiteY204" fmla="*/ 494315 h 505330"/>
+              <a:gd name="connsiteX205" fmla="*/ 2994606 w 5487431"/>
+              <a:gd name="connsiteY205" fmla="*/ 490831 h 505330"/>
+              <a:gd name="connsiteX206" fmla="*/ 2905363 w 5487431"/>
+              <a:gd name="connsiteY206" fmla="*/ 393474 h 505330"/>
+              <a:gd name="connsiteX207" fmla="*/ 2964637 w 5487431"/>
+              <a:gd name="connsiteY207" fmla="*/ 258833 h 505330"/>
+              <a:gd name="connsiteX208" fmla="*/ 2873300 w 5487431"/>
+              <a:gd name="connsiteY208" fmla="*/ 171174 h 505330"/>
+              <a:gd name="connsiteX209" fmla="*/ 2789574 w 5487431"/>
+              <a:gd name="connsiteY209" fmla="*/ 187745 h 505330"/>
+              <a:gd name="connsiteX210" fmla="*/ 2788147 w 5487431"/>
+              <a:gd name="connsiteY210" fmla="*/ 185015 h 505330"/>
+              <a:gd name="connsiteX211" fmla="*/ 2863500 w 5487431"/>
+              <a:gd name="connsiteY211" fmla="*/ 93873 h 505330"/>
+              <a:gd name="connsiteX212" fmla="*/ 2732204 w 5487431"/>
+              <a:gd name="connsiteY212" fmla="*/ 0 h 505330"/>
+            </a:gdLst>
+            <a:ahLst/>
+            <a:cxnLst>
+              <a:cxn ang="0">
+                <a:pos x="connsiteX0" y="connsiteY0"/>
+              </a:cxn>
+              <a:cxn ang="0">
+                <a:pos x="connsiteX1" y="connsiteY1"/>
+              </a:cxn>
+              <a:cxn ang="0">
+                <a:pos x="connsiteX2" y="connsiteY2"/>
+              </a:cxn>
+              <a:cxn ang="0">
+                <a:pos x="connsiteX3" y="connsiteY3"/>
+              </a:cxn>
+              <a:cxn ang="0">
+                <a:pos x="connsiteX4" y="connsiteY4"/>
+              </a:cxn>
+              <a:cxn ang="0">
+                <a:pos x="connsiteX5" y="connsiteY5"/>
+              </a:cxn>
+              <a:cxn ang="0">
+                <a:pos x="connsiteX6" y="connsiteY6"/>
+              </a:cxn>
+              <a:cxn ang="0">
+                <a:pos x="connsiteX7" y="connsiteY7"/>
+              </a:cxn>
+              <a:cxn ang="0">
+                <a:pos x="connsiteX8" y="connsiteY8"/>
+              </a:cxn>
+              <a:cxn ang="0">
+                <a:pos x="connsiteX9" y="connsiteY9"/>
+              </a:cxn>
+              <a:cxn ang="0">
+                <a:pos x="connsiteX10" y="connsiteY10"/>
+              </a:cxn>
+              <a:cxn ang="0">
+                <a:pos x="connsiteX11" y="connsiteY11"/>
+              </a:cxn>
+              <a:cxn ang="0">
+                <a:pos x="connsiteX12" y="connsiteY12"/>
+              </a:cxn>
+              <a:cxn ang="0">
+                <a:pos x="connsiteX13" y="connsiteY13"/>
+              </a:cxn>
+              <a:cxn ang="0">
+                <a:pos x="connsiteX14" y="connsiteY14"/>
+              </a:cxn>
+              <a:cxn ang="0">
+                <a:pos x="connsiteX15" y="connsiteY15"/>
+              </a:cxn>
+              <a:cxn ang="0">
+                <a:pos x="connsiteX16" y="connsiteY16"/>
+              </a:cxn>
+              <a:cxn ang="0">
+                <a:pos x="connsiteX17" y="connsiteY17"/>
+              </a:cxn>
+              <a:cxn ang="0">
+                <a:pos x="connsiteX18" y="connsiteY18"/>
+              </a:cxn>
+              <a:cxn ang="0">
+                <a:pos x="connsiteX19" y="connsiteY19"/>
+              </a:cxn>
+              <a:cxn ang="0">
+                <a:pos x="connsiteX20" y="connsiteY20"/>
+              </a:cxn>
+              <a:cxn ang="0">
+                <a:pos x="connsiteX21" y="connsiteY21"/>
+              </a:cxn>
+              <a:cxn ang="0">
+                <a:pos x="connsiteX22" y="connsiteY22"/>
+              </a:cxn>
+              <a:cxn ang="0">
+                <a:pos x="connsiteX23" y="connsiteY23"/>
+              </a:cxn>
+              <a:cxn ang="0">
+                <a:pos x="connsiteX24" y="connsiteY24"/>
+              </a:cxn>
+              <a:cxn ang="0">
+                <a:pos x="connsiteX25" y="connsiteY25"/>
+              </a:cxn>
+              <a:cxn ang="0">
+                <a:pos x="connsiteX26" y="connsiteY26"/>
+              </a:cxn>
+              <a:cxn ang="0">
+                <a:pos x="connsiteX27" y="connsiteY27"/>
+              </a:cxn>
+              <a:cxn ang="0">
+                <a:pos x="connsiteX28" y="connsiteY28"/>
+              </a:cxn>
+              <a:cxn ang="0">
+                <a:pos x="connsiteX29" y="connsiteY29"/>
+              </a:cxn>
+              <a:cxn ang="0">
+                <a:pos x="connsiteX30" y="connsiteY30"/>
+              </a:cxn>
+              <a:cxn ang="0">
+                <a:pos x="connsiteX31" y="connsiteY31"/>
+              </a:cxn>
+              <a:cxn ang="0">
+                <a:pos x="connsiteX32" y="connsiteY32"/>
+              </a:cxn>
+              <a:cxn ang="0">
+                <a:pos x="connsiteX33" y="connsiteY33"/>
+              </a:cxn>
+              <a:cxn ang="0">
+                <a:pos x="connsiteX34" y="connsiteY34"/>
+              </a:cxn>
+              <a:cxn ang="0">
+                <a:pos x="connsiteX35" y="connsiteY35"/>
+              </a:cxn>
+              <a:cxn ang="0">
+                <a:pos x="connsiteX36" y="connsiteY36"/>
+              </a:cxn>
+              <a:cxn ang="0">
+                <a:pos x="connsiteX37" y="connsiteY37"/>
+              </a:cxn>
+              <a:cxn ang="0">
+                <a:pos x="connsiteX38" y="connsiteY38"/>
+              </a:cxn>
+              <a:cxn ang="0">
+                <a:pos x="connsiteX39" y="connsiteY39"/>
+              </a:cxn>
+              <a:cxn ang="0">
+                <a:pos x="connsiteX40" y="connsiteY40"/>
+              </a:cxn>
+              <a:cxn ang="0">
+                <a:pos x="connsiteX41" y="connsiteY41"/>
+              </a:cxn>
+              <a:cxn ang="0">
+                <a:pos x="connsiteX42" y="connsiteY42"/>
+              </a:cxn>
+              <a:cxn ang="0">
+                <a:pos x="connsiteX43" y="connsiteY43"/>
+              </a:cxn>
+              <a:cxn ang="0">
+                <a:pos x="connsiteX44" y="connsiteY44"/>
+              </a:cxn>
+              <a:cxn ang="0">
+                <a:pos x="connsiteX45" y="connsiteY45"/>
+              </a:cxn>
+              <a:cxn ang="0">
+                <a:pos x="connsiteX46" y="connsiteY46"/>
+              </a:cxn>
+              <a:cxn ang="0">
+                <a:pos x="connsiteX47" y="connsiteY47"/>
+              </a:cxn>
+              <a:cxn ang="0">
+                <a:pos x="connsiteX48" y="connsiteY48"/>
+              </a:cxn>
+              <a:cxn ang="0">
+                <a:pos x="connsiteX49" y="connsiteY49"/>
+              </a:cxn>
+              <a:cxn ang="0">
+                <a:pos x="connsiteX50" y="connsiteY50"/>
+              </a:cxn>
+              <a:cxn ang="0">
+                <a:pos x="connsiteX51" y="connsiteY51"/>
+              </a:cxn>
+              <a:cxn ang="0">
+                <a:pos x="connsiteX52" y="connsiteY52"/>
+              </a:cxn>
+              <a:cxn ang="0">
+                <a:pos x="connsiteX53" y="connsiteY53"/>
+              </a:cxn>
+              <a:cxn ang="0">
+                <a:pos x="connsiteX54" y="connsiteY54"/>
+              </a:cxn>
+              <a:cxn ang="0">
+                <a:pos x="connsiteX55" y="connsiteY55"/>
+              </a:cxn>
+              <a:cxn ang="0">
+                <a:pos x="connsiteX56" y="connsiteY56"/>
+              </a:cxn>
+              <a:cxn ang="0">
+                <a:pos x="connsiteX57" y="connsiteY57"/>
+              </a:cxn>
+              <a:cxn ang="0">
+                <a:pos x="connsiteX58" y="connsiteY58"/>
+              </a:cxn>
+              <a:cxn ang="0">
+                <a:pos x="connsiteX59" y="connsiteY59"/>
+              </a:cxn>
+              <a:cxn ang="0">
+                <a:pos x="connsiteX60" y="connsiteY60"/>
+              </a:cxn>
+              <a:cxn ang="0">
+                <a:pos x="connsiteX61" y="connsiteY61"/>
+              </a:cxn>
+              <a:cxn ang="0">
+                <a:pos x="connsiteX62" y="connsiteY62"/>
+              </a:cxn>
+              <a:cxn ang="0">
+                <a:pos x="connsiteX63" y="connsiteY63"/>
+              </a:cxn>
+              <a:cxn ang="0">
+                <a:pos x="connsiteX64" y="connsiteY64"/>
+              </a:cxn>
+              <a:cxn ang="0">
+                <a:pos x="connsiteX65" y="connsiteY65"/>
+              </a:cxn>
+              <a:cxn ang="0">
+                <a:pos x="connsiteX66" y="connsiteY66"/>
+              </a:cxn>
+              <a:cxn ang="0">
+                <a:pos x="connsiteX67" y="connsiteY67"/>
+              </a:cxn>
+              <a:cxn ang="0">
+                <a:pos x="connsiteX68" y="connsiteY68"/>
+              </a:cxn>
+              <a:cxn ang="0">
+                <a:pos x="connsiteX69" y="connsiteY69"/>
+              </a:cxn>
+              <a:cxn ang="0">
+                <a:pos x="connsiteX70" y="connsiteY70"/>
+              </a:cxn>
+              <a:cxn ang="0">
+                <a:pos x="connsiteX71" y="connsiteY71"/>
+              </a:cxn>
+              <a:cxn ang="0">
+                <a:pos x="connsiteX72" y="connsiteY72"/>
+              </a:cxn>
+              <a:cxn ang="0">
+                <a:pos x="connsiteX73" y="connsiteY73"/>
+              </a:cxn>
+              <a:cxn ang="0">
+                <a:pos x="connsiteX74" y="connsiteY74"/>
+              </a:cxn>
+              <a:cxn ang="0">
+                <a:pos x="connsiteX75" y="connsiteY75"/>
+              </a:cxn>
+              <a:cxn ang="0">
+                <a:pos x="connsiteX76" y="connsiteY76"/>
+              </a:cxn>
+              <a:cxn ang="0">
+                <a:pos x="connsiteX77" y="connsiteY77"/>
+              </a:cxn>
+              <a:cxn ang="0">
+                <a:pos x="connsiteX78" y="connsiteY78"/>
+              </a:cxn>
+              <a:cxn ang="0">
+                <a:pos x="connsiteX79" y="connsiteY79"/>
+              </a:cxn>
+              <a:cxn ang="0">
+                <a:pos x="connsiteX80" y="connsiteY80"/>
+              </a:cxn>
+              <a:cxn ang="0">
+                <a:pos x="connsiteX81" y="connsiteY81"/>
+              </a:cxn>
+              <a:cxn ang="0">
+                <a:pos x="connsiteX82" y="connsiteY82"/>
+              </a:cxn>
+              <a:cxn ang="0">
+                <a:pos x="connsiteX83" y="connsiteY83"/>
+              </a:cxn>
+              <a:cxn ang="0">
+                <a:pos x="connsiteX84" y="connsiteY84"/>
+              </a:cxn>
+              <a:cxn ang="0">
+                <a:pos x="connsiteX85" y="connsiteY85"/>
+              </a:cxn>
+              <a:cxn ang="0">
+                <a:pos x="connsiteX86" y="connsiteY86"/>
+              </a:cxn>
+              <a:cxn ang="0">
+                <a:pos x="connsiteX87" y="connsiteY87"/>
+              </a:cxn>
+              <a:cxn ang="0">
+                <a:pos x="connsiteX88" y="connsiteY88"/>
+              </a:cxn>
+              <a:cxn ang="0">
+                <a:pos x="connsiteX89" y="connsiteY89"/>
+              </a:cxn>
+              <a:cxn ang="0">
+                <a:pos x="connsiteX90" y="connsiteY90"/>
+              </a:cxn>
+              <a:cxn ang="0">
+                <a:pos x="connsiteX91" y="connsiteY91"/>
+              </a:cxn>
+              <a:cxn ang="0">
+                <a:pos x="connsiteX92" y="connsiteY92"/>
+              </a:cxn>
+              <a:cxn ang="0">
+                <a:pos x="connsiteX93" y="connsiteY93"/>
+              </a:cxn>
+              <a:cxn ang="0">
+                <a:pos x="connsiteX94" y="connsiteY94"/>
+              </a:cxn>
+              <a:cxn ang="0">
+                <a:pos x="connsiteX95" y="connsiteY95"/>
+              </a:cxn>
+              <a:cxn ang="0">
+                <a:pos x="connsiteX96" y="connsiteY96"/>
+              </a:cxn>
+              <a:cxn ang="0">
+                <a:pos x="connsiteX97" y="connsiteY97"/>
+              </a:cxn>
+              <a:cxn ang="0">
+                <a:pos x="connsiteX98" y="connsiteY98"/>
+              </a:cxn>
+              <a:cxn ang="0">
+                <a:pos x="connsiteX99" y="connsiteY99"/>
+              </a:cxn>
+              <a:cxn ang="0">
+                <a:pos x="connsiteX100" y="connsiteY100"/>
+              </a:cxn>
+              <a:cxn ang="0">
+                <a:pos x="connsiteX101" y="connsiteY101"/>
+              </a:cxn>
+              <a:cxn ang="0">
+                <a:pos x="connsiteX102" y="connsiteY102"/>
+              </a:cxn>
+              <a:cxn ang="0">
+                <a:pos x="connsiteX103" y="connsiteY103"/>
+              </a:cxn>
+              <a:cxn ang="0">
+                <a:pos x="connsiteX104" y="connsiteY104"/>
+              </a:cxn>
+              <a:cxn ang="0">
+                <a:pos x="connsiteX105" y="connsiteY105"/>
+              </a:cxn>
+              <a:cxn ang="0">
+                <a:pos x="connsiteX106" y="connsiteY106"/>
+              </a:cxn>
+              <a:cxn ang="0">
+                <a:pos x="connsiteX107" y="connsiteY107"/>
+              </a:cxn>
+              <a:cxn ang="0">
+                <a:pos x="connsiteX108" y="connsiteY108"/>
+              </a:cxn>
+              <a:cxn ang="0">
+                <a:pos x="connsiteX109" y="connsiteY109"/>
+              </a:cxn>
+              <a:cxn ang="0">
+                <a:pos x="connsiteX110" y="connsiteY110"/>
+              </a:cxn>
+              <a:cxn ang="0">
+                <a:pos x="connsiteX111" y="connsiteY111"/>
+              </a:cxn>
+              <a:cxn ang="0">
+                <a:pos x="connsiteX112" y="connsiteY112"/>
+              </a:cxn>
+              <a:cxn ang="0">
+                <a:pos x="connsiteX113" y="connsiteY113"/>
+              </a:cxn>
+              <a:cxn ang="0">
+                <a:pos x="connsiteX114" y="connsiteY114"/>
+              </a:cxn>
+              <a:cxn ang="0">
+                <a:pos x="connsiteX115" y="connsiteY115"/>
+              </a:cxn>
+              <a:cxn ang="0">
+                <a:pos x="connsiteX116" y="connsiteY116"/>
+              </a:cxn>
+              <a:cxn ang="0">
+                <a:pos x="connsiteX117" y="connsiteY117"/>
+              </a:cxn>
+              <a:cxn ang="0">
+                <a:pos x="connsiteX118" y="connsiteY118"/>
+              </a:cxn>
+              <a:cxn ang="0">
+                <a:pos x="connsiteX119" y="connsiteY119"/>
+              </a:cxn>
+              <a:cxn ang="0">
+                <a:pos x="connsiteX120" y="connsiteY120"/>
+              </a:cxn>
+              <a:cxn ang="0">
+                <a:pos x="connsiteX121" y="connsiteY121"/>
+              </a:cxn>
+              <a:cxn ang="0">
+                <a:pos x="connsiteX122" y="connsiteY122"/>
+              </a:cxn>
+              <a:cxn ang="0">
+                <a:pos x="connsiteX123" y="connsiteY123"/>
+              </a:cxn>
+              <a:cxn ang="0">
+                <a:pos x="connsiteX124" y="connsiteY124"/>
+              </a:cxn>
+              <a:cxn ang="0">
+                <a:pos x="connsiteX125" y="connsiteY125"/>
+              </a:cxn>
+              <a:cxn ang="0">
+                <a:pos x="connsiteX126" y="connsiteY126"/>
+              </a:cxn>
+              <a:cxn ang="0">
+                <a:pos x="connsiteX127" y="connsiteY127"/>
+              </a:cxn>
+              <a:cxn ang="0">
+                <a:pos x="connsiteX128" y="connsiteY128"/>
+              </a:cxn>
+              <a:cxn ang="0">
+                <a:pos x="connsiteX129" y="connsiteY129"/>
+              </a:cxn>
+              <a:cxn ang="0">
+                <a:pos x="connsiteX130" y="connsiteY130"/>
+              </a:cxn>
+              <a:cxn ang="0">
+                <a:pos x="connsiteX131" y="connsiteY131"/>
+              </a:cxn>
+              <a:cxn ang="0">
+                <a:pos x="connsiteX132" y="connsiteY132"/>
+              </a:cxn>
+              <a:cxn ang="0">
+                <a:pos x="connsiteX133" y="connsiteY133"/>
+              </a:cxn>
+              <a:cxn ang="0">
+                <a:pos x="connsiteX134" y="connsiteY134"/>
+              </a:cxn>
+              <a:cxn ang="0">
+                <a:pos x="connsiteX135" y="connsiteY135"/>
+              </a:cxn>
+              <a:cxn ang="0">
+                <a:pos x="connsiteX136" y="connsiteY136"/>
+              </a:cxn>
+              <a:cxn ang="0">
+                <a:pos x="connsiteX137" y="connsiteY137"/>
+              </a:cxn>
+              <a:cxn ang="0">
+                <a:pos x="connsiteX138" y="connsiteY138"/>
+              </a:cxn>
+              <a:cxn ang="0">
+                <a:pos x="connsiteX139" y="connsiteY139"/>
+              </a:cxn>
+              <a:cxn ang="0">
+                <a:pos x="connsiteX140" y="connsiteY140"/>
+              </a:cxn>
+              <a:cxn ang="0">
+                <a:pos x="connsiteX141" y="connsiteY141"/>
+              </a:cxn>
+              <a:cxn ang="0">
+                <a:pos x="connsiteX142" y="connsiteY142"/>
+              </a:cxn>
+              <a:cxn ang="0">
+                <a:pos x="connsiteX143" y="connsiteY143"/>
+              </a:cxn>
+              <a:cxn ang="0">
+                <a:pos x="connsiteX144" y="connsiteY144"/>
+              </a:cxn>
+              <a:cxn ang="0">
+                <a:pos x="connsiteX145" y="connsiteY145"/>
+              </a:cxn>
+              <a:cxn ang="0">
+                <a:pos x="connsiteX146" y="connsiteY146"/>
+              </a:cxn>
+              <a:cxn ang="0">
+                <a:pos x="connsiteX147" y="connsiteY147"/>
+              </a:cxn>
+              <a:cxn ang="0">
+                <a:pos x="connsiteX148" y="connsiteY148"/>
+              </a:cxn>
+              <a:cxn ang="0">
+                <a:pos x="connsiteX149" y="connsiteY149"/>
+              </a:cxn>
+              <a:cxn ang="0">
+                <a:pos x="connsiteX150" y="connsiteY150"/>
+              </a:cxn>
+              <a:cxn ang="0">
+                <a:pos x="connsiteX151" y="connsiteY151"/>
+              </a:cxn>
+              <a:cxn ang="0">
+                <a:pos x="connsiteX152" y="connsiteY152"/>
+              </a:cxn>
+              <a:cxn ang="0">
+                <a:pos x="connsiteX153" y="connsiteY153"/>
+              </a:cxn>
+              <a:cxn ang="0">
+                <a:pos x="connsiteX154" y="connsiteY154"/>
+              </a:cxn>
+              <a:cxn ang="0">
+                <a:pos x="connsiteX155" y="connsiteY155"/>
+              </a:cxn>
+              <a:cxn ang="0">
+                <a:pos x="connsiteX156" y="connsiteY156"/>
+              </a:cxn>
+              <a:cxn ang="0">
+                <a:pos x="connsiteX157" y="connsiteY157"/>
+              </a:cxn>
+              <a:cxn ang="0">
+                <a:pos x="connsiteX158" y="connsiteY158"/>
+              </a:cxn>
+              <a:cxn ang="0">
+                <a:pos x="connsiteX159" y="connsiteY159"/>
+              </a:cxn>
+              <a:cxn ang="0">
+                <a:pos x="connsiteX160" y="connsiteY160"/>
+              </a:cxn>
+              <a:cxn ang="0">
+                <a:pos x="connsiteX161" y="connsiteY161"/>
+              </a:cxn>
+              <a:cxn ang="0">
+                <a:pos x="connsiteX162" y="connsiteY162"/>
+              </a:cxn>
+              <a:cxn ang="0">
+                <a:pos x="connsiteX163" y="connsiteY163"/>
+              </a:cxn>
+              <a:cxn ang="0">
+                <a:pos x="connsiteX164" y="connsiteY164"/>
+              </a:cxn>
+              <a:cxn ang="0">
+                <a:pos x="connsiteX165" y="connsiteY165"/>
+              </a:cxn>
+              <a:cxn ang="0">
+                <a:pos x="connsiteX166" y="connsiteY166"/>
+              </a:cxn>
+              <a:cxn ang="0">
+                <a:pos x="connsiteX167" y="connsiteY167"/>
+              </a:cxn>
+              <a:cxn ang="0">
+                <a:pos x="connsiteX168" y="connsiteY168"/>
+              </a:cxn>
+              <a:cxn ang="0">
+                <a:pos x="connsiteX169" y="connsiteY169"/>
+              </a:cxn>
+              <a:cxn ang="0">
+                <a:pos x="connsiteX170" y="connsiteY170"/>
+              </a:cxn>
+              <a:cxn ang="0">
+                <a:pos x="connsiteX171" y="connsiteY171"/>
+              </a:cxn>
+              <a:cxn ang="0">
+                <a:pos x="connsiteX172" y="connsiteY172"/>
+              </a:cxn>
+              <a:cxn ang="0">
+                <a:pos x="connsiteX173" y="connsiteY173"/>
+              </a:cxn>
+              <a:cxn ang="0">
+                <a:pos x="connsiteX174" y="connsiteY174"/>
+              </a:cxn>
+              <a:cxn ang="0">
+                <a:pos x="connsiteX175" y="connsiteY175"/>
+              </a:cxn>
+              <a:cxn ang="0">
+                <a:pos x="connsiteX176" y="connsiteY176"/>
+              </a:cxn>
+              <a:cxn ang="0">
+                <a:pos x="connsiteX177" y="connsiteY177"/>
+              </a:cxn>
+              <a:cxn ang="0">
+                <a:pos x="connsiteX178" y="connsiteY178"/>
+              </a:cxn>
+              <a:cxn ang="0">
+                <a:pos x="connsiteX179" y="connsiteY179"/>
+              </a:cxn>
+              <a:cxn ang="0">
+                <a:pos x="connsiteX180" y="connsiteY180"/>
+              </a:cxn>
+              <a:cxn ang="0">
+                <a:pos x="connsiteX181" y="connsiteY181"/>
+              </a:cxn>
+              <a:cxn ang="0">
+                <a:pos x="connsiteX182" y="connsiteY182"/>
+              </a:cxn>
+              <a:cxn ang="0">
+                <a:pos x="connsiteX183" y="connsiteY183"/>
+              </a:cxn>
+              <a:cxn ang="0">
+                <a:pos x="connsiteX184" y="connsiteY184"/>
+              </a:cxn>
+              <a:cxn ang="0">
+                <a:pos x="connsiteX185" y="connsiteY185"/>
+              </a:cxn>
+              <a:cxn ang="0">
+                <a:pos x="connsiteX186" y="connsiteY186"/>
+              </a:cxn>
+              <a:cxn ang="0">
+                <a:pos x="connsiteX187" y="connsiteY187"/>
+              </a:cxn>
+              <a:cxn ang="0">
+                <a:pos x="connsiteX188" y="connsiteY188"/>
+              </a:cxn>
+              <a:cxn ang="0">
+                <a:pos x="connsiteX189" y="connsiteY189"/>
+              </a:cxn>
+              <a:cxn ang="0">
+                <a:pos x="connsiteX190" y="connsiteY190"/>
+              </a:cxn>
+              <a:cxn ang="0">
+                <a:pos x="connsiteX191" y="connsiteY191"/>
+              </a:cxn>
+              <a:cxn ang="0">
+                <a:pos x="connsiteX192" y="connsiteY192"/>
+              </a:cxn>
+              <a:cxn ang="0">
+                <a:pos x="connsiteX193" y="connsiteY193"/>
+              </a:cxn>
+              <a:cxn ang="0">
+                <a:pos x="connsiteX194" y="connsiteY194"/>
+              </a:cxn>
+              <a:cxn ang="0">
+                <a:pos x="connsiteX195" y="connsiteY195"/>
+              </a:cxn>
+              <a:cxn ang="0">
+                <a:pos x="connsiteX196" y="connsiteY196"/>
+              </a:cxn>
+              <a:cxn ang="0">
+                <a:pos x="connsiteX197" y="connsiteY197"/>
+              </a:cxn>
+              <a:cxn ang="0">
+                <a:pos x="connsiteX198" y="connsiteY198"/>
+              </a:cxn>
+              <a:cxn ang="0">
+                <a:pos x="connsiteX199" y="connsiteY199"/>
+              </a:cxn>
+              <a:cxn ang="0">
+                <a:pos x="connsiteX200" y="connsiteY200"/>
+              </a:cxn>
+              <a:cxn ang="0">
+                <a:pos x="connsiteX201" y="connsiteY201"/>
+              </a:cxn>
+              <a:cxn ang="0">
+                <a:pos x="connsiteX202" y="connsiteY202"/>
+              </a:cxn>
+              <a:cxn ang="0">
+                <a:pos x="connsiteX203" y="connsiteY203"/>
+              </a:cxn>
+              <a:cxn ang="0">
+                <a:pos x="connsiteX204" y="connsiteY204"/>
+              </a:cxn>
+              <a:cxn ang="0">
+                <a:pos x="connsiteX205" y="connsiteY205"/>
+              </a:cxn>
+              <a:cxn ang="0">
+                <a:pos x="connsiteX206" y="connsiteY206"/>
+              </a:cxn>
+              <a:cxn ang="0">
+                <a:pos x="connsiteX207" y="connsiteY207"/>
+              </a:cxn>
+              <a:cxn ang="0">
+                <a:pos x="connsiteX208" y="connsiteY208"/>
+              </a:cxn>
+              <a:cxn ang="0">
+                <a:pos x="connsiteX209" y="connsiteY209"/>
+              </a:cxn>
+              <a:cxn ang="0">
+                <a:pos x="connsiteX210" y="connsiteY210"/>
+              </a:cxn>
+              <a:cxn ang="0">
+                <a:pos x="connsiteX211" y="connsiteY211"/>
+              </a:cxn>
+              <a:cxn ang="0">
+                <a:pos x="connsiteX212" y="connsiteY212"/>
+              </a:cxn>
+            </a:cxnLst>
+            <a:rect l="l" t="t" r="r" b="b"/>
+            <a:pathLst>
+              <a:path w="5487431" h="505330">
+                <a:moveTo>
+                  <a:pt x="542692" y="463149"/>
+                </a:moveTo>
+                <a:cubicBezTo>
+                  <a:pt x="488937" y="463149"/>
+                  <a:pt x="458967" y="412776"/>
+                  <a:pt x="458967" y="321634"/>
+                </a:cubicBezTo>
+                <a:cubicBezTo>
+                  <a:pt x="458967" y="229080"/>
+                  <a:pt x="488937" y="180119"/>
+                  <a:pt x="542692" y="180119"/>
+                </a:cubicBezTo>
+                <a:cubicBezTo>
+                  <a:pt x="596448" y="180119"/>
+                  <a:pt x="626417" y="229833"/>
+                  <a:pt x="626417" y="321634"/>
+                </a:cubicBezTo>
+                <a:cubicBezTo>
+                  <a:pt x="626322" y="414189"/>
+                  <a:pt x="596352" y="463149"/>
+                  <a:pt x="542692" y="463149"/>
+                </a:cubicBezTo>
+                <a:moveTo>
+                  <a:pt x="542692" y="142174"/>
+                </a:moveTo>
+                <a:cubicBezTo>
+                  <a:pt x="433183" y="142174"/>
+                  <a:pt x="372482" y="222959"/>
+                  <a:pt x="372482" y="321634"/>
+                </a:cubicBezTo>
+                <a:cubicBezTo>
+                  <a:pt x="372482" y="420309"/>
+                  <a:pt x="433183" y="501094"/>
+                  <a:pt x="542692" y="501094"/>
+                </a:cubicBezTo>
+                <a:cubicBezTo>
+                  <a:pt x="652201" y="501094"/>
+                  <a:pt x="712902" y="420309"/>
+                  <a:pt x="712902" y="321634"/>
+                </a:cubicBezTo>
+                <a:cubicBezTo>
+                  <a:pt x="712902" y="222959"/>
+                  <a:pt x="652201" y="142174"/>
+                  <a:pt x="542692" y="142174"/>
+                </a:cubicBezTo>
+                <a:moveTo>
+                  <a:pt x="1303641" y="142174"/>
+                </a:moveTo>
+                <a:cubicBezTo>
+                  <a:pt x="1251979" y="142174"/>
+                  <a:pt x="1223436" y="164301"/>
+                  <a:pt x="1207357" y="192547"/>
+                </a:cubicBezTo>
+                <a:lnTo>
+                  <a:pt x="1203170" y="192547"/>
+                </a:lnTo>
+                <a:lnTo>
+                  <a:pt x="1203170" y="149048"/>
+                </a:lnTo>
+                <a:lnTo>
+                  <a:pt x="1120872" y="149048"/>
+                </a:lnTo>
+                <a:lnTo>
+                  <a:pt x="1120872" y="494221"/>
+                </a:lnTo>
+                <a:lnTo>
+                  <a:pt x="1203170" y="494221"/>
+                </a:lnTo>
+                <a:lnTo>
+                  <a:pt x="1203170" y="271261"/>
+                </a:lnTo>
+                <a:cubicBezTo>
+                  <a:pt x="1203170" y="220229"/>
+                  <a:pt x="1229715" y="190476"/>
+                  <a:pt x="1272244" y="190476"/>
+                </a:cubicBezTo>
+                <a:cubicBezTo>
+                  <a:pt x="1313440" y="190476"/>
+                  <a:pt x="1331518" y="217404"/>
+                  <a:pt x="1331518" y="258173"/>
+                </a:cubicBezTo>
+                <a:lnTo>
+                  <a:pt x="1331518" y="494221"/>
+                </a:lnTo>
+                <a:lnTo>
+                  <a:pt x="1413816" y="494221"/>
+                </a:lnTo>
+                <a:lnTo>
+                  <a:pt x="1413816" y="257420"/>
+                </a:lnTo>
+                <a:cubicBezTo>
+                  <a:pt x="1413911" y="186333"/>
+                  <a:pt x="1376234" y="142174"/>
+                  <a:pt x="1303641" y="142174"/>
+                </a:cubicBezTo>
+                <a:moveTo>
+                  <a:pt x="1600771" y="142174"/>
+                </a:moveTo>
+                <a:cubicBezTo>
+                  <a:pt x="1524752" y="142174"/>
+                  <a:pt x="1467571" y="173905"/>
+                  <a:pt x="1467571" y="241602"/>
+                </a:cubicBezTo>
+                <a:cubicBezTo>
+                  <a:pt x="1467571" y="298943"/>
+                  <a:pt x="1507341" y="330014"/>
+                  <a:pt x="1551962" y="341030"/>
+                </a:cubicBezTo>
+                <a:lnTo>
+                  <a:pt x="1621702" y="358260"/>
+                </a:lnTo>
+                <a:cubicBezTo>
+                  <a:pt x="1658712" y="367205"/>
+                  <a:pt x="1675457" y="380387"/>
+                  <a:pt x="1675457" y="409387"/>
+                </a:cubicBezTo>
+                <a:cubicBezTo>
+                  <a:pt x="1675457" y="444601"/>
+                  <a:pt x="1650340" y="464656"/>
+                  <a:pt x="1606384" y="464656"/>
+                </a:cubicBezTo>
+                <a:cubicBezTo>
+                  <a:pt x="1558908" y="464656"/>
+                  <a:pt x="1534551" y="441870"/>
+                  <a:pt x="1526845" y="384624"/>
+                </a:cubicBezTo>
+                <a:lnTo>
+                  <a:pt x="1452919" y="405338"/>
+                </a:lnTo>
+                <a:cubicBezTo>
+                  <a:pt x="1457106" y="464750"/>
+                  <a:pt x="1512954" y="501282"/>
+                  <a:pt x="1597345" y="501282"/>
+                </a:cubicBezTo>
+                <a:cubicBezTo>
+                  <a:pt x="1691536" y="501282"/>
+                  <a:pt x="1742438" y="457782"/>
+                  <a:pt x="1742438" y="388767"/>
+                </a:cubicBezTo>
+                <a:cubicBezTo>
+                  <a:pt x="1742438" y="323894"/>
+                  <a:pt x="1697055" y="296965"/>
+                  <a:pt x="1649674" y="285196"/>
+                </a:cubicBezTo>
+                <a:lnTo>
+                  <a:pt x="1582693" y="268625"/>
+                </a:lnTo>
+                <a:cubicBezTo>
+                  <a:pt x="1549203" y="260339"/>
+                  <a:pt x="1534551" y="245180"/>
+                  <a:pt x="1534551" y="223054"/>
+                </a:cubicBezTo>
+                <a:cubicBezTo>
+                  <a:pt x="1534551" y="195466"/>
+                  <a:pt x="1558242" y="178895"/>
+                  <a:pt x="1593825" y="178895"/>
+                </a:cubicBezTo>
+                <a:cubicBezTo>
+                  <a:pt x="1635688" y="178895"/>
+                  <a:pt x="1661471" y="201680"/>
+                  <a:pt x="1664992" y="245180"/>
+                </a:cubicBezTo>
+                <a:lnTo>
+                  <a:pt x="1734731" y="224466"/>
+                </a:lnTo>
+                <a:cubicBezTo>
+                  <a:pt x="1726358" y="175976"/>
+                  <a:pt x="1678216" y="142174"/>
+                  <a:pt x="1600771" y="142174"/>
+                </a:cubicBezTo>
+                <a:moveTo>
+                  <a:pt x="1946803" y="463149"/>
+                </a:moveTo>
+                <a:cubicBezTo>
+                  <a:pt x="1893048" y="463149"/>
+                  <a:pt x="1863078" y="412776"/>
+                  <a:pt x="1863078" y="321634"/>
+                </a:cubicBezTo>
+                <a:cubicBezTo>
+                  <a:pt x="1863078" y="229080"/>
+                  <a:pt x="1893048" y="180119"/>
+                  <a:pt x="1946803" y="180119"/>
+                </a:cubicBezTo>
+                <a:cubicBezTo>
+                  <a:pt x="2000559" y="180119"/>
+                  <a:pt x="2030529" y="229833"/>
+                  <a:pt x="2030529" y="321634"/>
+                </a:cubicBezTo>
+                <a:cubicBezTo>
+                  <a:pt x="2030529" y="414189"/>
+                  <a:pt x="2000464" y="463149"/>
+                  <a:pt x="1946803" y="463149"/>
+                </a:cubicBezTo>
+                <a:moveTo>
+                  <a:pt x="1946803" y="142174"/>
+                </a:moveTo>
+                <a:cubicBezTo>
+                  <a:pt x="1837294" y="142174"/>
+                  <a:pt x="1776594" y="222959"/>
+                  <a:pt x="1776594" y="321634"/>
+                </a:cubicBezTo>
+                <a:cubicBezTo>
+                  <a:pt x="1776594" y="420309"/>
+                  <a:pt x="1837294" y="501094"/>
+                  <a:pt x="1946803" y="501094"/>
+                </a:cubicBezTo>
+                <a:cubicBezTo>
+                  <a:pt x="2056312" y="501094"/>
+                  <a:pt x="2117013" y="420309"/>
+                  <a:pt x="2117013" y="321634"/>
+                </a:cubicBezTo>
+                <a:cubicBezTo>
+                  <a:pt x="2117013" y="222959"/>
+                  <a:pt x="2056312" y="142174"/>
+                  <a:pt x="1946803" y="142174"/>
+                </a:cubicBezTo>
+                <a:moveTo>
+                  <a:pt x="2348590" y="142174"/>
+                </a:moveTo>
+                <a:cubicBezTo>
+                  <a:pt x="2296927" y="142174"/>
+                  <a:pt x="2268385" y="164301"/>
+                  <a:pt x="2252306" y="192547"/>
+                </a:cubicBezTo>
+                <a:lnTo>
+                  <a:pt x="2248119" y="192547"/>
+                </a:lnTo>
+                <a:lnTo>
+                  <a:pt x="2248119" y="149048"/>
+                </a:lnTo>
+                <a:lnTo>
+                  <a:pt x="2165821" y="149048"/>
+                </a:lnTo>
+                <a:lnTo>
+                  <a:pt x="2165821" y="494221"/>
+                </a:lnTo>
+                <a:lnTo>
+                  <a:pt x="2248119" y="494221"/>
+                </a:lnTo>
+                <a:lnTo>
+                  <a:pt x="2248119" y="271261"/>
+                </a:lnTo>
+                <a:cubicBezTo>
+                  <a:pt x="2248119" y="220229"/>
+                  <a:pt x="2274664" y="190476"/>
+                  <a:pt x="2317193" y="190476"/>
+                </a:cubicBezTo>
+                <a:cubicBezTo>
+                  <a:pt x="2358389" y="190476"/>
+                  <a:pt x="2376466" y="217404"/>
+                  <a:pt x="2376466" y="258173"/>
+                </a:cubicBezTo>
+                <a:lnTo>
+                  <a:pt x="2376466" y="494221"/>
+                </a:lnTo>
+                <a:lnTo>
+                  <a:pt x="2458764" y="494221"/>
+                </a:lnTo>
+                <a:lnTo>
+                  <a:pt x="2458764" y="257420"/>
+                </a:lnTo>
+                <a:cubicBezTo>
+                  <a:pt x="2458764" y="186333"/>
+                  <a:pt x="2421088" y="142174"/>
+                  <a:pt x="2348590" y="142174"/>
+                </a:cubicBezTo>
+                <a:moveTo>
+                  <a:pt x="3571359" y="463149"/>
+                </a:moveTo>
+                <a:cubicBezTo>
+                  <a:pt x="3517604" y="463149"/>
+                  <a:pt x="3487634" y="412776"/>
+                  <a:pt x="3487634" y="321634"/>
+                </a:cubicBezTo>
+                <a:cubicBezTo>
+                  <a:pt x="3487634" y="229080"/>
+                  <a:pt x="3517604" y="180119"/>
+                  <a:pt x="3571359" y="180119"/>
+                </a:cubicBezTo>
+                <a:cubicBezTo>
+                  <a:pt x="3625115" y="180119"/>
+                  <a:pt x="3655085" y="229833"/>
+                  <a:pt x="3655085" y="321634"/>
+                </a:cubicBezTo>
+                <a:cubicBezTo>
+                  <a:pt x="3655085" y="414189"/>
+                  <a:pt x="3625020" y="463149"/>
+                  <a:pt x="3571359" y="463149"/>
+                </a:cubicBezTo>
+                <a:moveTo>
+                  <a:pt x="3571359" y="142174"/>
+                </a:moveTo>
+                <a:cubicBezTo>
+                  <a:pt x="3461850" y="142174"/>
+                  <a:pt x="3401150" y="222959"/>
+                  <a:pt x="3401150" y="321634"/>
+                </a:cubicBezTo>
+                <a:cubicBezTo>
+                  <a:pt x="3401150" y="420309"/>
+                  <a:pt x="3461850" y="501094"/>
+                  <a:pt x="3571359" y="501094"/>
+                </a:cubicBezTo>
+                <a:cubicBezTo>
+                  <a:pt x="3680868" y="501094"/>
+                  <a:pt x="3741569" y="420309"/>
+                  <a:pt x="3741569" y="321634"/>
+                </a:cubicBezTo>
+                <a:cubicBezTo>
+                  <a:pt x="3741569" y="222959"/>
+                  <a:pt x="3680868" y="142174"/>
+                  <a:pt x="3571359" y="142174"/>
+                </a:cubicBezTo>
+                <a:moveTo>
+                  <a:pt x="4332308" y="142174"/>
+                </a:moveTo>
+                <a:cubicBezTo>
+                  <a:pt x="4280646" y="142174"/>
+                  <a:pt x="4252103" y="164301"/>
+                  <a:pt x="4236024" y="192547"/>
+                </a:cubicBezTo>
+                <a:lnTo>
+                  <a:pt x="4231838" y="192547"/>
+                </a:lnTo>
+                <a:lnTo>
+                  <a:pt x="4231838" y="149048"/>
+                </a:lnTo>
+                <a:lnTo>
+                  <a:pt x="4149539" y="149048"/>
+                </a:lnTo>
+                <a:lnTo>
+                  <a:pt x="4149539" y="494221"/>
+                </a:lnTo>
+                <a:lnTo>
+                  <a:pt x="4231838" y="494221"/>
+                </a:lnTo>
+                <a:lnTo>
+                  <a:pt x="4231838" y="271261"/>
+                </a:lnTo>
+                <a:cubicBezTo>
+                  <a:pt x="4231838" y="220229"/>
+                  <a:pt x="4258383" y="190476"/>
+                  <a:pt x="4300911" y="190476"/>
+                </a:cubicBezTo>
+                <a:cubicBezTo>
+                  <a:pt x="4342108" y="190476"/>
+                  <a:pt x="4360185" y="217404"/>
+                  <a:pt x="4360185" y="258173"/>
+                </a:cubicBezTo>
+                <a:lnTo>
+                  <a:pt x="4360185" y="494221"/>
+                </a:lnTo>
+                <a:lnTo>
+                  <a:pt x="4442483" y="494221"/>
+                </a:lnTo>
+                <a:lnTo>
+                  <a:pt x="4442483" y="257420"/>
+                </a:lnTo>
+                <a:cubicBezTo>
+                  <a:pt x="4442578" y="186333"/>
+                  <a:pt x="4404902" y="142174"/>
+                  <a:pt x="4332308" y="142174"/>
+                </a:cubicBezTo>
+                <a:moveTo>
+                  <a:pt x="4629533" y="142174"/>
+                </a:moveTo>
+                <a:cubicBezTo>
+                  <a:pt x="4553514" y="142174"/>
+                  <a:pt x="4496334" y="173905"/>
+                  <a:pt x="4496334" y="241602"/>
+                </a:cubicBezTo>
+                <a:cubicBezTo>
+                  <a:pt x="4496334" y="298943"/>
+                  <a:pt x="4536103" y="330014"/>
+                  <a:pt x="4580725" y="341030"/>
+                </a:cubicBezTo>
+                <a:lnTo>
+                  <a:pt x="4650464" y="358260"/>
+                </a:lnTo>
+                <a:cubicBezTo>
+                  <a:pt x="4687475" y="367205"/>
+                  <a:pt x="4704220" y="380387"/>
+                  <a:pt x="4704220" y="409387"/>
+                </a:cubicBezTo>
+                <a:cubicBezTo>
+                  <a:pt x="4704220" y="444601"/>
+                  <a:pt x="4679102" y="464656"/>
+                  <a:pt x="4635146" y="464656"/>
+                </a:cubicBezTo>
+                <a:cubicBezTo>
+                  <a:pt x="4587670" y="464656"/>
+                  <a:pt x="4563314" y="441870"/>
+                  <a:pt x="4555607" y="384624"/>
+                </a:cubicBezTo>
+                <a:lnTo>
+                  <a:pt x="4481682" y="405338"/>
+                </a:lnTo>
+                <a:cubicBezTo>
+                  <a:pt x="4485868" y="464750"/>
+                  <a:pt x="4541716" y="501282"/>
+                  <a:pt x="4626108" y="501282"/>
+                </a:cubicBezTo>
+                <a:cubicBezTo>
+                  <a:pt x="4720299" y="501282"/>
+                  <a:pt x="4771200" y="457782"/>
+                  <a:pt x="4771200" y="388767"/>
+                </a:cubicBezTo>
+                <a:cubicBezTo>
+                  <a:pt x="4771200" y="323894"/>
+                  <a:pt x="4725817" y="296965"/>
+                  <a:pt x="4678436" y="285196"/>
+                </a:cubicBezTo>
+                <a:lnTo>
+                  <a:pt x="4611456" y="268625"/>
+                </a:lnTo>
+                <a:cubicBezTo>
+                  <a:pt x="4577966" y="260339"/>
+                  <a:pt x="4563314" y="245180"/>
+                  <a:pt x="4563314" y="223054"/>
+                </a:cubicBezTo>
+                <a:cubicBezTo>
+                  <a:pt x="4563314" y="195466"/>
+                  <a:pt x="4587004" y="178895"/>
+                  <a:pt x="4622588" y="178895"/>
+                </a:cubicBezTo>
+                <a:cubicBezTo>
+                  <a:pt x="4664450" y="178895"/>
+                  <a:pt x="4690234" y="201680"/>
+                  <a:pt x="4693754" y="245180"/>
+                </a:cubicBezTo>
+                <a:lnTo>
+                  <a:pt x="4763493" y="224466"/>
+                </a:lnTo>
+                <a:cubicBezTo>
+                  <a:pt x="4755026" y="175976"/>
+                  <a:pt x="4706884" y="142174"/>
+                  <a:pt x="4629533" y="142174"/>
+                </a:cubicBezTo>
+                <a:moveTo>
+                  <a:pt x="4975471" y="463149"/>
+                </a:moveTo>
+                <a:cubicBezTo>
+                  <a:pt x="4921715" y="463149"/>
+                  <a:pt x="4891745" y="412776"/>
+                  <a:pt x="4891745" y="321634"/>
+                </a:cubicBezTo>
+                <a:cubicBezTo>
+                  <a:pt x="4891745" y="229080"/>
+                  <a:pt x="4921715" y="180119"/>
+                  <a:pt x="4975471" y="180119"/>
+                </a:cubicBezTo>
+                <a:cubicBezTo>
+                  <a:pt x="5029226" y="180119"/>
+                  <a:pt x="5059196" y="229833"/>
+                  <a:pt x="5059196" y="321634"/>
+                </a:cubicBezTo>
+                <a:cubicBezTo>
+                  <a:pt x="5059196" y="414189"/>
+                  <a:pt x="5029131" y="463149"/>
+                  <a:pt x="4975471" y="463149"/>
+                </a:cubicBezTo>
+                <a:moveTo>
+                  <a:pt x="4975471" y="142174"/>
+                </a:moveTo>
+                <a:cubicBezTo>
+                  <a:pt x="4865962" y="142174"/>
+                  <a:pt x="4805261" y="222959"/>
+                  <a:pt x="4805261" y="321634"/>
+                </a:cubicBezTo>
+                <a:cubicBezTo>
+                  <a:pt x="4805261" y="420309"/>
+                  <a:pt x="4865962" y="501094"/>
+                  <a:pt x="4975471" y="501094"/>
+                </a:cubicBezTo>
+                <a:cubicBezTo>
+                  <a:pt x="5084980" y="501094"/>
+                  <a:pt x="5145680" y="420309"/>
+                  <a:pt x="5145680" y="321634"/>
+                </a:cubicBezTo>
+                <a:cubicBezTo>
+                  <a:pt x="5145680" y="222959"/>
+                  <a:pt x="5084980" y="142174"/>
+                  <a:pt x="4975471" y="142174"/>
+                </a:cubicBezTo>
+                <a:moveTo>
+                  <a:pt x="5377257" y="142174"/>
+                </a:moveTo>
+                <a:cubicBezTo>
+                  <a:pt x="5325595" y="142174"/>
+                  <a:pt x="5297052" y="164301"/>
+                  <a:pt x="5280973" y="192547"/>
+                </a:cubicBezTo>
+                <a:lnTo>
+                  <a:pt x="5276787" y="192547"/>
+                </a:lnTo>
+                <a:lnTo>
+                  <a:pt x="5276787" y="149048"/>
+                </a:lnTo>
+                <a:lnTo>
+                  <a:pt x="5194488" y="149048"/>
+                </a:lnTo>
+                <a:lnTo>
+                  <a:pt x="5194488" y="494221"/>
+                </a:lnTo>
+                <a:lnTo>
+                  <a:pt x="5276787" y="494221"/>
+                </a:lnTo>
+                <a:lnTo>
+                  <a:pt x="5276787" y="271261"/>
+                </a:lnTo>
+                <a:cubicBezTo>
+                  <a:pt x="5276787" y="220229"/>
+                  <a:pt x="5303331" y="190476"/>
+                  <a:pt x="5345860" y="190476"/>
+                </a:cubicBezTo>
+                <a:cubicBezTo>
+                  <a:pt x="5387057" y="190476"/>
+                  <a:pt x="5405134" y="217404"/>
+                  <a:pt x="5405134" y="258173"/>
+                </a:cubicBezTo>
+                <a:lnTo>
+                  <a:pt x="5405134" y="494221"/>
+                </a:lnTo>
+                <a:lnTo>
+                  <a:pt x="5487432" y="494221"/>
+                </a:lnTo>
+                <a:lnTo>
+                  <a:pt x="5487432" y="257420"/>
+                </a:lnTo>
+                <a:cubicBezTo>
+                  <a:pt x="5487432" y="186333"/>
+                  <a:pt x="5449755" y="142174"/>
+                  <a:pt x="5377257" y="142174"/>
+                </a:cubicBezTo>
+                <a:moveTo>
+                  <a:pt x="323674" y="11016"/>
+                </a:moveTo>
+                <a:lnTo>
+                  <a:pt x="237190" y="11016"/>
+                </a:lnTo>
+                <a:lnTo>
+                  <a:pt x="237190" y="367864"/>
+                </a:lnTo>
+                <a:cubicBezTo>
+                  <a:pt x="237190" y="425864"/>
+                  <a:pt x="214831" y="460325"/>
+                  <a:pt x="161837" y="460325"/>
+                </a:cubicBezTo>
+                <a:cubicBezTo>
+                  <a:pt x="109509" y="460325"/>
+                  <a:pt x="86484" y="423698"/>
+                  <a:pt x="86484" y="360897"/>
+                </a:cubicBezTo>
+                <a:lnTo>
+                  <a:pt x="86484" y="294612"/>
+                </a:lnTo>
+                <a:lnTo>
+                  <a:pt x="0" y="315985"/>
+                </a:lnTo>
+                <a:lnTo>
+                  <a:pt x="0" y="345644"/>
+                </a:lnTo>
+                <a:cubicBezTo>
+                  <a:pt x="0" y="436033"/>
+                  <a:pt x="45383" y="505143"/>
+                  <a:pt x="161837" y="505143"/>
+                </a:cubicBezTo>
+                <a:cubicBezTo>
+                  <a:pt x="278291" y="505143"/>
+                  <a:pt x="323674" y="436127"/>
+                  <a:pt x="323674" y="345644"/>
+                </a:cubicBezTo>
+                <a:lnTo>
+                  <a:pt x="323674" y="11016"/>
+                </a:lnTo>
+                <a:moveTo>
+                  <a:pt x="844008" y="11016"/>
+                </a:moveTo>
+                <a:lnTo>
+                  <a:pt x="761710" y="11016"/>
+                </a:lnTo>
+                <a:lnTo>
+                  <a:pt x="761710" y="494221"/>
+                </a:lnTo>
+                <a:lnTo>
+                  <a:pt x="844008" y="494221"/>
+                </a:lnTo>
+                <a:lnTo>
+                  <a:pt x="844008" y="271261"/>
+                </a:lnTo>
+                <a:cubicBezTo>
+                  <a:pt x="844008" y="220229"/>
+                  <a:pt x="870553" y="190476"/>
+                  <a:pt x="913081" y="190476"/>
+                </a:cubicBezTo>
+                <a:cubicBezTo>
+                  <a:pt x="954278" y="190476"/>
+                  <a:pt x="972355" y="217404"/>
+                  <a:pt x="972355" y="258173"/>
+                </a:cubicBezTo>
+                <a:lnTo>
+                  <a:pt x="972355" y="494221"/>
+                </a:lnTo>
+                <a:lnTo>
+                  <a:pt x="1054653" y="494221"/>
+                </a:lnTo>
+                <a:lnTo>
+                  <a:pt x="1054653" y="257420"/>
+                </a:lnTo>
+                <a:cubicBezTo>
+                  <a:pt x="1054653" y="186333"/>
+                  <a:pt x="1016977" y="142174"/>
+                  <a:pt x="944478" y="142174"/>
+                </a:cubicBezTo>
+                <a:cubicBezTo>
+                  <a:pt x="892816" y="142174"/>
+                  <a:pt x="864273" y="164301"/>
+                  <a:pt x="848194" y="192547"/>
+                </a:cubicBezTo>
+                <a:lnTo>
+                  <a:pt x="844008" y="192547"/>
+                </a:lnTo>
+                <a:lnTo>
+                  <a:pt x="844008" y="11016"/>
+                </a:lnTo>
+                <a:moveTo>
+                  <a:pt x="3352342" y="11016"/>
+                </a:moveTo>
+                <a:lnTo>
+                  <a:pt x="3265857" y="11016"/>
+                </a:lnTo>
+                <a:lnTo>
+                  <a:pt x="3265857" y="367864"/>
+                </a:lnTo>
+                <a:cubicBezTo>
+                  <a:pt x="3265857" y="425864"/>
+                  <a:pt x="3243499" y="460325"/>
+                  <a:pt x="3190504" y="460325"/>
+                </a:cubicBezTo>
+                <a:cubicBezTo>
+                  <a:pt x="3138176" y="460325"/>
+                  <a:pt x="3115152" y="423698"/>
+                  <a:pt x="3115152" y="360897"/>
+                </a:cubicBezTo>
+                <a:lnTo>
+                  <a:pt x="3115152" y="294612"/>
+                </a:lnTo>
+                <a:lnTo>
+                  <a:pt x="3028667" y="315985"/>
+                </a:lnTo>
+                <a:lnTo>
+                  <a:pt x="3028667" y="345644"/>
+                </a:lnTo>
+                <a:cubicBezTo>
+                  <a:pt x="3028667" y="436033"/>
+                  <a:pt x="3074050" y="505143"/>
+                  <a:pt x="3190504" y="505143"/>
+                </a:cubicBezTo>
+                <a:cubicBezTo>
+                  <a:pt x="3306959" y="505143"/>
+                  <a:pt x="3352342" y="436127"/>
+                  <a:pt x="3352342" y="345644"/>
+                </a:cubicBezTo>
+                <a:lnTo>
+                  <a:pt x="3352342" y="11016"/>
+                </a:lnTo>
+                <a:moveTo>
+                  <a:pt x="3872675" y="11016"/>
+                </a:moveTo>
+                <a:lnTo>
+                  <a:pt x="3790377" y="11016"/>
+                </a:lnTo>
+                <a:lnTo>
+                  <a:pt x="3790377" y="494221"/>
+                </a:lnTo>
+                <a:lnTo>
+                  <a:pt x="3872675" y="494221"/>
+                </a:lnTo>
+                <a:lnTo>
+                  <a:pt x="3872675" y="271261"/>
+                </a:lnTo>
+                <a:cubicBezTo>
+                  <a:pt x="3872675" y="220229"/>
+                  <a:pt x="3899220" y="190476"/>
+                  <a:pt x="3941749" y="190476"/>
+                </a:cubicBezTo>
+                <a:cubicBezTo>
+                  <a:pt x="3982945" y="190476"/>
+                  <a:pt x="4001022" y="217404"/>
+                  <a:pt x="4001022" y="258173"/>
+                </a:cubicBezTo>
+                <a:lnTo>
+                  <a:pt x="4001022" y="494221"/>
+                </a:lnTo>
+                <a:lnTo>
+                  <a:pt x="4083320" y="494221"/>
+                </a:lnTo>
+                <a:lnTo>
+                  <a:pt x="4083320" y="257420"/>
+                </a:lnTo>
+                <a:cubicBezTo>
+                  <a:pt x="4083320" y="186333"/>
+                  <a:pt x="4045644" y="142174"/>
+                  <a:pt x="3973146" y="142174"/>
+                </a:cubicBezTo>
+                <a:cubicBezTo>
+                  <a:pt x="3921483" y="142174"/>
+                  <a:pt x="3892941" y="164301"/>
+                  <a:pt x="3876861" y="192547"/>
+                </a:cubicBezTo>
+                <a:lnTo>
+                  <a:pt x="3872675" y="192547"/>
+                </a:lnTo>
+                <a:lnTo>
+                  <a:pt x="3872675" y="11016"/>
+                </a:lnTo>
+                <a:moveTo>
+                  <a:pt x="2730110" y="454864"/>
+                </a:moveTo>
+                <a:cubicBezTo>
+                  <a:pt x="2663130" y="454864"/>
+                  <a:pt x="2622029" y="401007"/>
+                  <a:pt x="2622029" y="343761"/>
+                </a:cubicBezTo>
+                <a:cubicBezTo>
+                  <a:pt x="2622029" y="307887"/>
+                  <a:pt x="2638108" y="274745"/>
+                  <a:pt x="2664557" y="256102"/>
+                </a:cubicBezTo>
+                <a:lnTo>
+                  <a:pt x="2822208" y="426617"/>
+                </a:lnTo>
+                <a:cubicBezTo>
+                  <a:pt x="2792904" y="443848"/>
+                  <a:pt x="2760080" y="454864"/>
+                  <a:pt x="2730110" y="454864"/>
+                </a:cubicBezTo>
+                <a:moveTo>
+                  <a:pt x="2883575" y="369936"/>
+                </a:moveTo>
+                <a:lnTo>
+                  <a:pt x="2746856" y="220794"/>
+                </a:lnTo>
+                <a:cubicBezTo>
+                  <a:pt x="2771307" y="211096"/>
+                  <a:pt x="2794998" y="207706"/>
+                  <a:pt x="2814502" y="207706"/>
+                </a:cubicBezTo>
+                <a:cubicBezTo>
+                  <a:pt x="2871016" y="207706"/>
+                  <a:pt x="2905838" y="240190"/>
+                  <a:pt x="2905838" y="296118"/>
+                </a:cubicBezTo>
+                <a:cubicBezTo>
+                  <a:pt x="2905934" y="320975"/>
+                  <a:pt x="2898893" y="346491"/>
+                  <a:pt x="2883575" y="369936"/>
+                </a:cubicBezTo>
+                <a:moveTo>
+                  <a:pt x="2728017" y="200833"/>
+                </a:moveTo>
+                <a:lnTo>
+                  <a:pt x="2698047" y="167690"/>
+                </a:lnTo>
+                <a:cubicBezTo>
+                  <a:pt x="2671503" y="138691"/>
+                  <a:pt x="2663891" y="120707"/>
+                  <a:pt x="2663891" y="99334"/>
+                </a:cubicBezTo>
+                <a:cubicBezTo>
+                  <a:pt x="2663891" y="59318"/>
+                  <a:pt x="2689675" y="36532"/>
+                  <a:pt x="2730110" y="36532"/>
+                </a:cubicBezTo>
+                <a:cubicBezTo>
+                  <a:pt x="2771307" y="36532"/>
+                  <a:pt x="2795664" y="59977"/>
+                  <a:pt x="2795664" y="102817"/>
+                </a:cubicBezTo>
+                <a:cubicBezTo>
+                  <a:pt x="2795664" y="142174"/>
+                  <a:pt x="2776159" y="179460"/>
+                  <a:pt x="2728017" y="200833"/>
+                </a:cubicBezTo>
+                <a:moveTo>
+                  <a:pt x="2732204" y="0"/>
+                </a:moveTo>
+                <a:cubicBezTo>
+                  <a:pt x="2635920" y="0"/>
+                  <a:pt x="2588539" y="53198"/>
+                  <a:pt x="2588539" y="119389"/>
+                </a:cubicBezTo>
+                <a:cubicBezTo>
+                  <a:pt x="2588539" y="155262"/>
+                  <a:pt x="2603857" y="191229"/>
+                  <a:pt x="2644387" y="234635"/>
+                </a:cubicBezTo>
+                <a:lnTo>
+                  <a:pt x="2645053" y="236047"/>
+                </a:lnTo>
+                <a:cubicBezTo>
+                  <a:pt x="2576741" y="268531"/>
+                  <a:pt x="2545344" y="320975"/>
+                  <a:pt x="2545344" y="374832"/>
+                </a:cubicBezTo>
+                <a:cubicBezTo>
+                  <a:pt x="2545344" y="445919"/>
+                  <a:pt x="2600432" y="505331"/>
+                  <a:pt x="2685584" y="505331"/>
+                </a:cubicBezTo>
+                <a:cubicBezTo>
+                  <a:pt x="2734392" y="505331"/>
+                  <a:pt x="2791573" y="485276"/>
+                  <a:pt x="2843235" y="449403"/>
+                </a:cubicBezTo>
+                <a:lnTo>
+                  <a:pt x="2885097" y="494315"/>
+                </a:lnTo>
+                <a:lnTo>
+                  <a:pt x="2994606" y="494315"/>
+                </a:lnTo>
+                <a:lnTo>
+                  <a:pt x="2994606" y="490831"/>
+                </a:lnTo>
+                <a:lnTo>
+                  <a:pt x="2905363" y="393474"/>
+                </a:lnTo>
+                <a:cubicBezTo>
+                  <a:pt x="2943039" y="349316"/>
+                  <a:pt x="2964637" y="301014"/>
+                  <a:pt x="2964637" y="258833"/>
+                </a:cubicBezTo>
+                <a:cubicBezTo>
+                  <a:pt x="2964637" y="206388"/>
+                  <a:pt x="2929053" y="171174"/>
+                  <a:pt x="2873300" y="171174"/>
+                </a:cubicBezTo>
+                <a:cubicBezTo>
+                  <a:pt x="2843996" y="171174"/>
+                  <a:pt x="2811172" y="179460"/>
+                  <a:pt x="2789574" y="187745"/>
+                </a:cubicBezTo>
+                <a:lnTo>
+                  <a:pt x="2788147" y="185015"/>
+                </a:lnTo>
+                <a:cubicBezTo>
+                  <a:pt x="2841142" y="156674"/>
+                  <a:pt x="2863500" y="130499"/>
+                  <a:pt x="2863500" y="93873"/>
+                </a:cubicBezTo>
+                <a:cubicBezTo>
+                  <a:pt x="2863310" y="41428"/>
+                  <a:pt x="2815929" y="0"/>
+                  <a:pt x="2732204" y="0"/>
+                </a:cubicBezTo>
+              </a:path>
+            </a:pathLst>
+          </a:custGeom>
+          <a:solidFill>
+            <a:schemeClr val="bg1"/>
+          </a:solidFill>
+          <a:ln w="9509" cap="flat">
+            <a:noFill/>
+            <a:prstDash val="solid"/>
+            <a:miter/>
+          </a:ln>
+        </p:spPr>
+        <p:txBody>
+          <a:bodyPr rtlCol="0" anchor="ctr"/>
+          <a:lstStyle/>
+          <a:p>
+            <a:endParaRPr lang="en-GB"/>
+          </a:p>
+        </p:txBody>
+      </p:sp>
+      <p:sp>
+        <p:nvSpPr>
+          <p:cNvPr id="3" name="Footer Placeholder 4">
+            <a:extLst>
+              <a:ext uri="{FF2B5EF4-FFF2-40B4-BE49-F238E27FC236}">
+                <a16:creationId xmlns:a16="http://schemas.microsoft.com/office/drawing/2014/main" id="{0AB8E24E-E435-1D31-7801-FC2E55A29FFB}"/>
+              </a:ext>
+            </a:extLst>
+          </p:cNvPr>
+          <p:cNvSpPr>
+            <a:spLocks noGrp="1"/>
+          </p:cNvSpPr>
+          <p:nvPr>
+            <p:ph type="ftr" sz="quarter" idx="3"/>
+          </p:nvPr>
+        </p:nvSpPr>
+        <p:spPr>
+          <a:xfrm>
+            <a:off x="288259" y="5868000"/>
+            <a:ext cx="11610516" cy="304122"/>
+          </a:xfrm>
+          <a:prstGeom prst="rect">
+            <a:avLst/>
+          </a:prstGeom>
+        </p:spPr>
+        <p:txBody>
+          <a:bodyPr vert="horz" wrap="square" lIns="0" tIns="0" rIns="0" bIns="0" rtlCol="0" anchor="b" anchorCtr="0">
+            <a:spAutoFit/>
+          </a:bodyPr>
+          <a:lstStyle>
+            <a:lvl1pPr algn="l">
+              <a:lnSpc>
+                <a:spcPct val="110000"/>
+              </a:lnSpc>
+              <a:spcBef>
+                <a:spcPts val="600"/>
+              </a:spcBef>
+              <a:spcAft>
+                <a:spcPts val="600"/>
+              </a:spcAft>
+              <a:defRPr sz="800" b="0" i="0">
+                <a:solidFill>
+                  <a:schemeClr val="bg1"/>
+                </a:solidFill>
+                <a:latin typeface="+mn-lt"/>
+              </a:defRPr>
+            </a:lvl1pPr>
+          </a:lstStyle>
+          <a:p>
+            <a:pPr>
+              <a:spcBef>
+                <a:spcPts val="0"/>
+              </a:spcBef>
+              <a:spcAft>
+                <a:spcPts val="300"/>
+              </a:spcAft>
+            </a:pPr>
+            <a:r>
+              <a:rPr lang="en-US"/>
+              <a:t>Slide legal disclaimer goes here if required
+Slide footer goes here if required. Turn off globally using the Header/Footer function (under the Insert menu).</a:t>
+            </a:r>
+            <a:endParaRPr lang="en-US" dirty="0"/>
+          </a:p>
+        </p:txBody>
+      </p:sp>
+      <p:sp>
+        <p:nvSpPr>
+          <p:cNvPr id="4" name="TextBox 3">
+            <a:extLst>
+              <a:ext uri="{FF2B5EF4-FFF2-40B4-BE49-F238E27FC236}">
+                <a16:creationId xmlns:a16="http://schemas.microsoft.com/office/drawing/2014/main" id="{810024F5-8149-5166-0958-7A010143FEC1}"/>
+              </a:ext>
+            </a:extLst>
+          </p:cNvPr>
+          <p:cNvSpPr txBox="1"/>
+          <p:nvPr userDrawn="1"/>
+        </p:nvSpPr>
+        <p:spPr>
+          <a:xfrm>
+            <a:off x="8638050" y="6432550"/>
+            <a:ext cx="3260725" cy="183393"/>
+          </a:xfrm>
+          <a:prstGeom prst="rect">
+            <a:avLst/>
+          </a:prstGeom>
+          <a:noFill/>
+        </p:spPr>
+        <p:txBody>
+          <a:bodyPr wrap="square" lIns="0" tIns="0" rIns="0" bIns="0" rtlCol="0" anchor="b" anchorCtr="0">
+            <a:noAutofit/>
+          </a:bodyPr>
+          <a:lstStyle/>
+          <a:p>
+            <a:pPr algn="r"/>
+            <a:r>
+              <a:rPr lang="en-US" sz="1500" kern="1200" dirty="0">
+                <a:solidFill>
+                  <a:schemeClr val="bg1"/>
+                </a:solidFill>
+                <a:latin typeface="+mn-lt"/>
+                <a:ea typeface="+mn-ea"/>
+                <a:cs typeface="+mn-cs"/>
+              </a:rPr>
+              <a:t>Core program name</a:t>
+            </a:r>
+          </a:p>
+        </p:txBody>
+      </p:sp>
     </p:spTree>
+    <p:extLst>
+      <p:ext uri="{BB962C8B-B14F-4D97-AF65-F5344CB8AC3E}">
+        <p14:creationId xmlns:p14="http://schemas.microsoft.com/office/powerpoint/2010/main" val="2655019450"/>
+      </p:ext>
+    </p:extLst>
+  </p:cSld>
+  <p:clrMapOvr>
+    <a:masterClrMapping/>
+  </p:clrMapOvr>
+</p:sldLayout>
+</file>
+
+<file path=ppt/slideLayouts/slideLayout2.xml><?xml version="1.0" encoding="utf-8"?>
+<p:sldLayout xmlns:a="http://schemas.openxmlformats.org/drawingml/2006/main" xmlns:r="http://schemas.openxmlformats.org/officeDocument/2006/relationships" xmlns:p="http://schemas.openxmlformats.org/presentationml/2006/main" preserve="1" userDrawn="1">
+  <p:cSld name="Title Only">
+    <p:spTree>
+      <p:nvGrpSpPr>
+        <p:cNvPr id="1" name=""/>
+        <p:cNvGrpSpPr/>
+        <p:nvPr/>
+      </p:nvGrpSpPr>
+      <p:grpSpPr>
+        <a:xfrm>
+          <a:off x="0" y="0"/>
+          <a:ext cx="0" cy="0"/>
+          <a:chOff x="0" y="0"/>
+          <a:chExt cx="0" cy="0"/>
+        </a:xfrm>
+      </p:grpSpPr>
+      <p:sp>
+        <p:nvSpPr>
+          <p:cNvPr id="5" name="Slide Number Placeholder 4">
+            <a:extLst>
+              <a:ext uri="{FF2B5EF4-FFF2-40B4-BE49-F238E27FC236}">
+                <a16:creationId xmlns:a16="http://schemas.microsoft.com/office/drawing/2014/main" id="{E9119AF0-BAA0-31B4-998E-02AD3B07E859}"/>
+              </a:ext>
+            </a:extLst>
+          </p:cNvPr>
+          <p:cNvSpPr>
+            <a:spLocks noGrp="1"/>
+          </p:cNvSpPr>
+          <p:nvPr>
+            <p:ph type="sldNum" sz="quarter" idx="12"/>
+          </p:nvPr>
+        </p:nvSpPr>
+        <p:spPr/>
+        <p:txBody>
+          <a:bodyPr/>
+          <a:lstStyle/>
+          <a:p>
+            <a:fld id="{AEC8D767-5246-2244-A4A3-B8AFB218393C}" type="slidenum">
+              <a:rPr lang="en-GB" smtClean="0"/>
+              <a:t>‹#›</a:t>
+            </a:fld>
+            <a:endParaRPr lang="en-GB"/>
+          </a:p>
+        </p:txBody>
+      </p:sp>
+      <p:sp>
+        <p:nvSpPr>
+          <p:cNvPr id="3" name="Text Placeholder 7">
+            <a:extLst>
+              <a:ext uri="{FF2B5EF4-FFF2-40B4-BE49-F238E27FC236}">
+                <a16:creationId xmlns:a16="http://schemas.microsoft.com/office/drawing/2014/main" id="{17F42810-DCAF-7A30-3A4F-E23EA682FA39}"/>
+              </a:ext>
+            </a:extLst>
+          </p:cNvPr>
+          <p:cNvSpPr>
+            <a:spLocks noGrp="1"/>
+          </p:cNvSpPr>
+          <p:nvPr>
+            <p:ph type="body" sz="quarter" idx="14" hasCustomPrompt="1"/>
+          </p:nvPr>
+        </p:nvSpPr>
+        <p:spPr>
+          <a:xfrm>
+            <a:off x="8124825" y="293525"/>
+            <a:ext cx="3778250" cy="878050"/>
+          </a:xfrm>
+        </p:spPr>
+        <p:txBody>
+          <a:bodyPr/>
+          <a:lstStyle>
+            <a:lvl1pPr>
+              <a:defRPr sz="1400"/>
+            </a:lvl1pPr>
+            <a:lvl2pPr>
+              <a:defRPr sz="1400"/>
+            </a:lvl2pPr>
+            <a:lvl3pPr>
+              <a:defRPr sz="1200"/>
+            </a:lvl3pPr>
+          </a:lstStyle>
+          <a:p>
+            <a:pPr lvl="0"/>
+            <a:r>
+              <a:rPr lang="en-GB" dirty="0"/>
+              <a:t>Click to add text. Delete if not required.</a:t>
+            </a:r>
+          </a:p>
+          <a:p>
+            <a:pPr lvl="1"/>
+            <a:r>
+              <a:rPr lang="en-GB" dirty="0"/>
+              <a:t>Second level</a:t>
+            </a:r>
+          </a:p>
+          <a:p>
+            <a:pPr lvl="2"/>
+            <a:r>
+              <a:rPr lang="en-GB" dirty="0"/>
+              <a:t>Third level</a:t>
+            </a:r>
+          </a:p>
+        </p:txBody>
+      </p:sp>
+      <p:sp>
+        <p:nvSpPr>
+          <p:cNvPr id="7" name="Title 6">
+            <a:extLst>
+              <a:ext uri="{FF2B5EF4-FFF2-40B4-BE49-F238E27FC236}">
+                <a16:creationId xmlns:a16="http://schemas.microsoft.com/office/drawing/2014/main" id="{5373482F-4FA8-181D-CA6D-04D8D98AD13B}"/>
+              </a:ext>
+            </a:extLst>
+          </p:cNvPr>
+          <p:cNvSpPr>
+            <a:spLocks noGrp="1"/>
+          </p:cNvSpPr>
+          <p:nvPr>
+            <p:ph type="title"/>
+          </p:nvPr>
+        </p:nvSpPr>
+        <p:spPr>
+          <a:xfrm>
+            <a:off x="288303" y="262267"/>
+            <a:ext cx="6713538" cy="457818"/>
+          </a:xfrm>
+        </p:spPr>
+        <p:txBody>
+          <a:bodyPr/>
+          <a:lstStyle/>
+          <a:p>
+            <a:r>
+              <a:rPr lang="en-US"/>
+              <a:t>Click to edit Master title style</a:t>
+            </a:r>
+            <a:endParaRPr lang="en-GB" dirty="0"/>
+          </a:p>
+        </p:txBody>
+      </p:sp>
+      <p:sp>
+        <p:nvSpPr>
+          <p:cNvPr id="6" name="Subtitle 2">
+            <a:extLst>
+              <a:ext uri="{FF2B5EF4-FFF2-40B4-BE49-F238E27FC236}">
+                <a16:creationId xmlns:a16="http://schemas.microsoft.com/office/drawing/2014/main" id="{64BCB963-058E-5C5B-947F-AC1D9DD6C9FB}"/>
+              </a:ext>
+            </a:extLst>
+          </p:cNvPr>
+          <p:cNvSpPr>
+            <a:spLocks noGrp="1"/>
+          </p:cNvSpPr>
+          <p:nvPr>
+            <p:ph type="subTitle" idx="16" hasCustomPrompt="1"/>
+          </p:nvPr>
+        </p:nvSpPr>
+        <p:spPr>
+          <a:xfrm>
+            <a:off x="288302" y="713620"/>
+            <a:ext cx="6713538" cy="292965"/>
+          </a:xfrm>
+        </p:spPr>
+        <p:txBody>
+          <a:bodyPr vert="horz" wrap="square" lIns="0" tIns="0" rIns="0" bIns="0" rtlCol="0" anchor="t">
+            <a:spAutoFit/>
+          </a:bodyPr>
+          <a:lstStyle>
+            <a:lvl1pPr>
+              <a:defRPr lang="en-GB" b="1" dirty="0"/>
+            </a:lvl1pPr>
+          </a:lstStyle>
+          <a:p>
+            <a:pPr lvl="0"/>
+            <a:r>
+              <a:rPr lang="en-GB" dirty="0"/>
+              <a:t>Subtitle. Delete if not required.</a:t>
+            </a:r>
+          </a:p>
+        </p:txBody>
+      </p:sp>
+      <p:sp>
+        <p:nvSpPr>
+          <p:cNvPr id="2" name="Footer Placeholder 4">
+            <a:extLst>
+              <a:ext uri="{FF2B5EF4-FFF2-40B4-BE49-F238E27FC236}">
+                <a16:creationId xmlns:a16="http://schemas.microsoft.com/office/drawing/2014/main" id="{B4313EC1-0D30-C944-21E6-B89F8290D2D3}"/>
+              </a:ext>
+            </a:extLst>
+          </p:cNvPr>
+          <p:cNvSpPr>
+            <a:spLocks noGrp="1"/>
+          </p:cNvSpPr>
+          <p:nvPr>
+            <p:ph type="ftr" sz="quarter" idx="3"/>
+          </p:nvPr>
+        </p:nvSpPr>
+        <p:spPr>
+          <a:xfrm>
+            <a:off x="288259" y="5868000"/>
+            <a:ext cx="11610516" cy="304122"/>
+          </a:xfrm>
+          <a:prstGeom prst="rect">
+            <a:avLst/>
+          </a:prstGeom>
+        </p:spPr>
+        <p:txBody>
+          <a:bodyPr vert="horz" wrap="square" lIns="0" tIns="0" rIns="0" bIns="0" rtlCol="0" anchor="b" anchorCtr="0">
+            <a:spAutoFit/>
+          </a:bodyPr>
+          <a:lstStyle>
+            <a:lvl1pPr algn="l">
+              <a:lnSpc>
+                <a:spcPct val="110000"/>
+              </a:lnSpc>
+              <a:spcBef>
+                <a:spcPts val="600"/>
+              </a:spcBef>
+              <a:spcAft>
+                <a:spcPts val="600"/>
+              </a:spcAft>
+              <a:defRPr sz="800" b="0" i="0">
+                <a:solidFill>
+                  <a:schemeClr val="tx1"/>
+                </a:solidFill>
+                <a:latin typeface="+mn-lt"/>
+              </a:defRPr>
+            </a:lvl1pPr>
+          </a:lstStyle>
+          <a:p>
+            <a:pPr>
+              <a:spcBef>
+                <a:spcPts val="0"/>
+              </a:spcBef>
+              <a:spcAft>
+                <a:spcPts val="300"/>
+              </a:spcAft>
+            </a:pPr>
+            <a:r>
+              <a:rPr lang="en-US" b="0" i="0" dirty="0">
+                <a:effectLst/>
+              </a:rPr>
+              <a:t>Slide legal disclaimer goes here if required
+Slide footer goes here if required. Turn off globally using the Header/Footer function (under the Insert menu).</a:t>
+            </a:r>
+          </a:p>
+        </p:txBody>
+      </p:sp>
+    </p:spTree>
+    <p:extLst>
+      <p:ext uri="{BB962C8B-B14F-4D97-AF65-F5344CB8AC3E}">
+        <p14:creationId xmlns:p14="http://schemas.microsoft.com/office/powerpoint/2010/main" val="1841252541"/>
+      </p:ext>
+    </p:extLst>
   </p:cSld>
   <p:clrMapOvr>
     <a:masterClrMapping/>
@@ -1562,7 +4726,7 @@
 </file>
 
 <file path=ppt/slideMasters/slideMaster1.xml><?xml version="1.0" encoding="utf-8"?>
-<p:sldMaster xmlns:a="http://schemas.openxmlformats.org/drawingml/2006/main" xmlns:r="http://schemas.openxmlformats.org/officeDocument/2006/relationships" xmlns:p="http://schemas.openxmlformats.org/presentationml/2006/main">
+<p:sldMaster xmlns:a="http://schemas.openxmlformats.org/drawingml/2006/main" xmlns:r="http://schemas.openxmlformats.org/officeDocument/2006/relationships" xmlns:p="http://schemas.openxmlformats.org/presentationml/2006/main" preserve="1">
   <p:cSld>
     <p:bg>
       <p:bgRef idx="1001">
@@ -1583,23 +4747,854 @@
           <a:chExt cx="0" cy="0"/>
         </a:xfrm>
       </p:grpSpPr>
+      <p:sp>
+        <p:nvSpPr>
+          <p:cNvPr id="2" name="Title Placeholder 1">
+            <a:extLst>
+              <a:ext uri="{FF2B5EF4-FFF2-40B4-BE49-F238E27FC236}">
+                <a16:creationId xmlns:a16="http://schemas.microsoft.com/office/drawing/2014/main" id="{7AD3AC25-83CD-60B4-726C-FF80D1E34156}"/>
+              </a:ext>
+            </a:extLst>
+          </p:cNvPr>
+          <p:cNvSpPr>
+            <a:spLocks noGrp="1"/>
+          </p:cNvSpPr>
+          <p:nvPr>
+            <p:ph type="title"/>
+          </p:nvPr>
+        </p:nvSpPr>
+        <p:spPr>
+          <a:xfrm>
+            <a:off x="288303" y="262267"/>
+            <a:ext cx="9649446" cy="468590"/>
+          </a:xfrm>
+          <a:prstGeom prst="rect">
+            <a:avLst/>
+          </a:prstGeom>
+        </p:spPr>
+        <p:txBody>
+          <a:bodyPr vert="horz" wrap="square" lIns="0" tIns="0" rIns="0" bIns="0" rtlCol="0" anchor="t">
+            <a:spAutoFit/>
+          </a:bodyPr>
+          <a:lstStyle/>
+          <a:p>
+            <a:r>
+              <a:rPr lang="en-US"/>
+              <a:t>Click to edit Master title style</a:t>
+            </a:r>
+            <a:endParaRPr lang="en-GB" dirty="0"/>
+          </a:p>
+        </p:txBody>
+      </p:sp>
+      <p:sp>
+        <p:nvSpPr>
+          <p:cNvPr id="3" name="Text Placeholder 2">
+            <a:extLst>
+              <a:ext uri="{FF2B5EF4-FFF2-40B4-BE49-F238E27FC236}">
+                <a16:creationId xmlns:a16="http://schemas.microsoft.com/office/drawing/2014/main" id="{FB6C014F-3AB8-1D05-B6D7-A26746AAF1A0}"/>
+              </a:ext>
+            </a:extLst>
+          </p:cNvPr>
+          <p:cNvSpPr>
+            <a:spLocks noGrp="1"/>
+          </p:cNvSpPr>
+          <p:nvPr>
+            <p:ph type="body" idx="1"/>
+          </p:nvPr>
+        </p:nvSpPr>
+        <p:spPr>
+          <a:xfrm>
+            <a:off x="289384" y="1822451"/>
+            <a:ext cx="11610516" cy="3943349"/>
+          </a:xfrm>
+          <a:prstGeom prst="rect">
+            <a:avLst/>
+          </a:prstGeom>
+        </p:spPr>
+        <p:txBody>
+          <a:bodyPr vert="horz" lIns="0" tIns="0" rIns="0" bIns="0" rtlCol="0">
+            <a:noAutofit/>
+          </a:bodyPr>
+          <a:lstStyle/>
+          <a:p>
+            <a:pPr lvl="0"/>
+            <a:r>
+              <a:rPr lang="en-US"/>
+              <a:t>Click to edit Master text styles</a:t>
+            </a:r>
+          </a:p>
+          <a:p>
+            <a:pPr lvl="1"/>
+            <a:r>
+              <a:rPr lang="en-US"/>
+              <a:t>Second level</a:t>
+            </a:r>
+          </a:p>
+          <a:p>
+            <a:pPr lvl="2"/>
+            <a:r>
+              <a:rPr lang="en-US"/>
+              <a:t>Third level</a:t>
+            </a:r>
+          </a:p>
+          <a:p>
+            <a:pPr lvl="3"/>
+            <a:r>
+              <a:rPr lang="en-US"/>
+              <a:t>Fourth level</a:t>
+            </a:r>
+          </a:p>
+          <a:p>
+            <a:pPr lvl="4"/>
+            <a:r>
+              <a:rPr lang="en-US"/>
+              <a:t>Fifth level</a:t>
+            </a:r>
+            <a:endParaRPr lang="en-GB" dirty="0"/>
+          </a:p>
+        </p:txBody>
+      </p:sp>
+      <p:sp>
+        <p:nvSpPr>
+          <p:cNvPr id="5" name="Footer Placeholder 4">
+            <a:extLst>
+              <a:ext uri="{FF2B5EF4-FFF2-40B4-BE49-F238E27FC236}">
+                <a16:creationId xmlns:a16="http://schemas.microsoft.com/office/drawing/2014/main" id="{C2DB68EF-BA48-F4BC-BE79-97134696D633}"/>
+              </a:ext>
+            </a:extLst>
+          </p:cNvPr>
+          <p:cNvSpPr>
+            <a:spLocks noGrp="1"/>
+          </p:cNvSpPr>
+          <p:nvPr>
+            <p:ph type="ftr" sz="quarter" idx="3"/>
+          </p:nvPr>
+        </p:nvSpPr>
+        <p:spPr>
+          <a:xfrm>
+            <a:off x="288259" y="5868000"/>
+            <a:ext cx="11610516" cy="304122"/>
+          </a:xfrm>
+          <a:prstGeom prst="rect">
+            <a:avLst/>
+          </a:prstGeom>
+        </p:spPr>
+        <p:txBody>
+          <a:bodyPr vert="horz" wrap="square" lIns="0" tIns="0" rIns="0" bIns="0" rtlCol="0" anchor="b" anchorCtr="0">
+            <a:spAutoFit/>
+          </a:bodyPr>
+          <a:lstStyle>
+            <a:lvl1pPr algn="l">
+              <a:lnSpc>
+                <a:spcPct val="110000"/>
+              </a:lnSpc>
+              <a:spcBef>
+                <a:spcPts val="600"/>
+              </a:spcBef>
+              <a:spcAft>
+                <a:spcPts val="600"/>
+              </a:spcAft>
+              <a:defRPr sz="800" b="0" i="0">
+                <a:solidFill>
+                  <a:schemeClr val="tx1"/>
+                </a:solidFill>
+                <a:latin typeface="+mn-lt"/>
+              </a:defRPr>
+            </a:lvl1pPr>
+          </a:lstStyle>
+          <a:p>
+            <a:pPr>
+              <a:spcBef>
+                <a:spcPts val="0"/>
+              </a:spcBef>
+              <a:spcAft>
+                <a:spcPts val="300"/>
+              </a:spcAft>
+            </a:pPr>
+            <a:r>
+              <a:rPr lang="en-US" b="0" i="0" dirty="0">
+                <a:effectLst/>
+              </a:rPr>
+              <a:t>Slide legal disclaimer goes here if required
+Slide footer goes here if required. Turn off globally using the Header/Footer function (under the Insert menu).</a:t>
+            </a:r>
+          </a:p>
+        </p:txBody>
+      </p:sp>
+      <p:sp>
+        <p:nvSpPr>
+          <p:cNvPr id="6" name="Slide Number Placeholder 5">
+            <a:extLst>
+              <a:ext uri="{FF2B5EF4-FFF2-40B4-BE49-F238E27FC236}">
+                <a16:creationId xmlns:a16="http://schemas.microsoft.com/office/drawing/2014/main" id="{150AF38A-4788-8D76-5A2D-056814C2D2C7}"/>
+              </a:ext>
+            </a:extLst>
+          </p:cNvPr>
+          <p:cNvSpPr>
+            <a:spLocks noGrp="1"/>
+          </p:cNvSpPr>
+          <p:nvPr>
+            <p:ph type="sldNum" sz="quarter" idx="4"/>
+          </p:nvPr>
+        </p:nvSpPr>
+        <p:spPr>
+          <a:xfrm>
+            <a:off x="11581942" y="6433878"/>
+            <a:ext cx="320674" cy="153463"/>
+          </a:xfrm>
+          <a:prstGeom prst="rect">
+            <a:avLst/>
+          </a:prstGeom>
+        </p:spPr>
+        <p:txBody>
+          <a:bodyPr vert="horz" lIns="0" tIns="0" rIns="0" bIns="0" rtlCol="0" anchor="ctr"/>
+          <a:lstStyle>
+            <a:lvl1pPr algn="r">
+              <a:lnSpc>
+                <a:spcPct val="110000"/>
+              </a:lnSpc>
+              <a:spcBef>
+                <a:spcPts val="600"/>
+              </a:spcBef>
+              <a:spcAft>
+                <a:spcPts val="600"/>
+              </a:spcAft>
+              <a:defRPr sz="900" b="0" i="0">
+                <a:solidFill>
+                  <a:schemeClr val="tx1"/>
+                </a:solidFill>
+                <a:latin typeface="+mn-lt"/>
+              </a:defRPr>
+            </a:lvl1pPr>
+          </a:lstStyle>
+          <a:p>
+            <a:fld id="{AEC8D767-5246-2244-A4A3-B8AFB218393C}" type="slidenum">
+              <a:rPr lang="en-GB" smtClean="0"/>
+              <a:pPr/>
+              <a:t>‹#›</a:t>
+            </a:fld>
+            <a:endParaRPr lang="en-GB" dirty="0"/>
+          </a:p>
+        </p:txBody>
+      </p:sp>
+      <p:sp>
+        <p:nvSpPr>
+          <p:cNvPr id="7" name="Graphic 8">
+            <a:extLst>
+              <a:ext uri="{FF2B5EF4-FFF2-40B4-BE49-F238E27FC236}">
+                <a16:creationId xmlns:a16="http://schemas.microsoft.com/office/drawing/2014/main" id="{71D9F931-ED36-50EC-E2EC-55287206CF4F}"/>
+              </a:ext>
+            </a:extLst>
+          </p:cNvPr>
+          <p:cNvSpPr>
+            <a:spLocks noChangeAspect="1"/>
+          </p:cNvSpPr>
+          <p:nvPr userDrawn="1"/>
+        </p:nvSpPr>
+        <p:spPr>
+          <a:xfrm>
+            <a:off x="287338" y="6416675"/>
+            <a:ext cx="352800" cy="149403"/>
+          </a:xfrm>
+          <a:custGeom>
+            <a:avLst/>
+            <a:gdLst>
+              <a:gd name="connsiteX0" fmla="*/ 5699846 w 6586631"/>
+              <a:gd name="connsiteY0" fmla="*/ 2789294 h 2789293"/>
+              <a:gd name="connsiteX1" fmla="*/ 6586632 w 6586631"/>
+              <a:gd name="connsiteY1" fmla="*/ 1909153 h 2789293"/>
+              <a:gd name="connsiteX2" fmla="*/ 6586632 w 6586631"/>
+              <a:gd name="connsiteY2" fmla="*/ 60980 h 2789293"/>
+              <a:gd name="connsiteX3" fmla="*/ 6112656 w 6586631"/>
+              <a:gd name="connsiteY3" fmla="*/ 60980 h 2789293"/>
+              <a:gd name="connsiteX4" fmla="*/ 6112656 w 6586631"/>
+              <a:gd name="connsiteY4" fmla="*/ 2031114 h 2789293"/>
+              <a:gd name="connsiteX5" fmla="*/ 5699846 w 6586631"/>
+              <a:gd name="connsiteY5" fmla="*/ 2541669 h 2789293"/>
+              <a:gd name="connsiteX6" fmla="*/ 5287036 w 6586631"/>
+              <a:gd name="connsiteY6" fmla="*/ 1992847 h 2789293"/>
+              <a:gd name="connsiteX7" fmla="*/ 5287036 w 6586631"/>
+              <a:gd name="connsiteY7" fmla="*/ 1627212 h 2789293"/>
+              <a:gd name="connsiteX8" fmla="*/ 4813060 w 6586631"/>
+              <a:gd name="connsiteY8" fmla="*/ 1745222 h 2789293"/>
+              <a:gd name="connsiteX9" fmla="*/ 4813060 w 6586631"/>
+              <a:gd name="connsiteY9" fmla="*/ 1909153 h 2789293"/>
+              <a:gd name="connsiteX10" fmla="*/ 5699846 w 6586631"/>
+              <a:gd name="connsiteY10" fmla="*/ 2789294 h 2789293"/>
+              <a:gd name="connsiteX11" fmla="*/ 3177175 w 6586631"/>
+              <a:gd name="connsiteY11" fmla="*/ 2511056 h 2789293"/>
+              <a:gd name="connsiteX12" fmla="*/ 2584828 w 6586631"/>
+              <a:gd name="connsiteY12" fmla="*/ 1897549 h 2789293"/>
+              <a:gd name="connsiteX13" fmla="*/ 2817854 w 6586631"/>
+              <a:gd name="connsiteY13" fmla="*/ 1413657 h 2789293"/>
+              <a:gd name="connsiteX14" fmla="*/ 3681610 w 6586631"/>
+              <a:gd name="connsiteY14" fmla="*/ 2354778 h 2789293"/>
+              <a:gd name="connsiteX15" fmla="*/ 3177175 w 6586631"/>
+              <a:gd name="connsiteY15" fmla="*/ 2511056 h 2789293"/>
+              <a:gd name="connsiteX16" fmla="*/ 3639512 w 6586631"/>
+              <a:gd name="connsiteY16" fmla="*/ 1147022 h 2789293"/>
+              <a:gd name="connsiteX17" fmla="*/ 4140232 w 6586631"/>
+              <a:gd name="connsiteY17" fmla="*/ 1634865 h 2789293"/>
+              <a:gd name="connsiteX18" fmla="*/ 4017900 w 6586631"/>
+              <a:gd name="connsiteY18" fmla="*/ 2042717 h 2789293"/>
+              <a:gd name="connsiteX19" fmla="*/ 3268800 w 6586631"/>
+              <a:gd name="connsiteY19" fmla="*/ 1219359 h 2789293"/>
+              <a:gd name="connsiteX20" fmla="*/ 3639512 w 6586631"/>
+              <a:gd name="connsiteY20" fmla="*/ 1147022 h 2789293"/>
+              <a:gd name="connsiteX21" fmla="*/ 3177175 w 6586631"/>
+              <a:gd name="connsiteY21" fmla="*/ 201951 h 2789293"/>
+              <a:gd name="connsiteX22" fmla="*/ 3536495 w 6586631"/>
+              <a:gd name="connsiteY22" fmla="*/ 567833 h 2789293"/>
+              <a:gd name="connsiteX23" fmla="*/ 3165783 w 6586631"/>
+              <a:gd name="connsiteY23" fmla="*/ 1109002 h 2789293"/>
+              <a:gd name="connsiteX24" fmla="*/ 3001353 w 6586631"/>
+              <a:gd name="connsiteY24" fmla="*/ 926061 h 2789293"/>
+              <a:gd name="connsiteX25" fmla="*/ 2814140 w 6586631"/>
+              <a:gd name="connsiteY25" fmla="*/ 548823 h 2789293"/>
+              <a:gd name="connsiteX26" fmla="*/ 3177175 w 6586631"/>
+              <a:gd name="connsiteY26" fmla="*/ 201951 h 2789293"/>
+              <a:gd name="connsiteX27" fmla="*/ 4136518 w 6586631"/>
+              <a:gd name="connsiteY27" fmla="*/ 2172084 h 2789293"/>
+              <a:gd name="connsiteX28" fmla="*/ 4461417 w 6586631"/>
+              <a:gd name="connsiteY28" fmla="*/ 1428964 h 2789293"/>
+              <a:gd name="connsiteX29" fmla="*/ 3960696 w 6586631"/>
+              <a:gd name="connsiteY29" fmla="*/ 945071 h 2789293"/>
+              <a:gd name="connsiteX30" fmla="*/ 3502073 w 6586631"/>
+              <a:gd name="connsiteY30" fmla="*/ 1036418 h 2789293"/>
+              <a:gd name="connsiteX31" fmla="*/ 3494397 w 6586631"/>
+              <a:gd name="connsiteY31" fmla="*/ 1021112 h 2789293"/>
+              <a:gd name="connsiteX32" fmla="*/ 3907206 w 6586631"/>
+              <a:gd name="connsiteY32" fmla="*/ 518209 h 2789293"/>
+              <a:gd name="connsiteX33" fmla="*/ 3188566 w 6586631"/>
+              <a:gd name="connsiteY33" fmla="*/ 0 h 2789293"/>
+              <a:gd name="connsiteX34" fmla="*/ 2401082 w 6586631"/>
+              <a:gd name="connsiteY34" fmla="*/ 659180 h 2789293"/>
+              <a:gd name="connsiteX35" fmla="*/ 2706913 w 6586631"/>
+              <a:gd name="connsiteY35" fmla="*/ 1295646 h 2789293"/>
+              <a:gd name="connsiteX36" fmla="*/ 2710628 w 6586631"/>
+              <a:gd name="connsiteY36" fmla="*/ 1303300 h 2789293"/>
+              <a:gd name="connsiteX37" fmla="*/ 2164094 w 6586631"/>
+              <a:gd name="connsiteY37" fmla="*/ 2069134 h 2789293"/>
+              <a:gd name="connsiteX38" fmla="*/ 2932262 w 6586631"/>
+              <a:gd name="connsiteY38" fmla="*/ 2789294 h 2789293"/>
+              <a:gd name="connsiteX39" fmla="*/ 3796018 w 6586631"/>
+              <a:gd name="connsiteY39" fmla="*/ 2480689 h 2789293"/>
+              <a:gd name="connsiteX40" fmla="*/ 4025329 w 6586631"/>
+              <a:gd name="connsiteY40" fmla="*/ 2728314 h 2789293"/>
+              <a:gd name="connsiteX41" fmla="*/ 4625352 w 6586631"/>
+              <a:gd name="connsiteY41" fmla="*/ 2728314 h 2789293"/>
+              <a:gd name="connsiteX42" fmla="*/ 4625352 w 6586631"/>
+              <a:gd name="connsiteY42" fmla="*/ 2709303 h 2789293"/>
+              <a:gd name="connsiteX43" fmla="*/ 4136518 w 6586631"/>
+              <a:gd name="connsiteY43" fmla="*/ 2172084 h 2789293"/>
+              <a:gd name="connsiteX44" fmla="*/ 886786 w 6586631"/>
+              <a:gd name="connsiteY44" fmla="*/ 2789294 h 2789293"/>
+              <a:gd name="connsiteX45" fmla="*/ 1773572 w 6586631"/>
+              <a:gd name="connsiteY45" fmla="*/ 1909153 h 2789293"/>
+              <a:gd name="connsiteX46" fmla="*/ 1773572 w 6586631"/>
+              <a:gd name="connsiteY46" fmla="*/ 60980 h 2789293"/>
+              <a:gd name="connsiteX47" fmla="*/ 1299596 w 6586631"/>
+              <a:gd name="connsiteY47" fmla="*/ 60980 h 2789293"/>
+              <a:gd name="connsiteX48" fmla="*/ 1299596 w 6586631"/>
+              <a:gd name="connsiteY48" fmla="*/ 2031114 h 2789293"/>
+              <a:gd name="connsiteX49" fmla="*/ 886786 w 6586631"/>
+              <a:gd name="connsiteY49" fmla="*/ 2541669 h 2789293"/>
+              <a:gd name="connsiteX50" fmla="*/ 473976 w 6586631"/>
+              <a:gd name="connsiteY50" fmla="*/ 1992847 h 2789293"/>
+              <a:gd name="connsiteX51" fmla="*/ 473976 w 6586631"/>
+              <a:gd name="connsiteY51" fmla="*/ 1627212 h 2789293"/>
+              <a:gd name="connsiteX52" fmla="*/ 0 w 6586631"/>
+              <a:gd name="connsiteY52" fmla="*/ 1745222 h 2789293"/>
+              <a:gd name="connsiteX53" fmla="*/ 0 w 6586631"/>
+              <a:gd name="connsiteY53" fmla="*/ 1909153 h 2789293"/>
+              <a:gd name="connsiteX54" fmla="*/ 886786 w 6586631"/>
+              <a:gd name="connsiteY54" fmla="*/ 2789294 h 2789293"/>
+            </a:gdLst>
+            <a:ahLst/>
+            <a:cxnLst>
+              <a:cxn ang="0">
+                <a:pos x="connsiteX0" y="connsiteY0"/>
+              </a:cxn>
+              <a:cxn ang="0">
+                <a:pos x="connsiteX1" y="connsiteY1"/>
+              </a:cxn>
+              <a:cxn ang="0">
+                <a:pos x="connsiteX2" y="connsiteY2"/>
+              </a:cxn>
+              <a:cxn ang="0">
+                <a:pos x="connsiteX3" y="connsiteY3"/>
+              </a:cxn>
+              <a:cxn ang="0">
+                <a:pos x="connsiteX4" y="connsiteY4"/>
+              </a:cxn>
+              <a:cxn ang="0">
+                <a:pos x="connsiteX5" y="connsiteY5"/>
+              </a:cxn>
+              <a:cxn ang="0">
+                <a:pos x="connsiteX6" y="connsiteY6"/>
+              </a:cxn>
+              <a:cxn ang="0">
+                <a:pos x="connsiteX7" y="connsiteY7"/>
+              </a:cxn>
+              <a:cxn ang="0">
+                <a:pos x="connsiteX8" y="connsiteY8"/>
+              </a:cxn>
+              <a:cxn ang="0">
+                <a:pos x="connsiteX9" y="connsiteY9"/>
+              </a:cxn>
+              <a:cxn ang="0">
+                <a:pos x="connsiteX10" y="connsiteY10"/>
+              </a:cxn>
+              <a:cxn ang="0">
+                <a:pos x="connsiteX11" y="connsiteY11"/>
+              </a:cxn>
+              <a:cxn ang="0">
+                <a:pos x="connsiteX12" y="connsiteY12"/>
+              </a:cxn>
+              <a:cxn ang="0">
+                <a:pos x="connsiteX13" y="connsiteY13"/>
+              </a:cxn>
+              <a:cxn ang="0">
+                <a:pos x="connsiteX14" y="connsiteY14"/>
+              </a:cxn>
+              <a:cxn ang="0">
+                <a:pos x="connsiteX15" y="connsiteY15"/>
+              </a:cxn>
+              <a:cxn ang="0">
+                <a:pos x="connsiteX16" y="connsiteY16"/>
+              </a:cxn>
+              <a:cxn ang="0">
+                <a:pos x="connsiteX17" y="connsiteY17"/>
+              </a:cxn>
+              <a:cxn ang="0">
+                <a:pos x="connsiteX18" y="connsiteY18"/>
+              </a:cxn>
+              <a:cxn ang="0">
+                <a:pos x="connsiteX19" y="connsiteY19"/>
+              </a:cxn>
+              <a:cxn ang="0">
+                <a:pos x="connsiteX20" y="connsiteY20"/>
+              </a:cxn>
+              <a:cxn ang="0">
+                <a:pos x="connsiteX21" y="connsiteY21"/>
+              </a:cxn>
+              <a:cxn ang="0">
+                <a:pos x="connsiteX22" y="connsiteY22"/>
+              </a:cxn>
+              <a:cxn ang="0">
+                <a:pos x="connsiteX23" y="connsiteY23"/>
+              </a:cxn>
+              <a:cxn ang="0">
+                <a:pos x="connsiteX24" y="connsiteY24"/>
+              </a:cxn>
+              <a:cxn ang="0">
+                <a:pos x="connsiteX25" y="connsiteY25"/>
+              </a:cxn>
+              <a:cxn ang="0">
+                <a:pos x="connsiteX26" y="connsiteY26"/>
+              </a:cxn>
+              <a:cxn ang="0">
+                <a:pos x="connsiteX27" y="connsiteY27"/>
+              </a:cxn>
+              <a:cxn ang="0">
+                <a:pos x="connsiteX28" y="connsiteY28"/>
+              </a:cxn>
+              <a:cxn ang="0">
+                <a:pos x="connsiteX29" y="connsiteY29"/>
+              </a:cxn>
+              <a:cxn ang="0">
+                <a:pos x="connsiteX30" y="connsiteY30"/>
+              </a:cxn>
+              <a:cxn ang="0">
+                <a:pos x="connsiteX31" y="connsiteY31"/>
+              </a:cxn>
+              <a:cxn ang="0">
+                <a:pos x="connsiteX32" y="connsiteY32"/>
+              </a:cxn>
+              <a:cxn ang="0">
+                <a:pos x="connsiteX33" y="connsiteY33"/>
+              </a:cxn>
+              <a:cxn ang="0">
+                <a:pos x="connsiteX34" y="connsiteY34"/>
+              </a:cxn>
+              <a:cxn ang="0">
+                <a:pos x="connsiteX35" y="connsiteY35"/>
+              </a:cxn>
+              <a:cxn ang="0">
+                <a:pos x="connsiteX36" y="connsiteY36"/>
+              </a:cxn>
+              <a:cxn ang="0">
+                <a:pos x="connsiteX37" y="connsiteY37"/>
+              </a:cxn>
+              <a:cxn ang="0">
+                <a:pos x="connsiteX38" y="connsiteY38"/>
+              </a:cxn>
+              <a:cxn ang="0">
+                <a:pos x="connsiteX39" y="connsiteY39"/>
+              </a:cxn>
+              <a:cxn ang="0">
+                <a:pos x="connsiteX40" y="connsiteY40"/>
+              </a:cxn>
+              <a:cxn ang="0">
+                <a:pos x="connsiteX41" y="connsiteY41"/>
+              </a:cxn>
+              <a:cxn ang="0">
+                <a:pos x="connsiteX42" y="connsiteY42"/>
+              </a:cxn>
+              <a:cxn ang="0">
+                <a:pos x="connsiteX43" y="connsiteY43"/>
+              </a:cxn>
+              <a:cxn ang="0">
+                <a:pos x="connsiteX44" y="connsiteY44"/>
+              </a:cxn>
+              <a:cxn ang="0">
+                <a:pos x="connsiteX45" y="connsiteY45"/>
+              </a:cxn>
+              <a:cxn ang="0">
+                <a:pos x="connsiteX46" y="connsiteY46"/>
+              </a:cxn>
+              <a:cxn ang="0">
+                <a:pos x="connsiteX47" y="connsiteY47"/>
+              </a:cxn>
+              <a:cxn ang="0">
+                <a:pos x="connsiteX48" y="connsiteY48"/>
+              </a:cxn>
+              <a:cxn ang="0">
+                <a:pos x="connsiteX49" y="connsiteY49"/>
+              </a:cxn>
+              <a:cxn ang="0">
+                <a:pos x="connsiteX50" y="connsiteY50"/>
+              </a:cxn>
+              <a:cxn ang="0">
+                <a:pos x="connsiteX51" y="connsiteY51"/>
+              </a:cxn>
+              <a:cxn ang="0">
+                <a:pos x="connsiteX52" y="connsiteY52"/>
+              </a:cxn>
+              <a:cxn ang="0">
+                <a:pos x="connsiteX53" y="connsiteY53"/>
+              </a:cxn>
+              <a:cxn ang="0">
+                <a:pos x="connsiteX54" y="connsiteY54"/>
+              </a:cxn>
+            </a:cxnLst>
+            <a:rect l="l" t="t" r="r" b="b"/>
+            <a:pathLst>
+              <a:path w="6586631" h="2789293">
+                <a:moveTo>
+                  <a:pt x="5699846" y="2789294"/>
+                </a:moveTo>
+                <a:cubicBezTo>
+                  <a:pt x="6338253" y="2789294"/>
+                  <a:pt x="6586632" y="2408105"/>
+                  <a:pt x="6586632" y="1909153"/>
+                </a:cubicBezTo>
+                <a:lnTo>
+                  <a:pt x="6586632" y="60980"/>
+                </a:lnTo>
+                <a:lnTo>
+                  <a:pt x="6112656" y="60980"/>
+                </a:lnTo>
+                <a:lnTo>
+                  <a:pt x="6112656" y="2031114"/>
+                </a:lnTo>
+                <a:cubicBezTo>
+                  <a:pt x="6112656" y="2351075"/>
+                  <a:pt x="5990324" y="2541669"/>
+                  <a:pt x="5699846" y="2541669"/>
+                </a:cubicBezTo>
+                <a:cubicBezTo>
+                  <a:pt x="5413083" y="2541669"/>
+                  <a:pt x="5287036" y="2339718"/>
+                  <a:pt x="5287036" y="1992847"/>
+                </a:cubicBezTo>
+                <a:lnTo>
+                  <a:pt x="5287036" y="1627212"/>
+                </a:lnTo>
+                <a:lnTo>
+                  <a:pt x="4813060" y="1745222"/>
+                </a:lnTo>
+                <a:lnTo>
+                  <a:pt x="4813060" y="1909153"/>
+                </a:lnTo>
+                <a:cubicBezTo>
+                  <a:pt x="4813060" y="2408352"/>
+                  <a:pt x="5061440" y="2789294"/>
+                  <a:pt x="5699846" y="2789294"/>
+                </a:cubicBezTo>
+                <a:moveTo>
+                  <a:pt x="3177175" y="2511056"/>
+                </a:moveTo>
+                <a:cubicBezTo>
+                  <a:pt x="2810177" y="2511056"/>
+                  <a:pt x="2584828" y="2213808"/>
+                  <a:pt x="2584828" y="1897549"/>
+                </a:cubicBezTo>
+                <a:cubicBezTo>
+                  <a:pt x="2584828" y="1699302"/>
+                  <a:pt x="2672739" y="1516361"/>
+                  <a:pt x="2817854" y="1413657"/>
+                </a:cubicBezTo>
+                <a:lnTo>
+                  <a:pt x="3681610" y="2354778"/>
+                </a:lnTo>
+                <a:cubicBezTo>
+                  <a:pt x="3521141" y="2450075"/>
+                  <a:pt x="3341358" y="2511056"/>
+                  <a:pt x="3177175" y="2511056"/>
+                </a:cubicBezTo>
+                <a:moveTo>
+                  <a:pt x="3639512" y="1147022"/>
+                </a:moveTo>
+                <a:cubicBezTo>
+                  <a:pt x="3949057" y="1147022"/>
+                  <a:pt x="4140232" y="1326013"/>
+                  <a:pt x="4140232" y="1634865"/>
+                </a:cubicBezTo>
+                <a:cubicBezTo>
+                  <a:pt x="4140232" y="1772132"/>
+                  <a:pt x="4102096" y="1913103"/>
+                  <a:pt x="4017900" y="2042717"/>
+                </a:cubicBezTo>
+                <a:lnTo>
+                  <a:pt x="3268800" y="1219359"/>
+                </a:lnTo>
+                <a:cubicBezTo>
+                  <a:pt x="3402524" y="1166032"/>
+                  <a:pt x="3532533" y="1147022"/>
+                  <a:pt x="3639512" y="1147022"/>
+                </a:cubicBezTo>
+                <a:moveTo>
+                  <a:pt x="3177175" y="201951"/>
+                </a:moveTo>
+                <a:cubicBezTo>
+                  <a:pt x="3402771" y="201951"/>
+                  <a:pt x="3536495" y="331565"/>
+                  <a:pt x="3536495" y="567833"/>
+                </a:cubicBezTo>
+                <a:cubicBezTo>
+                  <a:pt x="3536495" y="785091"/>
+                  <a:pt x="3429516" y="990745"/>
+                  <a:pt x="3165783" y="1109002"/>
+                </a:cubicBezTo>
+                <a:lnTo>
+                  <a:pt x="3001353" y="926061"/>
+                </a:lnTo>
+                <a:cubicBezTo>
+                  <a:pt x="2855990" y="766081"/>
+                  <a:pt x="2814140" y="666833"/>
+                  <a:pt x="2814140" y="548823"/>
+                </a:cubicBezTo>
+                <a:cubicBezTo>
+                  <a:pt x="2813892" y="327615"/>
+                  <a:pt x="2955292" y="201951"/>
+                  <a:pt x="3177175" y="201951"/>
+                </a:cubicBezTo>
+                <a:moveTo>
+                  <a:pt x="4136518" y="2172084"/>
+                </a:moveTo>
+                <a:cubicBezTo>
+                  <a:pt x="4343047" y="1928163"/>
+                  <a:pt x="4461417" y="1661528"/>
+                  <a:pt x="4461417" y="1428964"/>
+                </a:cubicBezTo>
+                <a:cubicBezTo>
+                  <a:pt x="4461417" y="1139369"/>
+                  <a:pt x="4266527" y="945071"/>
+                  <a:pt x="3960696" y="945071"/>
+                </a:cubicBezTo>
+                <a:cubicBezTo>
+                  <a:pt x="3800228" y="945071"/>
+                  <a:pt x="3620443" y="990745"/>
+                  <a:pt x="3502073" y="1036418"/>
+                </a:cubicBezTo>
+                <a:lnTo>
+                  <a:pt x="3494397" y="1021112"/>
+                </a:lnTo>
+                <a:cubicBezTo>
+                  <a:pt x="3784874" y="864834"/>
+                  <a:pt x="3907206" y="720160"/>
+                  <a:pt x="3907206" y="518209"/>
+                </a:cubicBezTo>
+                <a:cubicBezTo>
+                  <a:pt x="3907206" y="228614"/>
+                  <a:pt x="3647188" y="0"/>
+                  <a:pt x="3188566" y="0"/>
+                </a:cubicBezTo>
+                <a:cubicBezTo>
+                  <a:pt x="2661100" y="0"/>
+                  <a:pt x="2401082" y="293545"/>
+                  <a:pt x="2401082" y="659180"/>
+                </a:cubicBezTo>
+                <a:cubicBezTo>
+                  <a:pt x="2401082" y="857428"/>
+                  <a:pt x="2485278" y="1055429"/>
+                  <a:pt x="2706913" y="1295646"/>
+                </a:cubicBezTo>
+                <a:lnTo>
+                  <a:pt x="2710628" y="1303300"/>
+                </a:lnTo>
+                <a:cubicBezTo>
+                  <a:pt x="2336201" y="1482291"/>
+                  <a:pt x="2164094" y="1771886"/>
+                  <a:pt x="2164094" y="2069134"/>
+                </a:cubicBezTo>
+                <a:cubicBezTo>
+                  <a:pt x="2164094" y="2461679"/>
+                  <a:pt x="2465963" y="2789294"/>
+                  <a:pt x="2932262" y="2789294"/>
+                </a:cubicBezTo>
+                <a:cubicBezTo>
+                  <a:pt x="3199710" y="2789294"/>
+                  <a:pt x="3513217" y="2678690"/>
+                  <a:pt x="3796018" y="2480689"/>
+                </a:cubicBezTo>
+                <a:lnTo>
+                  <a:pt x="4025329" y="2728314"/>
+                </a:lnTo>
+                <a:lnTo>
+                  <a:pt x="4625352" y="2728314"/>
+                </a:lnTo>
+                <a:lnTo>
+                  <a:pt x="4625352" y="2709303"/>
+                </a:lnTo>
+                <a:lnTo>
+                  <a:pt x="4136518" y="2172084"/>
+                </a:lnTo>
+                <a:close/>
+                <a:moveTo>
+                  <a:pt x="886786" y="2789294"/>
+                </a:moveTo>
+                <a:cubicBezTo>
+                  <a:pt x="1525192" y="2789294"/>
+                  <a:pt x="1773572" y="2408105"/>
+                  <a:pt x="1773572" y="1909153"/>
+                </a:cubicBezTo>
+                <a:lnTo>
+                  <a:pt x="1773572" y="60980"/>
+                </a:lnTo>
+                <a:lnTo>
+                  <a:pt x="1299596" y="60980"/>
+                </a:lnTo>
+                <a:lnTo>
+                  <a:pt x="1299596" y="2031114"/>
+                </a:lnTo>
+                <a:cubicBezTo>
+                  <a:pt x="1299596" y="2351075"/>
+                  <a:pt x="1177263" y="2541669"/>
+                  <a:pt x="886786" y="2541669"/>
+                </a:cubicBezTo>
+                <a:cubicBezTo>
+                  <a:pt x="600023" y="2541669"/>
+                  <a:pt x="473976" y="2339718"/>
+                  <a:pt x="473976" y="1992847"/>
+                </a:cubicBezTo>
+                <a:lnTo>
+                  <a:pt x="473976" y="1627212"/>
+                </a:lnTo>
+                <a:lnTo>
+                  <a:pt x="0" y="1745222"/>
+                </a:lnTo>
+                <a:lnTo>
+                  <a:pt x="0" y="1909153"/>
+                </a:lnTo>
+                <a:cubicBezTo>
+                  <a:pt x="0" y="2408352"/>
+                  <a:pt x="248379" y="2789294"/>
+                  <a:pt x="886786" y="2789294"/>
+                </a:cubicBezTo>
+              </a:path>
+            </a:pathLst>
+          </a:custGeom>
+          <a:solidFill>
+            <a:schemeClr val="accent1"/>
+          </a:solidFill>
+          <a:ln w="24751" cap="flat">
+            <a:noFill/>
+            <a:prstDash val="solid"/>
+            <a:miter/>
+          </a:ln>
+        </p:spPr>
+        <p:txBody>
+          <a:bodyPr rtlCol="0" anchor="ctr"/>
+          <a:lstStyle/>
+          <a:p>
+            <a:endParaRPr lang="en-GB"/>
+          </a:p>
+        </p:txBody>
+      </p:sp>
+      <p:sp>
+        <p:nvSpPr>
+          <p:cNvPr id="4" name="TextBox 3">
+            <a:extLst>
+              <a:ext uri="{FF2B5EF4-FFF2-40B4-BE49-F238E27FC236}">
+                <a16:creationId xmlns:a16="http://schemas.microsoft.com/office/drawing/2014/main" id="{CF5886F1-17DD-FBEB-EE71-541D30F4C7A0}"/>
+              </a:ext>
+            </a:extLst>
+          </p:cNvPr>
+          <p:cNvSpPr txBox="1"/>
+          <p:nvPr userDrawn="1"/>
+        </p:nvSpPr>
+        <p:spPr>
+          <a:xfrm>
+            <a:off x="8124825" y="6449779"/>
+            <a:ext cx="3260725" cy="153464"/>
+          </a:xfrm>
+          <a:prstGeom prst="rect">
+            <a:avLst/>
+          </a:prstGeom>
+          <a:noFill/>
+        </p:spPr>
+        <p:txBody>
+          <a:bodyPr wrap="square" lIns="0" tIns="0" rIns="0" bIns="0" rtlCol="0" anchor="b" anchorCtr="0">
+            <a:noAutofit/>
+          </a:bodyPr>
+          <a:lstStyle/>
+          <a:p>
+            <a:pPr algn="r"/>
+            <a:r>
+              <a:rPr lang="en-US" sz="1100" kern="1200" dirty="0">
+                <a:solidFill>
+                  <a:schemeClr val="accent1"/>
+                </a:solidFill>
+                <a:latin typeface="+mn-lt"/>
+                <a:ea typeface="+mn-ea"/>
+                <a:cs typeface="+mn-cs"/>
+              </a:rPr>
+              <a:t>Core program name</a:t>
+            </a:r>
+          </a:p>
+        </p:txBody>
+      </p:sp>
     </p:spTree>
+    <p:extLst>
+      <p:ext uri="{BB962C8B-B14F-4D97-AF65-F5344CB8AC3E}">
+        <p14:creationId xmlns:p14="http://schemas.microsoft.com/office/powerpoint/2010/main" val="3543768889"/>
+      </p:ext>
+    </p:extLst>
   </p:cSld>
   <p:clrMap bg1="lt1" tx1="dk1" bg2="lt2" tx2="dk2" accent1="accent1" accent2="accent2" accent3="accent3" accent4="accent4" accent5="accent5" accent6="accent6" hlink="hlink" folHlink="folHlink"/>
   <p:sldLayoutIdLst>
-    <p:sldLayoutId id="2147483649" r:id="rId1"/>
+    <p:sldLayoutId id="2147483680" r:id="rId1"/>
+    <p:sldLayoutId id="2147483685" r:id="rId2"/>
   </p:sldLayoutIdLst>
-  <p:hf sldNum="0" hdr="0" ftr="0" dt="0"/>
+  <p:hf hdr="0" ftr="0" dt="0"/>
   <p:txStyles>
     <p:titleStyle>
-      <a:lvl1pPr algn="ctr" defTabSz="914400" rtl="0" eaLnBrk="1" latinLnBrk="0" hangingPunct="1">
+      <a:lvl1pPr algn="l" defTabSz="914400" rtl="0" eaLnBrk="1" latinLnBrk="0" hangingPunct="1">
+        <a:lnSpc>
+          <a:spcPct val="85000"/>
+        </a:lnSpc>
         <a:spcBef>
-          <a:spcPct val="0"/>
+          <a:spcPts val="600"/>
         </a:spcBef>
+        <a:spcAft>
+          <a:spcPts val="600"/>
+        </a:spcAft>
         <a:buNone/>
-        <a:defRPr sz="4400" kern="1200">
+        <a:defRPr sz="3500" b="0" i="0" kern="1200" spc="0" baseline="0">
           <a:solidFill>
-            <a:schemeClr val="tx1"/>
+            <a:schemeClr val="accent1"/>
           </a:solidFill>
           <a:latin typeface="+mj-lt"/>
           <a:ea typeface="+mj-ea"/>
@@ -1608,13 +5603,20 @@
       </a:lvl1pPr>
     </p:titleStyle>
     <p:bodyStyle>
-      <a:lvl1pPr marL="342900" indent="-342900" algn="l" defTabSz="914400" rtl="0" eaLnBrk="1" latinLnBrk="0" hangingPunct="1">
+      <a:lvl1pPr marL="0" indent="0" algn="l" defTabSz="914400" rtl="0" eaLnBrk="1" latinLnBrk="0" hangingPunct="1">
+        <a:lnSpc>
+          <a:spcPct val="110000"/>
+        </a:lnSpc>
         <a:spcBef>
-          <a:spcPct val="20000"/>
+          <a:spcPts val="600"/>
         </a:spcBef>
-        <a:buFont typeface="Arial" pitchFamily="34" charset="0"/>
-        <a:buChar char="•"/>
-        <a:defRPr sz="3200" kern="1200">
+        <a:spcAft>
+          <a:spcPts val="600"/>
+        </a:spcAft>
+        <a:buFont typeface="Arial" panose="020B0604020202020204" pitchFamily="34" charset="0"/>
+        <a:buNone/>
+        <a:tabLst/>
+        <a:defRPr sz="1800" b="0" i="0" kern="1200">
           <a:solidFill>
             <a:schemeClr val="tx1"/>
           </a:solidFill>
@@ -1623,13 +5625,20 @@
           <a:cs typeface="+mn-cs"/>
         </a:defRPr>
       </a:lvl1pPr>
-      <a:lvl2pPr marL="742950" indent="-285750" algn="l" defTabSz="914400" rtl="0" eaLnBrk="1" latinLnBrk="0" hangingPunct="1">
+      <a:lvl2pPr marL="285750" indent="-285750" algn="l" defTabSz="914400" rtl="0" eaLnBrk="1" latinLnBrk="0" hangingPunct="1">
+        <a:lnSpc>
+          <a:spcPct val="110000"/>
+        </a:lnSpc>
         <a:spcBef>
-          <a:spcPct val="20000"/>
+          <a:spcPts val="0"/>
         </a:spcBef>
-        <a:buFont typeface="Arial" pitchFamily="34" charset="0"/>
-        <a:buChar char="–"/>
-        <a:defRPr sz="2800" kern="1200">
+        <a:spcAft>
+          <a:spcPts val="600"/>
+        </a:spcAft>
+        <a:buFont typeface="Arial" panose="020B0604020202020204" pitchFamily="34" charset="0"/>
+        <a:buChar char="•"/>
+        <a:tabLst/>
+        <a:defRPr sz="1800" b="0" i="0" kern="1200">
           <a:solidFill>
             <a:schemeClr val="tx1"/>
           </a:solidFill>
@@ -1638,13 +5647,20 @@
           <a:cs typeface="+mn-cs"/>
         </a:defRPr>
       </a:lvl2pPr>
-      <a:lvl3pPr marL="1143000" indent="-228600" algn="l" defTabSz="914400" rtl="0" eaLnBrk="1" latinLnBrk="0" hangingPunct="1">
+      <a:lvl3pPr marL="571500" indent="-285750" algn="l" defTabSz="914400" rtl="0" eaLnBrk="1" latinLnBrk="0" hangingPunct="1">
+        <a:lnSpc>
+          <a:spcPct val="110000"/>
+        </a:lnSpc>
         <a:spcBef>
-          <a:spcPct val="20000"/>
+          <a:spcPts val="0"/>
         </a:spcBef>
-        <a:buFont typeface="Arial" pitchFamily="34" charset="0"/>
+        <a:spcAft>
+          <a:spcPts val="600"/>
+        </a:spcAft>
+        <a:buFont typeface="Arial" panose="020B0604020202020204" pitchFamily="34" charset="0"/>
         <a:buChar char="•"/>
-        <a:defRPr sz="2400" kern="1200">
+        <a:tabLst/>
+        <a:defRPr sz="1600" b="0" i="0" kern="1200">
           <a:solidFill>
             <a:schemeClr val="tx1"/>
           </a:solidFill>
@@ -1653,13 +5669,20 @@
           <a:cs typeface="+mn-cs"/>
         </a:defRPr>
       </a:lvl3pPr>
-      <a:lvl4pPr marL="1600200" indent="-228600" algn="l" defTabSz="914400" rtl="0" eaLnBrk="1" latinLnBrk="0" hangingPunct="1">
+      <a:lvl4pPr marL="856800" indent="-285750" algn="l" defTabSz="914400" rtl="0" eaLnBrk="1" latinLnBrk="0" hangingPunct="1">
+        <a:lnSpc>
+          <a:spcPct val="110000"/>
+        </a:lnSpc>
         <a:spcBef>
-          <a:spcPct val="20000"/>
+          <a:spcPts val="0"/>
         </a:spcBef>
-        <a:buFont typeface="Arial" pitchFamily="34" charset="0"/>
-        <a:buChar char="–"/>
-        <a:defRPr sz="2000" kern="1200">
+        <a:spcAft>
+          <a:spcPts val="600"/>
+        </a:spcAft>
+        <a:buFont typeface="Arial" panose="020B0604020202020204" pitchFamily="34" charset="0"/>
+        <a:buChar char="•"/>
+        <a:tabLst/>
+        <a:defRPr sz="1600" b="0" i="0" kern="1200">
           <a:solidFill>
             <a:schemeClr val="tx1"/>
           </a:solidFill>
@@ -1668,13 +5691,20 @@
           <a:cs typeface="+mn-cs"/>
         </a:defRPr>
       </a:lvl4pPr>
-      <a:lvl5pPr marL="2057400" indent="-228600" algn="l" defTabSz="914400" rtl="0" eaLnBrk="1" latinLnBrk="0" hangingPunct="1">
+      <a:lvl5pPr marL="0" indent="0" algn="l" defTabSz="914400" rtl="0" eaLnBrk="1" latinLnBrk="0" hangingPunct="1">
+        <a:lnSpc>
+          <a:spcPct val="110000"/>
+        </a:lnSpc>
         <a:spcBef>
-          <a:spcPct val="20000"/>
+          <a:spcPts val="600"/>
         </a:spcBef>
-        <a:buFont typeface="Arial" pitchFamily="34" charset="0"/>
-        <a:buChar char="»"/>
-        <a:defRPr sz="2000" kern="1200">
+        <a:spcAft>
+          <a:spcPts val="600"/>
+        </a:spcAft>
+        <a:buFont typeface="Arial" panose="020B0604020202020204" pitchFamily="34" charset="0"/>
+        <a:buNone/>
+        <a:tabLst/>
+        <a:defRPr sz="800" b="0" i="0" kern="1200">
           <a:solidFill>
             <a:schemeClr val="tx1"/>
           </a:solidFill>
@@ -1683,13 +5713,19 @@
           <a:cs typeface="+mn-cs"/>
         </a:defRPr>
       </a:lvl5pPr>
-      <a:lvl6pPr marL="2514600" indent="-228600" algn="l" defTabSz="914400" rtl="0" eaLnBrk="1" latinLnBrk="0" hangingPunct="1">
+      <a:lvl6pPr marL="0" indent="0" algn="l" defTabSz="914400" rtl="0" eaLnBrk="1" latinLnBrk="0" hangingPunct="1">
+        <a:lnSpc>
+          <a:spcPct val="90000"/>
+        </a:lnSpc>
         <a:spcBef>
-          <a:spcPct val="20000"/>
+          <a:spcPts val="600"/>
         </a:spcBef>
-        <a:buFont typeface="Arial" pitchFamily="34" charset="0"/>
-        <a:buChar char="•"/>
-        <a:defRPr sz="2000" kern="1200">
+        <a:spcAft>
+          <a:spcPts val="600"/>
+        </a:spcAft>
+        <a:buFont typeface="Arial" panose="020B0604020202020204" pitchFamily="34" charset="0"/>
+        <a:buNone/>
+        <a:defRPr lang="en-GB" sz="1800" b="0" i="0" kern="1200" dirty="0" smtClean="0">
           <a:solidFill>
             <a:schemeClr val="tx1"/>
           </a:solidFill>
@@ -1698,13 +5734,19 @@
           <a:cs typeface="+mn-cs"/>
         </a:defRPr>
       </a:lvl6pPr>
-      <a:lvl7pPr marL="2971800" indent="-228600" algn="l" defTabSz="914400" rtl="0" eaLnBrk="1" latinLnBrk="0" hangingPunct="1">
+      <a:lvl7pPr marL="0" indent="0" algn="l" defTabSz="914400" rtl="0" eaLnBrk="1" latinLnBrk="0" hangingPunct="1">
+        <a:lnSpc>
+          <a:spcPct val="90000"/>
+        </a:lnSpc>
         <a:spcBef>
-          <a:spcPct val="20000"/>
+          <a:spcPts val="600"/>
         </a:spcBef>
-        <a:buFont typeface="Arial" pitchFamily="34" charset="0"/>
-        <a:buChar char="•"/>
-        <a:defRPr sz="2000" kern="1200">
+        <a:spcAft>
+          <a:spcPts val="600"/>
+        </a:spcAft>
+        <a:buFont typeface="Arial" panose="020B0604020202020204" pitchFamily="34" charset="0"/>
+        <a:buNone/>
+        <a:defRPr lang="en-GB" sz="1800" b="0" i="0" kern="1200" dirty="0" smtClean="0">
           <a:solidFill>
             <a:schemeClr val="tx1"/>
           </a:solidFill>
@@ -1713,13 +5755,19 @@
           <a:cs typeface="+mn-cs"/>
         </a:defRPr>
       </a:lvl7pPr>
-      <a:lvl8pPr marL="3429000" indent="-228600" algn="l" defTabSz="914400" rtl="0" eaLnBrk="1" latinLnBrk="0" hangingPunct="1">
+      <a:lvl8pPr marL="0" indent="0" algn="l" defTabSz="914400" rtl="0" eaLnBrk="1" latinLnBrk="0" hangingPunct="1">
+        <a:lnSpc>
+          <a:spcPct val="90000"/>
+        </a:lnSpc>
         <a:spcBef>
-          <a:spcPct val="20000"/>
+          <a:spcPts val="600"/>
         </a:spcBef>
-        <a:buFont typeface="Arial" pitchFamily="34" charset="0"/>
-        <a:buChar char="•"/>
-        <a:defRPr sz="2000" kern="1200">
+        <a:spcAft>
+          <a:spcPts val="600"/>
+        </a:spcAft>
+        <a:buFont typeface="Arial" panose="020B0604020202020204" pitchFamily="34" charset="0"/>
+        <a:buNone/>
+        <a:defRPr lang="en-GB" sz="1800" b="0" i="0" kern="1200" dirty="0">
           <a:solidFill>
             <a:schemeClr val="tx1"/>
           </a:solidFill>
@@ -1728,13 +5776,19 @@
           <a:cs typeface="+mn-cs"/>
         </a:defRPr>
       </a:lvl8pPr>
-      <a:lvl9pPr marL="3886200" indent="-228600" algn="l" defTabSz="914400" rtl="0" eaLnBrk="1" latinLnBrk="0" hangingPunct="1">
+      <a:lvl9pPr marL="0" indent="0" algn="l" defTabSz="914400" rtl="0" eaLnBrk="1" latinLnBrk="0" hangingPunct="1">
+        <a:lnSpc>
+          <a:spcPct val="90000"/>
+        </a:lnSpc>
         <a:spcBef>
-          <a:spcPct val="20000"/>
+          <a:spcPts val="600"/>
         </a:spcBef>
-        <a:buFont typeface="Arial" pitchFamily="34" charset="0"/>
-        <a:buChar char="•"/>
-        <a:defRPr sz="2000" kern="1200">
+        <a:spcAft>
+          <a:spcPts val="600"/>
+        </a:spcAft>
+        <a:buFont typeface="Arial" panose="020B0604020202020204" pitchFamily="34" charset="0"/>
+        <a:buNone/>
+        <a:defRPr sz="1800" b="0" i="0" kern="1200">
           <a:solidFill>
             <a:schemeClr val="tx1"/>
           </a:solidFill>
@@ -1845,15 +5899,7 @@
 
 <file path=ppt/slides/slide1.xml><?xml version="1.0" encoding="utf-8"?>
 <p:sld xmlns:a="http://schemas.openxmlformats.org/drawingml/2006/main" xmlns:r="http://schemas.openxmlformats.org/officeDocument/2006/relationships" xmlns:p="http://schemas.openxmlformats.org/presentationml/2006/main">
-  <p:cSld name="Slide 1">
-    <p:bg>
-      <p:bgPr>
-        <a:solidFill>
-          <a:srgbClr val="EB1700"/>
-        </a:solidFill>
-        <a:effectLst/>
-      </p:bgPr>
-    </p:bg>
+  <p:cSld>
     <p:spTree>
       <p:nvGrpSpPr>
         <p:cNvPr id="1" name=""/>
@@ -1876,8 +5922,8 @@
         </p:nvSpPr>
         <p:spPr>
           <a:xfrm>
-            <a:off x="0" y="2011680"/>
-            <a:ext cx="9144000" cy="3131820"/>
+            <a:off x="0" y="2682240"/>
+            <a:ext cx="12192000" cy="4175760"/>
           </a:xfrm>
           <a:prstGeom prst="rect">
             <a:avLst/>
@@ -1903,8 +5949,8 @@
         </p:nvSpPr>
         <p:spPr>
           <a:xfrm>
-            <a:off x="731520" y="457200"/>
-            <a:ext cx="7315200" cy="365760"/>
+            <a:off x="975360" y="609600"/>
+            <a:ext cx="9753600" cy="487680"/>
           </a:xfrm>
           <a:prstGeom prst="rect">
             <a:avLst/>
@@ -1942,8 +5988,8 @@
         </p:nvSpPr>
         <p:spPr>
           <a:xfrm>
-            <a:off x="731520" y="868680"/>
-            <a:ext cx="7315200" cy="320040"/>
+            <a:off x="975360" y="1158240"/>
+            <a:ext cx="9753600" cy="426720"/>
           </a:xfrm>
           <a:prstGeom prst="rect">
             <a:avLst/>
@@ -1981,8 +6027,8 @@
         </p:nvSpPr>
         <p:spPr>
           <a:xfrm>
-            <a:off x="731520" y="2240280"/>
-            <a:ext cx="7680960" cy="1463040"/>
+            <a:off x="975360" y="2987040"/>
+            <a:ext cx="10241280" cy="1950720"/>
           </a:xfrm>
           <a:prstGeom prst="rect">
             <a:avLst/>
@@ -2063,8 +6109,8 @@
         </p:nvSpPr>
         <p:spPr>
           <a:xfrm>
-            <a:off x="731520" y="3794760"/>
-            <a:ext cx="7315200" cy="320040"/>
+            <a:off x="975360" y="5059680"/>
+            <a:ext cx="9753600" cy="426720"/>
           </a:xfrm>
           <a:prstGeom prst="rect">
             <a:avLst/>
@@ -2102,8 +6148,8 @@
         </p:nvSpPr>
         <p:spPr>
           <a:xfrm>
-            <a:off x="731520" y="4297680"/>
-            <a:ext cx="3657600" cy="320040"/>
+            <a:off x="975360" y="5730240"/>
+            <a:ext cx="4876800" cy="426720"/>
           </a:xfrm>
           <a:prstGeom prst="rect">
             <a:avLst/>
@@ -2141,8 +6187,8 @@
         </p:nvSpPr>
         <p:spPr>
           <a:xfrm>
-            <a:off x="731520" y="4617720"/>
-            <a:ext cx="3657600" cy="274320"/>
+            <a:off x="975360" y="6156960"/>
+            <a:ext cx="4876800" cy="365760"/>
           </a:xfrm>
           <a:prstGeom prst="rect">
             <a:avLst/>
@@ -2182,15 +6228,7 @@
 
 <file path=ppt/slides/slide2.xml><?xml version="1.0" encoding="utf-8"?>
 <p:sld xmlns:a="http://schemas.openxmlformats.org/drawingml/2006/main" xmlns:r="http://schemas.openxmlformats.org/officeDocument/2006/relationships" xmlns:p="http://schemas.openxmlformats.org/presentationml/2006/main">
-  <p:cSld name="Slide 2">
-    <p:bg>
-      <p:bgPr>
-        <a:solidFill>
-          <a:srgbClr val="FFFFFF"/>
-        </a:solidFill>
-        <a:effectLst/>
-      </p:bgPr>
-    </p:bg>
+  <p:cSld>
     <p:spTree>
       <p:nvGrpSpPr>
         <p:cNvPr id="1" name=""/>
@@ -2214,7 +6252,7 @@
         <p:spPr>
           <a:xfrm>
             <a:off x="0" y="0"/>
-            <a:ext cx="9144000" cy="36576"/>
+            <a:ext cx="12192000" cy="48768"/>
           </a:xfrm>
           <a:prstGeom prst="rect">
             <a:avLst/>
@@ -2240,8 +6278,8 @@
         </p:nvSpPr>
         <p:spPr>
           <a:xfrm>
-            <a:off x="548640" y="137160"/>
-            <a:ext cx="8229600" cy="274320"/>
+            <a:off x="731520" y="182880"/>
+            <a:ext cx="10972800" cy="365760"/>
           </a:xfrm>
           <a:prstGeom prst="rect">
             <a:avLst/>
@@ -2279,8 +6317,8 @@
         </p:nvSpPr>
         <p:spPr>
           <a:xfrm>
-            <a:off x="548640" y="411480"/>
-            <a:ext cx="8046720" cy="457200"/>
+            <a:off x="731520" y="548640"/>
+            <a:ext cx="10728960" cy="609600"/>
           </a:xfrm>
           <a:prstGeom prst="rect">
             <a:avLst/>
@@ -2329,8 +6367,8 @@
         </p:nvSpPr>
         <p:spPr>
           <a:xfrm>
-            <a:off x="548640" y="1051560"/>
-            <a:ext cx="2377440" cy="320040"/>
+            <a:off x="731520" y="1402080"/>
+            <a:ext cx="3169920" cy="426720"/>
           </a:xfrm>
           <a:prstGeom prst="rect">
             <a:avLst/>
@@ -2368,8 +6406,8 @@
         </p:nvSpPr>
         <p:spPr>
           <a:xfrm>
-            <a:off x="548640" y="1417320"/>
-            <a:ext cx="2377440" cy="1188720"/>
+            <a:off x="731520" y="1889760"/>
+            <a:ext cx="3169920" cy="1584960"/>
           </a:xfrm>
           <a:prstGeom prst="rect">
             <a:avLst/>
@@ -2453,8 +6491,8 @@
         </p:nvSpPr>
         <p:spPr>
           <a:xfrm>
-            <a:off x="3291840" y="1051560"/>
-            <a:ext cx="2377440" cy="320040"/>
+            <a:off x="4389120" y="1402080"/>
+            <a:ext cx="3169920" cy="426720"/>
           </a:xfrm>
           <a:prstGeom prst="rect">
             <a:avLst/>
@@ -2492,8 +6530,8 @@
         </p:nvSpPr>
         <p:spPr>
           <a:xfrm>
-            <a:off x="3291840" y="1417320"/>
-            <a:ext cx="2377440" cy="1188720"/>
+            <a:off x="4389120" y="1889760"/>
+            <a:ext cx="3169920" cy="1584960"/>
           </a:xfrm>
           <a:prstGeom prst="rect">
             <a:avLst/>
@@ -2577,8 +6615,8 @@
         </p:nvSpPr>
         <p:spPr>
           <a:xfrm>
-            <a:off x="6035040" y="1051560"/>
-            <a:ext cx="2377440" cy="320040"/>
+            <a:off x="8046720" y="1402080"/>
+            <a:ext cx="3169920" cy="426720"/>
           </a:xfrm>
           <a:prstGeom prst="rect">
             <a:avLst/>
@@ -2616,8 +6654,8 @@
         </p:nvSpPr>
         <p:spPr>
           <a:xfrm>
-            <a:off x="6035040" y="1417320"/>
-            <a:ext cx="2377440" cy="1188720"/>
+            <a:off x="8046720" y="1889760"/>
+            <a:ext cx="3169920" cy="1584960"/>
           </a:xfrm>
           <a:prstGeom prst="rect">
             <a:avLst/>
@@ -2701,8 +6739,8 @@
         </p:nvSpPr>
         <p:spPr>
           <a:xfrm>
-            <a:off x="548640" y="2697480"/>
-            <a:ext cx="8046720" cy="18288"/>
+            <a:off x="731520" y="3596640"/>
+            <a:ext cx="10728960" cy="24384"/>
           </a:xfrm>
           <a:prstGeom prst="rect">
             <a:avLst/>
@@ -2728,8 +6766,8 @@
         </p:nvSpPr>
         <p:spPr>
           <a:xfrm>
-            <a:off x="548640" y="2880360"/>
-            <a:ext cx="2377440" cy="274320"/>
+            <a:off x="731520" y="3840480"/>
+            <a:ext cx="3169920" cy="365760"/>
           </a:xfrm>
           <a:prstGeom prst="rect">
             <a:avLst/>
@@ -2767,8 +6805,8 @@
         </p:nvSpPr>
         <p:spPr>
           <a:xfrm>
-            <a:off x="548640" y="3154680"/>
-            <a:ext cx="2377440" cy="228600"/>
+            <a:off x="731520" y="4206240"/>
+            <a:ext cx="3169920" cy="304800"/>
           </a:xfrm>
           <a:prstGeom prst="rect">
             <a:avLst/>
@@ -2806,8 +6844,8 @@
         </p:nvSpPr>
         <p:spPr>
           <a:xfrm>
-            <a:off x="548640" y="3429000"/>
-            <a:ext cx="2377440" cy="1005840"/>
+            <a:off x="731520" y="4572000"/>
+            <a:ext cx="3169920" cy="1341120"/>
           </a:xfrm>
           <a:prstGeom prst="rect">
             <a:avLst/>
@@ -2845,8 +6883,8 @@
         </p:nvSpPr>
         <p:spPr>
           <a:xfrm>
-            <a:off x="3291840" y="2880360"/>
-            <a:ext cx="2377440" cy="274320"/>
+            <a:off x="4389120" y="3840480"/>
+            <a:ext cx="3169920" cy="365760"/>
           </a:xfrm>
           <a:prstGeom prst="rect">
             <a:avLst/>
@@ -2884,8 +6922,8 @@
         </p:nvSpPr>
         <p:spPr>
           <a:xfrm>
-            <a:off x="3291840" y="3154680"/>
-            <a:ext cx="2377440" cy="228600"/>
+            <a:off x="4389120" y="4206240"/>
+            <a:ext cx="3169920" cy="304800"/>
           </a:xfrm>
           <a:prstGeom prst="rect">
             <a:avLst/>
@@ -2923,8 +6961,8 @@
         </p:nvSpPr>
         <p:spPr>
           <a:xfrm>
-            <a:off x="3291840" y="3429000"/>
-            <a:ext cx="2377440" cy="1005840"/>
+            <a:off x="4389120" y="4572000"/>
+            <a:ext cx="3169920" cy="1341120"/>
           </a:xfrm>
           <a:prstGeom prst="rect">
             <a:avLst/>
@@ -2962,8 +7000,8 @@
         </p:nvSpPr>
         <p:spPr>
           <a:xfrm>
-            <a:off x="6035040" y="2880360"/>
-            <a:ext cx="2377440" cy="274320"/>
+            <a:off x="8046720" y="3840480"/>
+            <a:ext cx="3169920" cy="365760"/>
           </a:xfrm>
           <a:prstGeom prst="rect">
             <a:avLst/>
@@ -3001,8 +7039,8 @@
         </p:nvSpPr>
         <p:spPr>
           <a:xfrm>
-            <a:off x="6035040" y="3154680"/>
-            <a:ext cx="2377440" cy="228600"/>
+            <a:off x="8046720" y="4206240"/>
+            <a:ext cx="3169920" cy="304800"/>
           </a:xfrm>
           <a:prstGeom prst="rect">
             <a:avLst/>
@@ -3040,8 +7078,8 @@
         </p:nvSpPr>
         <p:spPr>
           <a:xfrm>
-            <a:off x="6035040" y="3429000"/>
-            <a:ext cx="2377440" cy="1005840"/>
+            <a:off x="8046720" y="4572000"/>
+            <a:ext cx="3169920" cy="1341120"/>
           </a:xfrm>
           <a:prstGeom prst="rect">
             <a:avLst/>
@@ -3079,8 +7117,8 @@
         </p:nvSpPr>
         <p:spPr>
           <a:xfrm>
-            <a:off x="548640" y="4617720"/>
-            <a:ext cx="8046720" cy="320040"/>
+            <a:off x="731520" y="6156960"/>
+            <a:ext cx="10728960" cy="426720"/>
           </a:xfrm>
           <a:prstGeom prst="rect">
             <a:avLst/>
@@ -3131,15 +7169,7 @@
 
 <file path=ppt/slides/slide3.xml><?xml version="1.0" encoding="utf-8"?>
 <p:sld xmlns:a="http://schemas.openxmlformats.org/drawingml/2006/main" xmlns:r="http://schemas.openxmlformats.org/officeDocument/2006/relationships" xmlns:p="http://schemas.openxmlformats.org/presentationml/2006/main">
-  <p:cSld name="Slide 3">
-    <p:bg>
-      <p:bgPr>
-        <a:solidFill>
-          <a:srgbClr val="FFFFFF"/>
-        </a:solidFill>
-        <a:effectLst/>
-      </p:bgPr>
-    </p:bg>
+  <p:cSld>
     <p:spTree>
       <p:nvGrpSpPr>
         <p:cNvPr id="1" name=""/>
@@ -3163,7 +7193,7 @@
         <p:spPr>
           <a:xfrm>
             <a:off x="0" y="0"/>
-            <a:ext cx="9144000" cy="36576"/>
+            <a:ext cx="12192000" cy="48768"/>
           </a:xfrm>
           <a:prstGeom prst="rect">
             <a:avLst/>
@@ -3189,8 +7219,8 @@
         </p:nvSpPr>
         <p:spPr>
           <a:xfrm>
-            <a:off x="548640" y="137160"/>
-            <a:ext cx="8229600" cy="274320"/>
+            <a:off x="731520" y="182880"/>
+            <a:ext cx="10972800" cy="365760"/>
           </a:xfrm>
           <a:prstGeom prst="rect">
             <a:avLst/>
@@ -3228,8 +7258,8 @@
         </p:nvSpPr>
         <p:spPr>
           <a:xfrm>
-            <a:off x="548640" y="411480"/>
-            <a:ext cx="8046720" cy="457200"/>
+            <a:off x="731520" y="548640"/>
+            <a:ext cx="10728960" cy="609600"/>
           </a:xfrm>
           <a:prstGeom prst="rect">
             <a:avLst/>
@@ -3278,8 +7308,8 @@
         </p:nvSpPr>
         <p:spPr>
           <a:xfrm>
-            <a:off x="548640" y="1051560"/>
-            <a:ext cx="1828800" cy="502920"/>
+            <a:off x="731520" y="1402080"/>
+            <a:ext cx="2438400" cy="670560"/>
           </a:xfrm>
           <a:prstGeom prst="rect">
             <a:avLst/>
@@ -3317,8 +7347,8 @@
         </p:nvSpPr>
         <p:spPr>
           <a:xfrm>
-            <a:off x="548640" y="1554480"/>
-            <a:ext cx="1828800" cy="201168"/>
+            <a:off x="731520" y="2072640"/>
+            <a:ext cx="2438400" cy="268224"/>
           </a:xfrm>
           <a:prstGeom prst="rect">
             <a:avLst/>
@@ -3356,8 +7386,8 @@
         </p:nvSpPr>
         <p:spPr>
           <a:xfrm>
-            <a:off x="548640" y="1755648"/>
-            <a:ext cx="1828800" cy="201168"/>
+            <a:off x="731520" y="2340864"/>
+            <a:ext cx="2438400" cy="268224"/>
           </a:xfrm>
           <a:prstGeom prst="rect">
             <a:avLst/>
@@ -3395,8 +7425,8 @@
         </p:nvSpPr>
         <p:spPr>
           <a:xfrm>
-            <a:off x="2624328" y="1051560"/>
-            <a:ext cx="1828800" cy="502920"/>
+            <a:off x="3499104" y="1402080"/>
+            <a:ext cx="2438400" cy="670560"/>
           </a:xfrm>
           <a:prstGeom prst="rect">
             <a:avLst/>
@@ -3434,8 +7464,8 @@
         </p:nvSpPr>
         <p:spPr>
           <a:xfrm>
-            <a:off x="2624328" y="1554480"/>
-            <a:ext cx="1828800" cy="201168"/>
+            <a:off x="3499104" y="2072640"/>
+            <a:ext cx="2438400" cy="268224"/>
           </a:xfrm>
           <a:prstGeom prst="rect">
             <a:avLst/>
@@ -3473,8 +7503,8 @@
         </p:nvSpPr>
         <p:spPr>
           <a:xfrm>
-            <a:off x="2624328" y="1755648"/>
-            <a:ext cx="1828800" cy="201168"/>
+            <a:off x="3499104" y="2340864"/>
+            <a:ext cx="2438400" cy="268224"/>
           </a:xfrm>
           <a:prstGeom prst="rect">
             <a:avLst/>
@@ -3512,8 +7542,8 @@
         </p:nvSpPr>
         <p:spPr>
           <a:xfrm>
-            <a:off x="4700016" y="1051560"/>
-            <a:ext cx="1828800" cy="502920"/>
+            <a:off x="6266688" y="1402080"/>
+            <a:ext cx="2438400" cy="670560"/>
           </a:xfrm>
           <a:prstGeom prst="rect">
             <a:avLst/>
@@ -3551,8 +7581,8 @@
         </p:nvSpPr>
         <p:spPr>
           <a:xfrm>
-            <a:off x="4700016" y="1554480"/>
-            <a:ext cx="1828800" cy="201168"/>
+            <a:off x="6266688" y="2072640"/>
+            <a:ext cx="2438400" cy="268224"/>
           </a:xfrm>
           <a:prstGeom prst="rect">
             <a:avLst/>
@@ -3590,8 +7620,8 @@
         </p:nvSpPr>
         <p:spPr>
           <a:xfrm>
-            <a:off x="4700016" y="1755648"/>
-            <a:ext cx="1828800" cy="201168"/>
+            <a:off x="6266688" y="2340864"/>
+            <a:ext cx="2438400" cy="268224"/>
           </a:xfrm>
           <a:prstGeom prst="rect">
             <a:avLst/>
@@ -3629,8 +7659,8 @@
         </p:nvSpPr>
         <p:spPr>
           <a:xfrm>
-            <a:off x="6775704" y="1051560"/>
-            <a:ext cx="1828800" cy="502920"/>
+            <a:off x="9034272" y="1402080"/>
+            <a:ext cx="2438400" cy="670560"/>
           </a:xfrm>
           <a:prstGeom prst="rect">
             <a:avLst/>
@@ -3668,8 +7698,8 @@
         </p:nvSpPr>
         <p:spPr>
           <a:xfrm>
-            <a:off x="6775704" y="1554480"/>
-            <a:ext cx="1828800" cy="201168"/>
+            <a:off x="9034272" y="2072640"/>
+            <a:ext cx="2438400" cy="268224"/>
           </a:xfrm>
           <a:prstGeom prst="rect">
             <a:avLst/>
@@ -3707,8 +7737,8 @@
         </p:nvSpPr>
         <p:spPr>
           <a:xfrm>
-            <a:off x="6775704" y="1755648"/>
-            <a:ext cx="1828800" cy="201168"/>
+            <a:off x="9034272" y="2340864"/>
+            <a:ext cx="2438400" cy="268224"/>
           </a:xfrm>
           <a:prstGeom prst="rect">
             <a:avLst/>
@@ -3746,8 +7776,8 @@
         </p:nvSpPr>
         <p:spPr>
           <a:xfrm>
-            <a:off x="548640" y="2148840"/>
-            <a:ext cx="3657600" cy="274320"/>
+            <a:off x="731520" y="2865120"/>
+            <a:ext cx="4876800" cy="365760"/>
           </a:xfrm>
           <a:prstGeom prst="rect">
             <a:avLst/>
@@ -3785,8 +7815,8 @@
         </p:nvSpPr>
         <p:spPr>
           <a:xfrm>
-            <a:off x="4937760" y="2148840"/>
-            <a:ext cx="3657600" cy="274320"/>
+            <a:off x="6583680" y="2865120"/>
+            <a:ext cx="4876800" cy="365760"/>
           </a:xfrm>
           <a:prstGeom prst="rect">
             <a:avLst/>
@@ -3820,11 +7850,17 @@
         <p:nvGraphicFramePr>
           <p:cNvPr id="19" name="Chart 0"/>
           <p:cNvGraphicFramePr/>
-          <p:nvPr/>
+          <p:nvPr>
+            <p:extLst>
+              <p:ext uri="{D42A27DB-BD31-4B8C-83A1-F6EECF244321}">
+                <p14:modId xmlns:p14="http://schemas.microsoft.com/office/powerpoint/2010/main" val="2806992606"/>
+              </p:ext>
+            </p:extLst>
+          </p:nvPr>
         </p:nvGraphicFramePr>
         <p:xfrm>
-          <a:off x="548640" y="2468880"/>
-          <a:ext cx="3657600" cy="2377440"/>
+          <a:off x="731520" y="3291840"/>
+          <a:ext cx="4876800" cy="3169920"/>
         </p:xfrm>
         <a:graphic>
           <a:graphicData uri="http://schemas.openxmlformats.org/drawingml/2006/chart">
@@ -3836,11 +7872,17 @@
         <p:nvGraphicFramePr>
           <p:cNvPr id="20" name="Chart 1"/>
           <p:cNvGraphicFramePr/>
-          <p:nvPr/>
+          <p:nvPr>
+            <p:extLst>
+              <p:ext uri="{D42A27DB-BD31-4B8C-83A1-F6EECF244321}">
+                <p14:modId xmlns:p14="http://schemas.microsoft.com/office/powerpoint/2010/main" val="2704987452"/>
+              </p:ext>
+            </p:extLst>
+          </p:nvPr>
         </p:nvGraphicFramePr>
         <p:xfrm>
-          <a:off x="4937760" y="2468880"/>
-          <a:ext cx="3657600" cy="2377440"/>
+          <a:off x="6583680" y="3291840"/>
+          <a:ext cx="4876800" cy="3169920"/>
         </p:xfrm>
         <a:graphic>
           <a:graphicData uri="http://schemas.openxmlformats.org/drawingml/2006/chart">
@@ -3858,15 +7900,7 @@
 
 <file path=ppt/slides/slide4.xml><?xml version="1.0" encoding="utf-8"?>
 <p:sld xmlns:a="http://schemas.openxmlformats.org/drawingml/2006/main" xmlns:r="http://schemas.openxmlformats.org/officeDocument/2006/relationships" xmlns:p="http://schemas.openxmlformats.org/presentationml/2006/main">
-  <p:cSld name="Slide 4">
-    <p:bg>
-      <p:bgPr>
-        <a:solidFill>
-          <a:srgbClr val="FFFFFF"/>
-        </a:solidFill>
-        <a:effectLst/>
-      </p:bgPr>
-    </p:bg>
+  <p:cSld>
     <p:spTree>
       <p:nvGrpSpPr>
         <p:cNvPr id="1" name=""/>
@@ -3890,7 +7924,7 @@
         <p:spPr>
           <a:xfrm>
             <a:off x="0" y="0"/>
-            <a:ext cx="9144000" cy="36576"/>
+            <a:ext cx="12192000" cy="48768"/>
           </a:xfrm>
           <a:prstGeom prst="rect">
             <a:avLst/>
@@ -3916,8 +7950,8 @@
         </p:nvSpPr>
         <p:spPr>
           <a:xfrm>
-            <a:off x="548640" y="137160"/>
-            <a:ext cx="8229600" cy="274320"/>
+            <a:off x="731520" y="182880"/>
+            <a:ext cx="10972800" cy="365760"/>
           </a:xfrm>
           <a:prstGeom prst="rect">
             <a:avLst/>
@@ -3955,8 +7989,8 @@
         </p:nvSpPr>
         <p:spPr>
           <a:xfrm>
-            <a:off x="548640" y="411480"/>
-            <a:ext cx="8046720" cy="457200"/>
+            <a:off x="731520" y="548640"/>
+            <a:ext cx="10728960" cy="609600"/>
           </a:xfrm>
           <a:prstGeom prst="rect">
             <a:avLst/>
@@ -4006,14 +8040,14 @@
           <p:nvPr>
             <p:extLst>
               <p:ext uri="{D42A27DB-BD31-4B8C-83A1-F6EECF244321}">
-                <p14:modId xmlns:p14="http://schemas.microsoft.com/office/powerpoint/2010/main" val="1579011935"/>
+                <p14:modId xmlns:p14="http://schemas.microsoft.com/office/powerpoint/2010/main" val="3696070154"/>
               </p:ext>
             </p:extLst>
           </p:nvPr>
         </p:nvGraphicFramePr>
         <p:xfrm>
-          <a:off x="457200" y="1051560"/>
-          <a:ext cx="8229600" cy="2880360"/>
+          <a:off x="609600" y="1402080"/>
+          <a:ext cx="10972800" cy="3840480"/>
         </p:xfrm>
         <a:graphic>
           <a:graphicData uri="http://schemas.openxmlformats.org/drawingml/2006/table">
@@ -5699,8 +9733,8 @@
         </p:nvSpPr>
         <p:spPr>
           <a:xfrm>
-            <a:off x="548640" y="4160520"/>
-            <a:ext cx="8046720" cy="457200"/>
+            <a:off x="731520" y="5547360"/>
+            <a:ext cx="10728960" cy="609600"/>
           </a:xfrm>
           <a:prstGeom prst="rect">
             <a:avLst/>
@@ -5749,8 +9783,8 @@
         </p:nvSpPr>
         <p:spPr>
           <a:xfrm>
-            <a:off x="548640" y="4663440"/>
-            <a:ext cx="8046720" cy="274320"/>
+            <a:off x="731520" y="6217920"/>
+            <a:ext cx="10728960" cy="365760"/>
           </a:xfrm>
           <a:prstGeom prst="rect">
             <a:avLst/>
@@ -5801,15 +9835,7 @@
 
 <file path=ppt/slides/slide5.xml><?xml version="1.0" encoding="utf-8"?>
 <p:sld xmlns:a="http://schemas.openxmlformats.org/drawingml/2006/main" xmlns:r="http://schemas.openxmlformats.org/officeDocument/2006/relationships" xmlns:p="http://schemas.openxmlformats.org/presentationml/2006/main">
-  <p:cSld name="Slide 5">
-    <p:bg>
-      <p:bgPr>
-        <a:solidFill>
-          <a:srgbClr val="FFFFFF"/>
-        </a:solidFill>
-        <a:effectLst/>
-      </p:bgPr>
-    </p:bg>
+  <p:cSld>
     <p:spTree>
       <p:nvGrpSpPr>
         <p:cNvPr id="1" name=""/>
@@ -5833,7 +9859,7 @@
         <p:spPr>
           <a:xfrm>
             <a:off x="0" y="0"/>
-            <a:ext cx="9144000" cy="36576"/>
+            <a:ext cx="12192000" cy="48768"/>
           </a:xfrm>
           <a:prstGeom prst="rect">
             <a:avLst/>
@@ -5859,8 +9885,8 @@
         </p:nvSpPr>
         <p:spPr>
           <a:xfrm>
-            <a:off x="548640" y="137160"/>
-            <a:ext cx="8229600" cy="274320"/>
+            <a:off x="731520" y="182880"/>
+            <a:ext cx="10972800" cy="365760"/>
           </a:xfrm>
           <a:prstGeom prst="rect">
             <a:avLst/>
@@ -5898,8 +9924,8 @@
         </p:nvSpPr>
         <p:spPr>
           <a:xfrm>
-            <a:off x="548640" y="411480"/>
-            <a:ext cx="8046720" cy="457200"/>
+            <a:off x="731520" y="548640"/>
+            <a:ext cx="10728960" cy="609600"/>
           </a:xfrm>
           <a:prstGeom prst="rect">
             <a:avLst/>
@@ -5948,8 +9974,8 @@
         </p:nvSpPr>
         <p:spPr>
           <a:xfrm>
-            <a:off x="548640" y="1097280"/>
-            <a:ext cx="2377440" cy="411480"/>
+            <a:off x="731520" y="1463040"/>
+            <a:ext cx="3169920" cy="548640"/>
           </a:xfrm>
           <a:prstGeom prst="rect">
             <a:avLst/>
@@ -5975,8 +10001,8 @@
         </p:nvSpPr>
         <p:spPr>
           <a:xfrm>
-            <a:off x="685800" y="1097280"/>
-            <a:ext cx="2103120" cy="411480"/>
+            <a:off x="914400" y="1463040"/>
+            <a:ext cx="2804160" cy="548640"/>
           </a:xfrm>
           <a:prstGeom prst="rect">
             <a:avLst/>
@@ -6014,8 +10040,8 @@
         </p:nvSpPr>
         <p:spPr>
           <a:xfrm>
-            <a:off x="640080" y="1645920"/>
-            <a:ext cx="2194560" cy="2011680"/>
+            <a:off x="853440" y="2194560"/>
+            <a:ext cx="2926080" cy="2682240"/>
           </a:xfrm>
           <a:prstGeom prst="rect">
             <a:avLst/>
@@ -6120,8 +10146,8 @@
         </p:nvSpPr>
         <p:spPr>
           <a:xfrm>
-            <a:off x="3017520" y="1143000"/>
-            <a:ext cx="228600" cy="320040"/>
+            <a:off x="4023360" y="1524000"/>
+            <a:ext cx="304800" cy="426720"/>
           </a:xfrm>
           <a:prstGeom prst="rect">
             <a:avLst/>
@@ -6159,8 +10185,8 @@
         </p:nvSpPr>
         <p:spPr>
           <a:xfrm>
-            <a:off x="3337560" y="1097280"/>
-            <a:ext cx="2377440" cy="411480"/>
+            <a:off x="4450080" y="1463040"/>
+            <a:ext cx="3169920" cy="548640"/>
           </a:xfrm>
           <a:prstGeom prst="rect">
             <a:avLst/>
@@ -6186,8 +10212,8 @@
         </p:nvSpPr>
         <p:spPr>
           <a:xfrm>
-            <a:off x="3474720" y="1097280"/>
-            <a:ext cx="2103120" cy="411480"/>
+            <a:off x="4632960" y="1463040"/>
+            <a:ext cx="2804160" cy="548640"/>
           </a:xfrm>
           <a:prstGeom prst="rect">
             <a:avLst/>
@@ -6225,8 +10251,8 @@
         </p:nvSpPr>
         <p:spPr>
           <a:xfrm>
-            <a:off x="3429000" y="1645920"/>
-            <a:ext cx="2194560" cy="2011680"/>
+            <a:off x="4572000" y="2194560"/>
+            <a:ext cx="2926080" cy="2682240"/>
           </a:xfrm>
           <a:prstGeom prst="rect">
             <a:avLst/>
@@ -6331,8 +10357,8 @@
         </p:nvSpPr>
         <p:spPr>
           <a:xfrm>
-            <a:off x="5806440" y="1143000"/>
-            <a:ext cx="228600" cy="320040"/>
+            <a:off x="7741920" y="1524000"/>
+            <a:ext cx="304800" cy="426720"/>
           </a:xfrm>
           <a:prstGeom prst="rect">
             <a:avLst/>
@@ -6370,8 +10396,8 @@
         </p:nvSpPr>
         <p:spPr>
           <a:xfrm>
-            <a:off x="6126480" y="1097280"/>
-            <a:ext cx="2377440" cy="411480"/>
+            <a:off x="8168640" y="1463040"/>
+            <a:ext cx="3169920" cy="548640"/>
           </a:xfrm>
           <a:prstGeom prst="rect">
             <a:avLst/>
@@ -6397,8 +10423,8 @@
         </p:nvSpPr>
         <p:spPr>
           <a:xfrm>
-            <a:off x="6263640" y="1097280"/>
-            <a:ext cx="2103120" cy="411480"/>
+            <a:off x="8351520" y="1463040"/>
+            <a:ext cx="2804160" cy="548640"/>
           </a:xfrm>
           <a:prstGeom prst="rect">
             <a:avLst/>
@@ -6436,8 +10462,8 @@
         </p:nvSpPr>
         <p:spPr>
           <a:xfrm>
-            <a:off x="6217920" y="1645920"/>
-            <a:ext cx="2194560" cy="2011680"/>
+            <a:off x="8290560" y="2194560"/>
+            <a:ext cx="2926080" cy="2682240"/>
           </a:xfrm>
           <a:prstGeom prst="rect">
             <a:avLst/>
@@ -6542,8 +10568,8 @@
         </p:nvSpPr>
         <p:spPr>
           <a:xfrm>
-            <a:off x="548640" y="3703320"/>
-            <a:ext cx="8046720" cy="18288"/>
+            <a:off x="731520" y="4937760"/>
+            <a:ext cx="10728960" cy="24384"/>
           </a:xfrm>
           <a:prstGeom prst="rect">
             <a:avLst/>
@@ -6569,8 +10595,8 @@
         </p:nvSpPr>
         <p:spPr>
           <a:xfrm>
-            <a:off x="548640" y="3840480"/>
-            <a:ext cx="8046720" cy="320040"/>
+            <a:off x="731520" y="5120640"/>
+            <a:ext cx="10728960" cy="426720"/>
           </a:xfrm>
           <a:prstGeom prst="rect">
             <a:avLst/>
@@ -6619,8 +10645,8 @@
         </p:nvSpPr>
         <p:spPr>
           <a:xfrm>
-            <a:off x="548640" y="4297680"/>
-            <a:ext cx="8046720" cy="457200"/>
+            <a:off x="731520" y="5730240"/>
+            <a:ext cx="10728960" cy="609600"/>
           </a:xfrm>
           <a:prstGeom prst="rect">
             <a:avLst/>
@@ -6670,6 +10696,287 @@
 </file>
 
 <file path=ppt/theme/theme1.xml><?xml version="1.0" encoding="utf-8"?>
+<a:theme xmlns:a="http://schemas.openxmlformats.org/drawingml/2006/main" name="Johnson and Johnson: Core program">
+  <a:themeElements>
+    <a:clrScheme name="JNJ">
+      <a:dk1>
+        <a:srgbClr val="000000"/>
+      </a:dk1>
+      <a:lt1>
+        <a:srgbClr val="FFFFFF"/>
+      </a:lt1>
+      <a:dk2>
+        <a:srgbClr val="F1EFED"/>
+      </a:dk2>
+      <a:lt2>
+        <a:srgbClr val="6E6159"/>
+      </a:lt2>
+      <a:accent1>
+        <a:srgbClr val="EB1700"/>
+      </a:accent1>
+      <a:accent2>
+        <a:srgbClr val="D5CFC9"/>
+      </a:accent2>
+      <a:accent3>
+        <a:srgbClr val="000000"/>
+      </a:accent3>
+      <a:accent4>
+        <a:srgbClr val="A39992"/>
+      </a:accent4>
+      <a:accent5>
+        <a:srgbClr val="69D0FF"/>
+      </a:accent5>
+      <a:accent6>
+        <a:srgbClr val="004585"/>
+      </a:accent6>
+      <a:hlink>
+        <a:srgbClr val="000000"/>
+      </a:hlink>
+      <a:folHlink>
+        <a:srgbClr val="000000"/>
+      </a:folHlink>
+    </a:clrScheme>
+    <a:fontScheme name="J&amp;J">
+      <a:majorFont>
+        <a:latin typeface="Johnson Display"/>
+        <a:ea typeface=""/>
+        <a:cs typeface=""/>
+      </a:majorFont>
+      <a:minorFont>
+        <a:latin typeface="Johnson Text"/>
+        <a:ea typeface=""/>
+        <a:cs typeface=""/>
+      </a:minorFont>
+    </a:fontScheme>
+    <a:fmtScheme name="Office">
+      <a:fillStyleLst>
+        <a:solidFill>
+          <a:schemeClr val="phClr"/>
+        </a:solidFill>
+        <a:gradFill rotWithShape="1">
+          <a:gsLst>
+            <a:gs pos="0">
+              <a:schemeClr val="phClr">
+                <a:lumMod val="110000"/>
+                <a:satMod val="105000"/>
+                <a:tint val="67000"/>
+              </a:schemeClr>
+            </a:gs>
+            <a:gs pos="50000">
+              <a:schemeClr val="phClr">
+                <a:lumMod val="105000"/>
+                <a:satMod val="103000"/>
+                <a:tint val="73000"/>
+              </a:schemeClr>
+            </a:gs>
+            <a:gs pos="100000">
+              <a:schemeClr val="phClr">
+                <a:lumMod val="105000"/>
+                <a:satMod val="109000"/>
+                <a:tint val="81000"/>
+              </a:schemeClr>
+            </a:gs>
+          </a:gsLst>
+          <a:lin ang="5400000" scaled="0"/>
+        </a:gradFill>
+        <a:gradFill rotWithShape="1">
+          <a:gsLst>
+            <a:gs pos="0">
+              <a:schemeClr val="phClr">
+                <a:satMod val="103000"/>
+                <a:lumMod val="102000"/>
+                <a:tint val="94000"/>
+              </a:schemeClr>
+            </a:gs>
+            <a:gs pos="50000">
+              <a:schemeClr val="phClr">
+                <a:satMod val="110000"/>
+                <a:lumMod val="100000"/>
+                <a:shade val="100000"/>
+              </a:schemeClr>
+            </a:gs>
+            <a:gs pos="100000">
+              <a:schemeClr val="phClr">
+                <a:lumMod val="99000"/>
+                <a:satMod val="120000"/>
+                <a:shade val="78000"/>
+              </a:schemeClr>
+            </a:gs>
+          </a:gsLst>
+          <a:lin ang="5400000" scaled="0"/>
+        </a:gradFill>
+      </a:fillStyleLst>
+      <a:lnStyleLst>
+        <a:ln w="6350" cap="flat" cmpd="sng" algn="ctr">
+          <a:solidFill>
+            <a:schemeClr val="phClr"/>
+          </a:solidFill>
+          <a:prstDash val="solid"/>
+          <a:miter lim="800000"/>
+        </a:ln>
+        <a:ln w="12700" cap="flat" cmpd="sng" algn="ctr">
+          <a:solidFill>
+            <a:schemeClr val="phClr"/>
+          </a:solidFill>
+          <a:prstDash val="solid"/>
+          <a:miter lim="800000"/>
+        </a:ln>
+        <a:ln w="19050" cap="flat" cmpd="sng" algn="ctr">
+          <a:solidFill>
+            <a:schemeClr val="phClr"/>
+          </a:solidFill>
+          <a:prstDash val="solid"/>
+          <a:miter lim="800000"/>
+        </a:ln>
+      </a:lnStyleLst>
+      <a:effectStyleLst>
+        <a:effectStyle>
+          <a:effectLst/>
+        </a:effectStyle>
+        <a:effectStyle>
+          <a:effectLst/>
+        </a:effectStyle>
+        <a:effectStyle>
+          <a:effectLst>
+            <a:outerShdw blurRad="57150" dist="19050" dir="5400000" algn="ctr" rotWithShape="0">
+              <a:srgbClr val="000000">
+                <a:alpha val="63000"/>
+              </a:srgbClr>
+            </a:outerShdw>
+          </a:effectLst>
+        </a:effectStyle>
+      </a:effectStyleLst>
+      <a:bgFillStyleLst>
+        <a:solidFill>
+          <a:schemeClr val="phClr"/>
+        </a:solidFill>
+        <a:solidFill>
+          <a:schemeClr val="phClr">
+            <a:tint val="95000"/>
+            <a:satMod val="170000"/>
+          </a:schemeClr>
+        </a:solidFill>
+        <a:gradFill rotWithShape="1">
+          <a:gsLst>
+            <a:gs pos="0">
+              <a:schemeClr val="phClr">
+                <a:tint val="93000"/>
+                <a:satMod val="150000"/>
+                <a:shade val="98000"/>
+                <a:lumMod val="102000"/>
+              </a:schemeClr>
+            </a:gs>
+            <a:gs pos="50000">
+              <a:schemeClr val="phClr">
+                <a:tint val="98000"/>
+                <a:satMod val="130000"/>
+                <a:shade val="90000"/>
+                <a:lumMod val="103000"/>
+              </a:schemeClr>
+            </a:gs>
+            <a:gs pos="100000">
+              <a:schemeClr val="phClr">
+                <a:shade val="63000"/>
+                <a:satMod val="120000"/>
+              </a:schemeClr>
+            </a:gs>
+          </a:gsLst>
+          <a:lin ang="5400000" scaled="0"/>
+        </a:gradFill>
+      </a:bgFillStyleLst>
+    </a:fmtScheme>
+  </a:themeElements>
+  <a:objectDefaults>
+    <a:spDef>
+      <a:spPr>
+        <a:ln>
+          <a:noFill/>
+        </a:ln>
+      </a:spPr>
+      <a:bodyPr rtlCol="0" anchor="ctr"/>
+      <a:lstStyle>
+        <a:defPPr algn="ctr">
+          <a:defRPr dirty="0" smtClean="0">
+            <a:latin typeface="+mn-lt"/>
+          </a:defRPr>
+        </a:defPPr>
+      </a:lstStyle>
+      <a:style>
+        <a:lnRef idx="2">
+          <a:schemeClr val="accent1">
+            <a:shade val="50000"/>
+          </a:schemeClr>
+        </a:lnRef>
+        <a:fillRef idx="1">
+          <a:schemeClr val="accent1"/>
+        </a:fillRef>
+        <a:effectRef idx="0">
+          <a:schemeClr val="accent1"/>
+        </a:effectRef>
+        <a:fontRef idx="minor">
+          <a:schemeClr val="lt1"/>
+        </a:fontRef>
+      </a:style>
+    </a:spDef>
+    <a:lnDef>
+      <a:spPr>
+        <a:ln w="12700">
+          <a:solidFill>
+            <a:schemeClr val="tx1"/>
+          </a:solidFill>
+          <a:tailEnd type="none" w="lg" len="med"/>
+        </a:ln>
+      </a:spPr>
+      <a:bodyPr/>
+      <a:lstStyle/>
+      <a:style>
+        <a:lnRef idx="1">
+          <a:schemeClr val="accent1"/>
+        </a:lnRef>
+        <a:fillRef idx="0">
+          <a:schemeClr val="accent1"/>
+        </a:fillRef>
+        <a:effectRef idx="0">
+          <a:schemeClr val="accent1"/>
+        </a:effectRef>
+        <a:fontRef idx="minor">
+          <a:schemeClr val="tx1"/>
+        </a:fontRef>
+      </a:style>
+    </a:lnDef>
+    <a:txDef>
+      <a:spPr>
+        <a:noFill/>
+      </a:spPr>
+      <a:bodyPr wrap="square" lIns="0" tIns="0" rIns="0" bIns="0" rtlCol="0">
+        <a:spAutoFit/>
+      </a:bodyPr>
+      <a:lstStyle>
+        <a:defPPr marL="285750" indent="-285750" algn="l">
+          <a:buFont typeface="Arial" panose="020B0604020202020204" pitchFamily="34" charset="0"/>
+          <a:buChar char="•"/>
+          <a:defRPr sz="1800" kern="1200" dirty="0" err="1" smtClean="0">
+            <a:solidFill>
+              <a:schemeClr val="tx1"/>
+            </a:solidFill>
+            <a:latin typeface="+mn-lt"/>
+            <a:ea typeface="+mn-ea"/>
+            <a:cs typeface="+mn-cs"/>
+          </a:defRPr>
+        </a:defPPr>
+      </a:lstStyle>
+    </a:txDef>
+  </a:objectDefaults>
+  <a:extraClrSchemeLst/>
+  <a:extLst>
+    <a:ext uri="{05A4C25C-085E-4340-85A3-A5531E510DB2}">
+      <thm15:themeFamily xmlns:thm15="http://schemas.microsoft.com/office/thememl/2012/main" name="Presentation17" id="{394D0032-BD9F-402F-8F7F-EE4A19CBFCFD}" vid="{2A5D37E6-4E79-4761-9EC9-188CB4B007EE}"/>
+    </a:ext>
+  </a:extLst>
+</a:theme>
+</file>
+
+<file path=ppt/theme/theme2.xml><?xml version="1.0" encoding="utf-8"?>
 <a:theme xmlns:a="http://schemas.openxmlformats.org/drawingml/2006/main" name="Office Theme">
   <a:themeElements>
     <a:clrScheme name="Office">
@@ -6964,321 +11271,6 @@
 </a:theme>
 </file>
 
-<file path=ppt/theme/theme2.xml><?xml version="1.0" encoding="utf-8"?>
-<a:theme xmlns:a="http://schemas.openxmlformats.org/drawingml/2006/main" name="Office Theme">
-  <a:themeElements>
-    <a:clrScheme name="Office">
-      <a:dk1>
-        <a:sysClr val="windowText" lastClr="000000"/>
-      </a:dk1>
-      <a:lt1>
-        <a:sysClr val="window" lastClr="FFFFFF"/>
-      </a:lt1>
-      <a:dk2>
-        <a:srgbClr val="0E2841"/>
-      </a:dk2>
-      <a:lt2>
-        <a:srgbClr val="E8E8E8"/>
-      </a:lt2>
-      <a:accent1>
-        <a:srgbClr val="156082"/>
-      </a:accent1>
-      <a:accent2>
-        <a:srgbClr val="E97132"/>
-      </a:accent2>
-      <a:accent3>
-        <a:srgbClr val="196B24"/>
-      </a:accent3>
-      <a:accent4>
-        <a:srgbClr val="0F9ED5"/>
-      </a:accent4>
-      <a:accent5>
-        <a:srgbClr val="A02B93"/>
-      </a:accent5>
-      <a:accent6>
-        <a:srgbClr val="4EA72E"/>
-      </a:accent6>
-      <a:hlink>
-        <a:srgbClr val="467886"/>
-      </a:hlink>
-      <a:folHlink>
-        <a:srgbClr val="96607D"/>
-      </a:folHlink>
-    </a:clrScheme>
-    <a:fontScheme name="Office">
-      <a:majorFont>
-        <a:latin typeface="Aptos Display" panose="02110004020202020204"/>
-        <a:ea typeface=""/>
-        <a:cs typeface=""/>
-        <a:font script="Jpan" typeface="游ゴシック Light"/>
-        <a:font script="Hang" typeface="맑은 고딕"/>
-        <a:font script="Hans" typeface="等线 Light"/>
-        <a:font script="Hant" typeface="新細明體"/>
-        <a:font script="Arab" typeface="Times New Roman"/>
-        <a:font script="Hebr" typeface="Times New Roman"/>
-        <a:font script="Thai" typeface="Angsana New"/>
-        <a:font script="Ethi" typeface="Nyala"/>
-        <a:font script="Beng" typeface="Vrinda"/>
-        <a:font script="Gujr" typeface="Shruti"/>
-        <a:font script="Khmr" typeface="MoolBoran"/>
-        <a:font script="Knda" typeface="Tunga"/>
-        <a:font script="Guru" typeface="Raavi"/>
-        <a:font script="Cans" typeface="Euphemia"/>
-        <a:font script="Cher" typeface="Plantagenet Cherokee"/>
-        <a:font script="Yiii" typeface="Microsoft Yi Baiti"/>
-        <a:font script="Tibt" typeface="Microsoft Himalaya"/>
-        <a:font script="Thaa" typeface="MV Boli"/>
-        <a:font script="Deva" typeface="Mangal"/>
-        <a:font script="Telu" typeface="Gautami"/>
-        <a:font script="Taml" typeface="Latha"/>
-        <a:font script="Syrc" typeface="Estrangelo Edessa"/>
-        <a:font script="Orya" typeface="Kalinga"/>
-        <a:font script="Mlym" typeface="Kartika"/>
-        <a:font script="Laoo" typeface="DokChampa"/>
-        <a:font script="Sinh" typeface="Iskoola Pota"/>
-        <a:font script="Mong" typeface="Mongolian Baiti"/>
-        <a:font script="Viet" typeface="Times New Roman"/>
-        <a:font script="Uigh" typeface="Microsoft Uighur"/>
-        <a:font script="Geor" typeface="Sylfaen"/>
-        <a:font script="Armn" typeface="Arial"/>
-        <a:font script="Bugi" typeface="Leelawadee UI"/>
-        <a:font script="Bopo" typeface="Microsoft JhengHei"/>
-        <a:font script="Java" typeface="Javanese Text"/>
-        <a:font script="Lisu" typeface="Segoe UI"/>
-        <a:font script="Mymr" typeface="Myanmar Text"/>
-        <a:font script="Nkoo" typeface="Ebrima"/>
-        <a:font script="Olck" typeface="Nirmala UI"/>
-        <a:font script="Osma" typeface="Ebrima"/>
-        <a:font script="Phag" typeface="Phagspa"/>
-        <a:font script="Syrn" typeface="Estrangelo Edessa"/>
-        <a:font script="Syrj" typeface="Estrangelo Edessa"/>
-        <a:font script="Syre" typeface="Estrangelo Edessa"/>
-        <a:font script="Sora" typeface="Nirmala UI"/>
-        <a:font script="Tale" typeface="Microsoft Tai Le"/>
-        <a:font script="Talu" typeface="Microsoft New Tai Lue"/>
-        <a:font script="Tfng" typeface="Ebrima"/>
-      </a:majorFont>
-      <a:minorFont>
-        <a:latin typeface="Aptos" panose="02110004020202020204"/>
-        <a:ea typeface=""/>
-        <a:cs typeface=""/>
-        <a:font script="Jpan" typeface="游ゴシック"/>
-        <a:font script="Hang" typeface="맑은 고딕"/>
-        <a:font script="Hans" typeface="等线"/>
-        <a:font script="Hant" typeface="新細明體"/>
-        <a:font script="Arab" typeface="Arial"/>
-        <a:font script="Hebr" typeface="Arial"/>
-        <a:font script="Thai" typeface="Cordia New"/>
-        <a:font script="Ethi" typeface="Nyala"/>
-        <a:font script="Beng" typeface="Vrinda"/>
-        <a:font script="Gujr" typeface="Shruti"/>
-        <a:font script="Khmr" typeface="DaunPenh"/>
-        <a:font script="Knda" typeface="Tunga"/>
-        <a:font script="Guru" typeface="Raavi"/>
-        <a:font script="Cans" typeface="Euphemia"/>
-        <a:font script="Cher" typeface="Plantagenet Cherokee"/>
-        <a:font script="Yiii" typeface="Microsoft Yi Baiti"/>
-        <a:font script="Tibt" typeface="Microsoft Himalaya"/>
-        <a:font script="Thaa" typeface="MV Boli"/>
-        <a:font script="Deva" typeface="Mangal"/>
-        <a:font script="Telu" typeface="Gautami"/>
-        <a:font script="Taml" typeface="Latha"/>
-        <a:font script="Syrc" typeface="Estrangelo Edessa"/>
-        <a:font script="Orya" typeface="Kalinga"/>
-        <a:font script="Mlym" typeface="Kartika"/>
-        <a:font script="Laoo" typeface="DokChampa"/>
-        <a:font script="Sinh" typeface="Iskoola Pota"/>
-        <a:font script="Mong" typeface="Mongolian Baiti"/>
-        <a:font script="Viet" typeface="Arial"/>
-        <a:font script="Uigh" typeface="Microsoft Uighur"/>
-        <a:font script="Geor" typeface="Sylfaen"/>
-        <a:font script="Armn" typeface="Arial"/>
-        <a:font script="Bugi" typeface="Leelawadee UI"/>
-        <a:font script="Bopo" typeface="Microsoft JhengHei"/>
-        <a:font script="Java" typeface="Javanese Text"/>
-        <a:font script="Lisu" typeface="Segoe UI"/>
-        <a:font script="Mymr" typeface="Myanmar Text"/>
-        <a:font script="Nkoo" typeface="Ebrima"/>
-        <a:font script="Olck" typeface="Nirmala UI"/>
-        <a:font script="Osma" typeface="Ebrima"/>
-        <a:font script="Phag" typeface="Phagspa"/>
-        <a:font script="Syrn" typeface="Estrangelo Edessa"/>
-        <a:font script="Syrj" typeface="Estrangelo Edessa"/>
-        <a:font script="Syre" typeface="Estrangelo Edessa"/>
-        <a:font script="Sora" typeface="Nirmala UI"/>
-        <a:font script="Tale" typeface="Microsoft Tai Le"/>
-        <a:font script="Talu" typeface="Microsoft New Tai Lue"/>
-        <a:font script="Tfng" typeface="Ebrima"/>
-      </a:minorFont>
-    </a:fontScheme>
-    <a:fmtScheme name="Office">
-      <a:fillStyleLst>
-        <a:solidFill>
-          <a:schemeClr val="phClr"/>
-        </a:solidFill>
-        <a:gradFill rotWithShape="1">
-          <a:gsLst>
-            <a:gs pos="0">
-              <a:schemeClr val="phClr">
-                <a:lumMod val="110000"/>
-                <a:satMod val="105000"/>
-                <a:tint val="67000"/>
-              </a:schemeClr>
-            </a:gs>
-            <a:gs pos="50000">
-              <a:schemeClr val="phClr">
-                <a:lumMod val="105000"/>
-                <a:satMod val="103000"/>
-                <a:tint val="73000"/>
-              </a:schemeClr>
-            </a:gs>
-            <a:gs pos="100000">
-              <a:schemeClr val="phClr">
-                <a:lumMod val="105000"/>
-                <a:satMod val="109000"/>
-                <a:tint val="81000"/>
-              </a:schemeClr>
-            </a:gs>
-          </a:gsLst>
-          <a:lin ang="5400000" scaled="0"/>
-        </a:gradFill>
-        <a:gradFill rotWithShape="1">
-          <a:gsLst>
-            <a:gs pos="0">
-              <a:schemeClr val="phClr">
-                <a:satMod val="103000"/>
-                <a:lumMod val="102000"/>
-                <a:tint val="94000"/>
-              </a:schemeClr>
-            </a:gs>
-            <a:gs pos="50000">
-              <a:schemeClr val="phClr">
-                <a:satMod val="110000"/>
-                <a:lumMod val="100000"/>
-                <a:shade val="100000"/>
-              </a:schemeClr>
-            </a:gs>
-            <a:gs pos="100000">
-              <a:schemeClr val="phClr">
-                <a:lumMod val="99000"/>
-                <a:satMod val="120000"/>
-                <a:shade val="78000"/>
-              </a:schemeClr>
-            </a:gs>
-          </a:gsLst>
-          <a:lin ang="5400000" scaled="0"/>
-        </a:gradFill>
-      </a:fillStyleLst>
-      <a:lnStyleLst>
-        <a:ln w="12700" cap="flat" cmpd="sng" algn="ctr">
-          <a:solidFill>
-            <a:schemeClr val="phClr"/>
-          </a:solidFill>
-          <a:prstDash val="solid"/>
-          <a:miter lim="800000"/>
-        </a:ln>
-        <a:ln w="19050" cap="flat" cmpd="sng" algn="ctr">
-          <a:solidFill>
-            <a:schemeClr val="phClr"/>
-          </a:solidFill>
-          <a:prstDash val="solid"/>
-          <a:miter lim="800000"/>
-        </a:ln>
-        <a:ln w="25400" cap="flat" cmpd="sng" algn="ctr">
-          <a:solidFill>
-            <a:schemeClr val="phClr"/>
-          </a:solidFill>
-          <a:prstDash val="solid"/>
-          <a:miter lim="800000"/>
-        </a:ln>
-      </a:lnStyleLst>
-      <a:effectStyleLst>
-        <a:effectStyle>
-          <a:effectLst/>
-        </a:effectStyle>
-        <a:effectStyle>
-          <a:effectLst/>
-        </a:effectStyle>
-        <a:effectStyle>
-          <a:effectLst>
-            <a:outerShdw blurRad="57150" dist="19050" dir="5400000" algn="ctr" rotWithShape="0">
-              <a:srgbClr val="000000">
-                <a:alpha val="63000"/>
-              </a:srgbClr>
-            </a:outerShdw>
-          </a:effectLst>
-        </a:effectStyle>
-      </a:effectStyleLst>
-      <a:bgFillStyleLst>
-        <a:solidFill>
-          <a:schemeClr val="phClr"/>
-        </a:solidFill>
-        <a:solidFill>
-          <a:schemeClr val="phClr">
-            <a:tint val="95000"/>
-            <a:satMod val="170000"/>
-          </a:schemeClr>
-        </a:solidFill>
-        <a:gradFill rotWithShape="1">
-          <a:gsLst>
-            <a:gs pos="0">
-              <a:schemeClr val="phClr">
-                <a:tint val="93000"/>
-                <a:satMod val="150000"/>
-                <a:shade val="98000"/>
-                <a:lumMod val="102000"/>
-              </a:schemeClr>
-            </a:gs>
-            <a:gs pos="50000">
-              <a:schemeClr val="phClr">
-                <a:tint val="98000"/>
-                <a:satMod val="130000"/>
-                <a:shade val="90000"/>
-                <a:lumMod val="103000"/>
-              </a:schemeClr>
-            </a:gs>
-            <a:gs pos="100000">
-              <a:schemeClr val="phClr">
-                <a:shade val="63000"/>
-                <a:satMod val="120000"/>
-              </a:schemeClr>
-            </a:gs>
-          </a:gsLst>
-          <a:lin ang="5400000" scaled="0"/>
-        </a:gradFill>
-      </a:bgFillStyleLst>
-    </a:fmtScheme>
-  </a:themeElements>
-  <a:objectDefaults>
-    <a:lnDef>
-      <a:spPr/>
-      <a:bodyPr/>
-      <a:lstStyle/>
-      <a:style>
-        <a:lnRef idx="2">
-          <a:schemeClr val="accent1"/>
-        </a:lnRef>
-        <a:fillRef idx="0">
-          <a:schemeClr val="accent1"/>
-        </a:fillRef>
-        <a:effectRef idx="1">
-          <a:schemeClr val="accent1"/>
-        </a:effectRef>
-        <a:fontRef idx="minor">
-          <a:schemeClr val="tx1"/>
-        </a:fontRef>
-      </a:style>
-    </a:lnDef>
-  </a:objectDefaults>
-  <a:extraClrSchemeLst/>
-  <a:extLst>
-    <a:ext uri="{05A4C25C-085E-4340-85A3-A5531E510DB2}">
-      <thm15:themeFamily xmlns:thm15="http://schemas.microsoft.com/office/thememl/2012/main" name="Office Theme" id="{2E142A2C-CD16-42D6-873A-C26D2A0506FA}" vid="{1BDDFF52-6CD6-40A5-AB3C-68EB2F1E4D0A}"/>
-    </a:ext>
-  </a:extLst>
-</a:theme>
-</file>
-
 <file path=docMetadata/LabelInfo.xml><?xml version="1.0" encoding="utf-8"?>
 <clbl:labelList xmlns:clbl="http://schemas.microsoft.com/office/2020/mipLabelMetadata">
   <clbl:label id="{3ca48ea3-8c75-4d36-b64f-70604b11fd22}" enabled="1" method="Standard" siteId="{3ac94b33-9135-4821-9502-eafda6592a35}" removed="0"/>
